--- a/slides/02-core-concepts.pptx
+++ b/slides/02-core-concepts.pptx
@@ -14,9 +14,11 @@
     <p:sldId id="262" r:id="rId8"/>
     <p:sldId id="263" r:id="rId9"/>
     <p:sldId id="264" r:id="rId10"/>
+    <p:sldId id="265" r:id="rId11"/>
+    <p:sldId id="266" r:id="rId12"/>
   </p:sldIdLst>
   <p:notesMasterIdLst>
-    <p:notesMasterId r:id="rId11"/>
+    <p:notesMasterId r:id="rId13"/>
   </p:notesMasterIdLst>
   <p:sldSz cx="12192000" cy="6858000"/>
   <p:notesSz cx="6858000" cy="12192000"/>
@@ -552,6 +554,182 @@
 </p:notes>
 </file>
 
+<file path=ppt/notesSlides/notesSlide10.xml><?xml version="1.0" encoding="utf-8"?>
+<p:notes xmlns:a="http://schemas.openxmlformats.org/drawingml/2006/main" xmlns:r="http://schemas.openxmlformats.org/officeDocument/2006/relationships" xmlns:p="http://schemas.openxmlformats.org/presentationml/2006/main">
+  <p:cSld>
+    <p:spTree>
+      <p:nvGrpSpPr>
+        <p:cNvPr id="1" name=""/>
+        <p:cNvGrpSpPr/>
+        <p:nvPr/>
+      </p:nvGrpSpPr>
+      <p:grpSpPr>
+        <a:xfrm>
+          <a:off x="0" y="0"/>
+          <a:ext cx="0" cy="0"/>
+          <a:chOff x="0" y="0"/>
+          <a:chExt cx="0" cy="0"/>
+        </a:xfrm>
+      </p:grpSpPr>
+      <p:sp>
+        <p:nvSpPr>
+          <p:cNvPr id="2" name="Slide Image Placeholder 1"/>
+          <p:cNvSpPr>
+            <a:spLocks noGrp="1" noRot="1" noChangeAspect="1"/>
+          </p:cNvSpPr>
+          <p:nvPr>
+            <p:ph type="sldImg"/>
+          </p:nvPr>
+        </p:nvSpPr>
+        <p:spPr/>
+      </p:sp>
+      <p:sp>
+        <p:nvSpPr>
+          <p:cNvPr id="3" name="Notes Placeholder 2"/>
+          <p:cNvSpPr>
+            <a:spLocks noGrp="1"/>
+          </p:cNvSpPr>
+          <p:nvPr>
+            <p:ph type="body" idx="1"/>
+          </p:nvPr>
+        </p:nvSpPr>
+        <p:spPr/>
+        <p:txBody>
+          <a:bodyPr/>
+          <a:lstStyle/>
+          <a:p>
+            <a:r>
+              <a:rPr lang="en-US" dirty="0"/>
+              <a:t/>
+            </a:r>
+            <a:endParaRPr lang="en-US" dirty="0"/>
+          </a:p>
+        </p:txBody>
+      </p:sp>
+      <p:sp>
+        <p:nvSpPr>
+          <p:cNvPr id="4" name="Slide Number Placeholder 3"/>
+          <p:cNvSpPr>
+            <a:spLocks noGrp="1"/>
+          </p:cNvSpPr>
+          <p:nvPr>
+            <p:ph type="sldNum" sz="quarter" idx="10"/>
+          </p:nvPr>
+        </p:nvSpPr>
+        <p:spPr/>
+        <p:txBody>
+          <a:bodyPr/>
+          <a:lstStyle/>
+          <a:p>
+            <a:fld id="{F7021451-1387-4CA6-816F-3879F97B5CBC}" type="slidenum">
+              <a:rPr lang="en-US"/>
+              <a:t>10</a:t>
+            </a:fld>
+            <a:endParaRPr lang="en-US"/>
+          </a:p>
+        </p:txBody>
+      </p:sp>
+    </p:spTree>
+    <p:extLst>
+      <p:ext uri="{BB962C8B-B14F-4D97-AF65-F5344CB8AC3E}">
+        <p14:creationId xmlns:p14="http://schemas.microsoft.com/office/powerpoint/2010/main" val="1024086991"/>
+      </p:ext>
+    </p:extLst>
+  </p:cSld>
+  <p:clrMapOvr>
+    <a:masterClrMapping/>
+  </p:clrMapOvr>
+</p:notes>
+</file>
+
+<file path=ppt/notesSlides/notesSlide11.xml><?xml version="1.0" encoding="utf-8"?>
+<p:notes xmlns:a="http://schemas.openxmlformats.org/drawingml/2006/main" xmlns:r="http://schemas.openxmlformats.org/officeDocument/2006/relationships" xmlns:p="http://schemas.openxmlformats.org/presentationml/2006/main">
+  <p:cSld>
+    <p:spTree>
+      <p:nvGrpSpPr>
+        <p:cNvPr id="1" name=""/>
+        <p:cNvGrpSpPr/>
+        <p:nvPr/>
+      </p:nvGrpSpPr>
+      <p:grpSpPr>
+        <a:xfrm>
+          <a:off x="0" y="0"/>
+          <a:ext cx="0" cy="0"/>
+          <a:chOff x="0" y="0"/>
+          <a:chExt cx="0" cy="0"/>
+        </a:xfrm>
+      </p:grpSpPr>
+      <p:sp>
+        <p:nvSpPr>
+          <p:cNvPr id="2" name="Slide Image Placeholder 1"/>
+          <p:cNvSpPr>
+            <a:spLocks noGrp="1" noRot="1" noChangeAspect="1"/>
+          </p:cNvSpPr>
+          <p:nvPr>
+            <p:ph type="sldImg"/>
+          </p:nvPr>
+        </p:nvSpPr>
+        <p:spPr/>
+      </p:sp>
+      <p:sp>
+        <p:nvSpPr>
+          <p:cNvPr id="3" name="Notes Placeholder 2"/>
+          <p:cNvSpPr>
+            <a:spLocks noGrp="1"/>
+          </p:cNvSpPr>
+          <p:nvPr>
+            <p:ph type="body" idx="1"/>
+          </p:nvPr>
+        </p:nvSpPr>
+        <p:spPr/>
+        <p:txBody>
+          <a:bodyPr/>
+          <a:lstStyle/>
+          <a:p>
+            <a:r>
+              <a:rPr lang="en-US" dirty="0"/>
+              <a:t/>
+            </a:r>
+            <a:endParaRPr lang="en-US" dirty="0"/>
+          </a:p>
+        </p:txBody>
+      </p:sp>
+      <p:sp>
+        <p:nvSpPr>
+          <p:cNvPr id="4" name="Slide Number Placeholder 3"/>
+          <p:cNvSpPr>
+            <a:spLocks noGrp="1"/>
+          </p:cNvSpPr>
+          <p:nvPr>
+            <p:ph type="sldNum" sz="quarter" idx="10"/>
+          </p:nvPr>
+        </p:nvSpPr>
+        <p:spPr/>
+        <p:txBody>
+          <a:bodyPr/>
+          <a:lstStyle/>
+          <a:p>
+            <a:fld id="{F7021451-1387-4CA6-816F-3879F97B5CBC}" type="slidenum">
+              <a:rPr lang="en-US"/>
+              <a:t>11</a:t>
+            </a:fld>
+            <a:endParaRPr lang="en-US"/>
+          </a:p>
+        </p:txBody>
+      </p:sp>
+    </p:spTree>
+    <p:extLst>
+      <p:ext uri="{BB962C8B-B14F-4D97-AF65-F5344CB8AC3E}">
+        <p14:creationId xmlns:p14="http://schemas.microsoft.com/office/powerpoint/2010/main" val="1024086991"/>
+      </p:ext>
+    </p:extLst>
+  </p:cSld>
+  <p:clrMapOvr>
+    <a:masterClrMapping/>
+  </p:clrMapOvr>
+</p:notes>
+</file>
+
 <file path=ppt/notesSlides/notesSlide2.xml><?xml version="1.0" encoding="utf-8"?>
 <p:notes xmlns:a="http://schemas.openxmlformats.org/drawingml/2006/main" xmlns:r="http://schemas.openxmlformats.org/officeDocument/2006/relationships" xmlns:p="http://schemas.openxmlformats.org/presentationml/2006/main">
   <p:cSld>
@@ -1985,7 +2163,7 @@
                 <a:ea typeface="Courier New" pitchFamily="34" charset="-122"/>
                 <a:cs typeface="Courier New" pitchFamily="34" charset="-120"/>
               </a:rPr>
-              <a:t>1 / 9</a:t>
+              <a:t>1 / 11</a:t>
             </a:r>
             <a:endParaRPr lang="en-US" sz="1080" dirty="0"/>
           </a:p>
@@ -2135,7 +2313,7 @@
               <a:buNone/>
             </a:pPr>
             <a:r>
-              <a:rPr lang="en-US" sz="2280" b="1" dirty="0">
+              <a:rPr lang="en-US" sz="2040" b="1" dirty="0">
                 <a:solidFill>
                   <a:srgbClr val="5FE0C5"/>
                 </a:solidFill>
@@ -2149,7 +2327,7 @@
               <a:buNone/>
             </a:pPr>
             <a:r>
-              <a:rPr lang="en-US" sz="2280" dirty="0">
+              <a:rPr lang="en-US" sz="2040" dirty="0">
                 <a:solidFill>
                   <a:srgbClr val="B8C0D0"/>
                 </a:solidFill>
@@ -2163,7 +2341,7 @@
               <a:buNone/>
             </a:pPr>
             <a:r>
-              <a:rPr lang="en-US" sz="2280" b="1" dirty="0">
+              <a:rPr lang="en-US" sz="2040" b="1" dirty="0">
                 <a:solidFill>
                   <a:srgbClr val="5FE0C5"/>
                 </a:solidFill>
@@ -2171,13 +2349,13 @@
                 <a:ea typeface="Courier New" pitchFamily="34" charset="-122"/>
                 <a:cs typeface="Courier New" pitchFamily="34" charset="-120"/>
               </a:rPr>
-              <a:t>Messages</a:t>
+              <a:t>Context Window</a:t>
             </a:r>
             <a:pPr algn="ctr" indent="0" marL="0">
               <a:buNone/>
             </a:pPr>
             <a:r>
-              <a:rPr lang="en-US" sz="2280" dirty="0">
+              <a:rPr lang="en-US" sz="2040" dirty="0">
                 <a:solidFill>
                   <a:srgbClr val="B8C0D0"/>
                 </a:solidFill>
@@ -2191,7 +2369,7 @@
               <a:buNone/>
             </a:pPr>
             <a:r>
-              <a:rPr lang="en-US" sz="2280" b="1" dirty="0">
+              <a:rPr lang="en-US" sz="2040" b="1" dirty="0">
                 <a:solidFill>
                   <a:srgbClr val="5FE0C5"/>
                 </a:solidFill>
@@ -2199,9 +2377,37 @@
                 <a:ea typeface="Courier New" pitchFamily="34" charset="-122"/>
                 <a:cs typeface="Courier New" pitchFamily="34" charset="-120"/>
               </a:rPr>
-              <a:t>ChatOptions</a:t>
-            </a:r>
-            <a:endParaRPr lang="en-US" sz="2280" dirty="0"/>
+              <a:t>Prompt</a:t>
+            </a:r>
+            <a:pPr algn="ctr" indent="0" marL="0">
+              <a:buNone/>
+            </a:pPr>
+            <a:r>
+              <a:rPr lang="en-US" sz="2040" dirty="0">
+                <a:solidFill>
+                  <a:srgbClr val="B8C0D0"/>
+                </a:solidFill>
+                <a:latin typeface="Calibri" pitchFamily="34" charset="0"/>
+                <a:ea typeface="Calibri" pitchFamily="34" charset="-122"/>
+                <a:cs typeface="Calibri" pitchFamily="34" charset="-120"/>
+              </a:rPr>
+              <a:t>  ·  </a:t>
+            </a:r>
+            <a:pPr algn="ctr" indent="0" marL="0">
+              <a:buNone/>
+            </a:pPr>
+            <a:r>
+              <a:rPr lang="en-US" sz="2040" b="1" dirty="0">
+                <a:solidFill>
+                  <a:srgbClr val="5FE0C5"/>
+                </a:solidFill>
+                <a:latin typeface="Courier New" pitchFamily="34" charset="0"/>
+                <a:ea typeface="Courier New" pitchFamily="34" charset="-122"/>
+                <a:cs typeface="Courier New" pitchFamily="34" charset="-120"/>
+              </a:rPr>
+              <a:t>Temperature</a:t>
+            </a:r>
+            <a:endParaRPr lang="en-US" sz="2040" dirty="0"/>
           </a:p>
         </p:txBody>
       </p:sp>
@@ -2341,6 +2547,2196 @@
               <a:t>Spring AI with Llama  ·  PromptToApps</a:t>
             </a:r>
             <a:endParaRPr lang="en-US" sz="1560" dirty="0"/>
+          </a:p>
+        </p:txBody>
+      </p:sp>
+    </p:spTree>
+  </p:cSld>
+  <p:clrMapOvr>
+    <a:masterClrMapping/>
+  </p:clrMapOvr>
+</p:sld>
+</file>
+
+<file path=ppt/slides/slide10.xml><?xml version="1.0" encoding="utf-8"?>
+<p:sld xmlns:a="http://schemas.openxmlformats.org/drawingml/2006/main" xmlns:r="http://schemas.openxmlformats.org/officeDocument/2006/relationships" xmlns:p="http://schemas.openxmlformats.org/presentationml/2006/main">
+  <p:cSld name="Slide 10">
+    <p:bg>
+      <p:bgPr>
+        <a:solidFill>
+          <a:srgbClr val="0A0F1C"/>
+        </a:solidFill>
+      </p:bgPr>
+    </p:bg>
+    <p:spTree>
+      <p:nvGrpSpPr>
+        <p:cNvPr id="1" name=""/>
+        <p:cNvGrpSpPr/>
+        <p:nvPr/>
+      </p:nvGrpSpPr>
+      <p:grpSpPr>
+        <a:xfrm>
+          <a:off x="0" y="0"/>
+          <a:ext cx="0" cy="0"/>
+          <a:chOff x="0" y="0"/>
+          <a:chExt cx="0" cy="0"/>
+        </a:xfrm>
+      </p:grpSpPr>
+      <p:sp>
+        <p:nvSpPr>
+          <p:cNvPr id="2" name="Shape 0"/>
+          <p:cNvSpPr/>
+          <p:nvPr/>
+        </p:nvSpPr>
+        <p:spPr>
+          <a:xfrm>
+            <a:off x="457200" y="365760"/>
+            <a:ext cx="731520" cy="457200"/>
+          </a:xfrm>
+          <a:prstGeom prst="line">
+            <a:avLst/>
+          </a:prstGeom>
+          <a:noFill/>
+          <a:ln w="9525">
+            <a:solidFill>
+              <a:srgbClr val="5B6478">
+                <a:alpha val="30000"/>
+              </a:srgbClr>
+            </a:solidFill>
+            <a:prstDash val="solid"/>
+          </a:ln>
+        </p:spPr>
+      </p:sp>
+      <p:sp>
+        <p:nvSpPr>
+          <p:cNvPr id="3" name="Shape 1"/>
+          <p:cNvSpPr/>
+          <p:nvPr/>
+        </p:nvSpPr>
+        <p:spPr>
+          <a:xfrm>
+            <a:off x="822960" y="822960"/>
+            <a:ext cx="365760" cy="731520"/>
+          </a:xfrm>
+          <a:prstGeom prst="line">
+            <a:avLst/>
+          </a:prstGeom>
+          <a:noFill/>
+          <a:ln w="9525">
+            <a:solidFill>
+              <a:srgbClr val="5B6478">
+                <a:alpha val="30000"/>
+              </a:srgbClr>
+            </a:solidFill>
+            <a:prstDash val="solid"/>
+          </a:ln>
+        </p:spPr>
+      </p:sp>
+      <p:sp>
+        <p:nvSpPr>
+          <p:cNvPr id="4" name="Shape 2"/>
+          <p:cNvSpPr/>
+          <p:nvPr/>
+        </p:nvSpPr>
+        <p:spPr>
+          <a:xfrm flipV="1">
+            <a:off x="822960" y="1280160"/>
+            <a:ext cx="914400" cy="274320"/>
+          </a:xfrm>
+          <a:prstGeom prst="line">
+            <a:avLst/>
+          </a:prstGeom>
+          <a:noFill/>
+          <a:ln w="9525">
+            <a:solidFill>
+              <a:srgbClr val="5B6478">
+                <a:alpha val="30000"/>
+              </a:srgbClr>
+            </a:solidFill>
+            <a:prstDash val="solid"/>
+          </a:ln>
+        </p:spPr>
+      </p:sp>
+      <p:sp>
+        <p:nvSpPr>
+          <p:cNvPr id="5" name="Shape 3"/>
+          <p:cNvSpPr/>
+          <p:nvPr/>
+        </p:nvSpPr>
+        <p:spPr>
+          <a:xfrm>
+            <a:off x="429768" y="338328"/>
+            <a:ext cx="54864" cy="54864"/>
+          </a:xfrm>
+          <a:prstGeom prst="ellipse">
+            <a:avLst/>
+          </a:prstGeom>
+          <a:solidFill>
+            <a:srgbClr val="8B98AC">
+              <a:alpha val="60000"/>
+            </a:srgbClr>
+          </a:solidFill>
+          <a:ln/>
+        </p:spPr>
+      </p:sp>
+      <p:sp>
+        <p:nvSpPr>
+          <p:cNvPr id="6" name="Shape 4"/>
+          <p:cNvSpPr/>
+          <p:nvPr/>
+        </p:nvSpPr>
+        <p:spPr>
+          <a:xfrm>
+            <a:off x="1161288" y="795528"/>
+            <a:ext cx="54864" cy="54864"/>
+          </a:xfrm>
+          <a:prstGeom prst="ellipse">
+            <a:avLst/>
+          </a:prstGeom>
+          <a:solidFill>
+            <a:srgbClr val="8B98AC">
+              <a:alpha val="60000"/>
+            </a:srgbClr>
+          </a:solidFill>
+          <a:ln/>
+        </p:spPr>
+      </p:sp>
+      <p:sp>
+        <p:nvSpPr>
+          <p:cNvPr id="7" name="Shape 5"/>
+          <p:cNvSpPr/>
+          <p:nvPr/>
+        </p:nvSpPr>
+        <p:spPr>
+          <a:xfrm>
+            <a:off x="795528" y="1527048"/>
+            <a:ext cx="54864" cy="54864"/>
+          </a:xfrm>
+          <a:prstGeom prst="ellipse">
+            <a:avLst/>
+          </a:prstGeom>
+          <a:solidFill>
+            <a:srgbClr val="8B98AC">
+              <a:alpha val="60000"/>
+            </a:srgbClr>
+          </a:solidFill>
+          <a:ln/>
+        </p:spPr>
+      </p:sp>
+      <p:sp>
+        <p:nvSpPr>
+          <p:cNvPr id="8" name="Shape 6"/>
+          <p:cNvSpPr/>
+          <p:nvPr/>
+        </p:nvSpPr>
+        <p:spPr>
+          <a:xfrm>
+            <a:off x="1709928" y="1252728"/>
+            <a:ext cx="54864" cy="54864"/>
+          </a:xfrm>
+          <a:prstGeom prst="ellipse">
+            <a:avLst/>
+          </a:prstGeom>
+          <a:solidFill>
+            <a:srgbClr val="8B98AC">
+              <a:alpha val="60000"/>
+            </a:srgbClr>
+          </a:solidFill>
+          <a:ln/>
+        </p:spPr>
+      </p:sp>
+      <p:sp>
+        <p:nvSpPr>
+          <p:cNvPr id="9" name="Shape 7"/>
+          <p:cNvSpPr/>
+          <p:nvPr/>
+        </p:nvSpPr>
+        <p:spPr>
+          <a:xfrm flipV="1">
+            <a:off x="10789920" y="5486400"/>
+            <a:ext cx="731520" cy="548640"/>
+          </a:xfrm>
+          <a:prstGeom prst="line">
+            <a:avLst/>
+          </a:prstGeom>
+          <a:noFill/>
+          <a:ln w="9525">
+            <a:solidFill>
+              <a:srgbClr val="5B6478">
+                <a:alpha val="30000"/>
+              </a:srgbClr>
+            </a:solidFill>
+            <a:prstDash val="solid"/>
+          </a:ln>
+        </p:spPr>
+      </p:sp>
+      <p:sp>
+        <p:nvSpPr>
+          <p:cNvPr id="10" name="Shape 8"/>
+          <p:cNvSpPr/>
+          <p:nvPr/>
+        </p:nvSpPr>
+        <p:spPr>
+          <a:xfrm flipV="1">
+            <a:off x="11155680" y="4754880"/>
+            <a:ext cx="365760" cy="731520"/>
+          </a:xfrm>
+          <a:prstGeom prst="line">
+            <a:avLst/>
+          </a:prstGeom>
+          <a:noFill/>
+          <a:ln w="9525">
+            <a:solidFill>
+              <a:srgbClr val="5B6478">
+                <a:alpha val="30000"/>
+              </a:srgbClr>
+            </a:solidFill>
+            <a:prstDash val="solid"/>
+          </a:ln>
+        </p:spPr>
+      </p:sp>
+      <p:sp>
+        <p:nvSpPr>
+          <p:cNvPr id="11" name="Shape 9"/>
+          <p:cNvSpPr/>
+          <p:nvPr/>
+        </p:nvSpPr>
+        <p:spPr>
+          <a:xfrm>
+            <a:off x="11155680" y="4754880"/>
+            <a:ext cx="731520" cy="365760"/>
+          </a:xfrm>
+          <a:prstGeom prst="line">
+            <a:avLst/>
+          </a:prstGeom>
+          <a:noFill/>
+          <a:ln w="9525">
+            <a:solidFill>
+              <a:srgbClr val="5B6478">
+                <a:alpha val="30000"/>
+              </a:srgbClr>
+            </a:solidFill>
+            <a:prstDash val="solid"/>
+          </a:ln>
+        </p:spPr>
+      </p:sp>
+      <p:sp>
+        <p:nvSpPr>
+          <p:cNvPr id="12" name="Shape 10"/>
+          <p:cNvSpPr/>
+          <p:nvPr/>
+        </p:nvSpPr>
+        <p:spPr>
+          <a:xfrm>
+            <a:off x="10762488" y="6007608"/>
+            <a:ext cx="54864" cy="54864"/>
+          </a:xfrm>
+          <a:prstGeom prst="ellipse">
+            <a:avLst/>
+          </a:prstGeom>
+          <a:solidFill>
+            <a:srgbClr val="8B98AC">
+              <a:alpha val="60000"/>
+            </a:srgbClr>
+          </a:solidFill>
+          <a:ln/>
+        </p:spPr>
+      </p:sp>
+      <p:sp>
+        <p:nvSpPr>
+          <p:cNvPr id="13" name="Shape 11"/>
+          <p:cNvSpPr/>
+          <p:nvPr/>
+        </p:nvSpPr>
+        <p:spPr>
+          <a:xfrm>
+            <a:off x="11494008" y="5458968"/>
+            <a:ext cx="54864" cy="54864"/>
+          </a:xfrm>
+          <a:prstGeom prst="ellipse">
+            <a:avLst/>
+          </a:prstGeom>
+          <a:solidFill>
+            <a:srgbClr val="8B98AC">
+              <a:alpha val="60000"/>
+            </a:srgbClr>
+          </a:solidFill>
+          <a:ln/>
+        </p:spPr>
+      </p:sp>
+      <p:sp>
+        <p:nvSpPr>
+          <p:cNvPr id="14" name="Shape 12"/>
+          <p:cNvSpPr/>
+          <p:nvPr/>
+        </p:nvSpPr>
+        <p:spPr>
+          <a:xfrm>
+            <a:off x="11128248" y="4727448"/>
+            <a:ext cx="54864" cy="54864"/>
+          </a:xfrm>
+          <a:prstGeom prst="ellipse">
+            <a:avLst/>
+          </a:prstGeom>
+          <a:solidFill>
+            <a:srgbClr val="8B98AC">
+              <a:alpha val="60000"/>
+            </a:srgbClr>
+          </a:solidFill>
+          <a:ln/>
+        </p:spPr>
+      </p:sp>
+      <p:sp>
+        <p:nvSpPr>
+          <p:cNvPr id="15" name="Shape 13"/>
+          <p:cNvSpPr/>
+          <p:nvPr/>
+        </p:nvSpPr>
+        <p:spPr>
+          <a:xfrm>
+            <a:off x="11859768" y="5093208"/>
+            <a:ext cx="54864" cy="54864"/>
+          </a:xfrm>
+          <a:prstGeom prst="ellipse">
+            <a:avLst/>
+          </a:prstGeom>
+          <a:solidFill>
+            <a:srgbClr val="8B98AC">
+              <a:alpha val="60000"/>
+            </a:srgbClr>
+          </a:solidFill>
+          <a:ln/>
+        </p:spPr>
+      </p:sp>
+      <p:sp>
+        <p:nvSpPr>
+          <p:cNvPr id="16" name="Text 14"/>
+          <p:cNvSpPr/>
+          <p:nvPr/>
+        </p:nvSpPr>
+        <p:spPr>
+          <a:xfrm>
+            <a:off x="457200" y="6355080"/>
+            <a:ext cx="2743200" cy="274320"/>
+          </a:xfrm>
+          <a:prstGeom prst="rect">
+            <a:avLst/>
+          </a:prstGeom>
+          <a:noFill/>
+          <a:ln/>
+        </p:spPr>
+        <p:txBody>
+          <a:bodyPr wrap="square" lIns="0" tIns="0" rIns="0" bIns="0" rtlCol="0" anchor="ctr"/>
+          <a:lstStyle/>
+          <a:p>
+            <a:pPr indent="0" marL="0">
+              <a:buNone/>
+            </a:pPr>
+            <a:r>
+              <a:rPr lang="en-US" sz="1080" dirty="0">
+                <a:solidFill>
+                  <a:srgbClr val="5B6478"/>
+                </a:solidFill>
+                <a:latin typeface="Courier New" pitchFamily="34" charset="0"/>
+                <a:ea typeface="Courier New" pitchFamily="34" charset="-122"/>
+                <a:cs typeface="Courier New" pitchFamily="34" charset="-120"/>
+              </a:rPr>
+              <a:t>PromptToApps</a:t>
+            </a:r>
+            <a:endParaRPr lang="en-US" sz="1080" dirty="0"/>
+          </a:p>
+        </p:txBody>
+      </p:sp>
+      <p:sp>
+        <p:nvSpPr>
+          <p:cNvPr id="17" name="Text 15"/>
+          <p:cNvSpPr/>
+          <p:nvPr/>
+        </p:nvSpPr>
+        <p:spPr>
+          <a:xfrm>
+            <a:off x="11247120" y="6355080"/>
+            <a:ext cx="731520" cy="274320"/>
+          </a:xfrm>
+          <a:prstGeom prst="rect">
+            <a:avLst/>
+          </a:prstGeom>
+          <a:noFill/>
+          <a:ln/>
+        </p:spPr>
+        <p:txBody>
+          <a:bodyPr wrap="square" lIns="0" tIns="0" rIns="0" bIns="0" rtlCol="0" anchor="ctr"/>
+          <a:lstStyle/>
+          <a:p>
+            <a:pPr algn="r" indent="0" marL="0">
+              <a:buNone/>
+            </a:pPr>
+            <a:r>
+              <a:rPr lang="en-US" sz="1080" dirty="0">
+                <a:solidFill>
+                  <a:srgbClr val="5B6478"/>
+                </a:solidFill>
+                <a:latin typeface="Courier New" pitchFamily="34" charset="0"/>
+                <a:ea typeface="Courier New" pitchFamily="34" charset="-122"/>
+                <a:cs typeface="Courier New" pitchFamily="34" charset="-120"/>
+              </a:rPr>
+              <a:t>10 / 11</a:t>
+            </a:r>
+            <a:endParaRPr lang="en-US" sz="1080" dirty="0"/>
+          </a:p>
+        </p:txBody>
+      </p:sp>
+      <p:sp>
+        <p:nvSpPr>
+          <p:cNvPr id="18" name="Text 16"/>
+          <p:cNvSpPr/>
+          <p:nvPr/>
+        </p:nvSpPr>
+        <p:spPr>
+          <a:xfrm>
+            <a:off x="640080" y="164592"/>
+            <a:ext cx="7315200" cy="274320"/>
+          </a:xfrm>
+          <a:prstGeom prst="rect">
+            <a:avLst/>
+          </a:prstGeom>
+          <a:noFill/>
+          <a:ln/>
+        </p:spPr>
+        <p:txBody>
+          <a:bodyPr wrap="square" lIns="0" tIns="0" rIns="0" bIns="0" rtlCol="0" anchor="ctr"/>
+          <a:lstStyle/>
+          <a:p>
+            <a:pPr indent="0" marL="0">
+              <a:buNone/>
+            </a:pPr>
+            <a:r>
+              <a:rPr lang="en-US" sz="1440" spc="200" kern="0" dirty="0">
+                <a:solidFill>
+                  <a:srgbClr val="5FE0C5"/>
+                </a:solidFill>
+                <a:latin typeface="Courier New" pitchFamily="34" charset="0"/>
+                <a:ea typeface="Courier New" pitchFamily="34" charset="-122"/>
+                <a:cs typeface="Courier New" pitchFamily="34" charset="-120"/>
+              </a:rPr>
+              <a:t>ENJOYING THIS?</a:t>
+            </a:r>
+            <a:endParaRPr lang="en-US" sz="1440" dirty="0"/>
+          </a:p>
+        </p:txBody>
+      </p:sp>
+      <p:sp>
+        <p:nvSpPr>
+          <p:cNvPr id="19" name="Text 17"/>
+          <p:cNvSpPr/>
+          <p:nvPr/>
+        </p:nvSpPr>
+        <p:spPr>
+          <a:xfrm>
+            <a:off x="640080" y="457200"/>
+            <a:ext cx="10881360" cy="640080"/>
+          </a:xfrm>
+          <a:prstGeom prst="rect">
+            <a:avLst/>
+          </a:prstGeom>
+          <a:noFill/>
+          <a:ln/>
+        </p:spPr>
+        <p:txBody>
+          <a:bodyPr wrap="square" lIns="0" tIns="0" rIns="0" bIns="0" rtlCol="0" anchor="ctr"/>
+          <a:lstStyle/>
+          <a:p>
+            <a:pPr algn="ctr" indent="0" marL="0">
+              <a:buNone/>
+            </a:pPr>
+            <a:r>
+              <a:rPr lang="en-US" sz="3360" b="1" dirty="0">
+                <a:solidFill>
+                  <a:srgbClr val="F2A93B"/>
+                </a:solidFill>
+                <a:latin typeface="Courier New" pitchFamily="34" charset="0"/>
+                <a:ea typeface="Courier New" pitchFamily="34" charset="-122"/>
+                <a:cs typeface="Courier New" pitchFamily="34" charset="-120"/>
+              </a:rPr>
+              <a:t>Like &amp; Subscribe</a:t>
+            </a:r>
+            <a:endParaRPr lang="en-US" sz="3360" dirty="0"/>
+          </a:p>
+        </p:txBody>
+      </p:sp>
+      <p:sp>
+        <p:nvSpPr>
+          <p:cNvPr id="20" name="Text 18"/>
+          <p:cNvSpPr/>
+          <p:nvPr/>
+        </p:nvSpPr>
+        <p:spPr>
+          <a:xfrm>
+            <a:off x="640080" y="1417320"/>
+            <a:ext cx="10881360" cy="548640"/>
+          </a:xfrm>
+          <a:prstGeom prst="rect">
+            <a:avLst/>
+          </a:prstGeom>
+          <a:noFill/>
+          <a:ln/>
+        </p:spPr>
+        <p:txBody>
+          <a:bodyPr wrap="square" lIns="0" tIns="0" rIns="0" bIns="0" rtlCol="0" anchor="ctr"/>
+          <a:lstStyle/>
+          <a:p>
+            <a:pPr algn="ctr" indent="0" marL="0">
+              <a:buNone/>
+            </a:pPr>
+            <a:r>
+              <a:rPr lang="en-US" sz="2040" dirty="0">
+                <a:solidFill>
+                  <a:srgbClr val="B8C0D0"/>
+                </a:solidFill>
+                <a:latin typeface="Calibri" pitchFamily="34" charset="0"/>
+                <a:ea typeface="Calibri" pitchFamily="34" charset="-122"/>
+                <a:cs typeface="Calibri" pitchFamily="34" charset="-120"/>
+              </a:rPr>
+              <a:t>If this helped, a like and a subscribe genuinely help the series reach more developers.</a:t>
+            </a:r>
+            <a:endParaRPr lang="en-US" sz="2040" dirty="0"/>
+          </a:p>
+        </p:txBody>
+      </p:sp>
+      <p:sp>
+        <p:nvSpPr>
+          <p:cNvPr id="21" name="Shape 19"/>
+          <p:cNvSpPr/>
+          <p:nvPr/>
+        </p:nvSpPr>
+        <p:spPr>
+          <a:xfrm>
+            <a:off x="822960" y="2286000"/>
+            <a:ext cx="3200400" cy="2148840"/>
+          </a:xfrm>
+          <a:prstGeom prst="roundRect">
+            <a:avLst>
+              <a:gd name="adj" fmla="val 5957"/>
+            </a:avLst>
+          </a:prstGeom>
+          <a:solidFill>
+            <a:srgbClr val="121A2E"/>
+          </a:solidFill>
+          <a:ln w="19050">
+            <a:solidFill>
+              <a:srgbClr val="F2A93B"/>
+            </a:solidFill>
+            <a:prstDash val="solid"/>
+          </a:ln>
+          <a:effectLst>
+            <a:outerShdw sx="100000" sy="100000" kx="0" ky="0" algn="bl" rotWithShape="0" blurRad="101600" dist="38100" dir="2700000">
+              <a:srgbClr val="000000">
+                <a:alpha val="25000"/>
+              </a:srgbClr>
+            </a:outerShdw>
+          </a:effectLst>
+        </p:spPr>
+      </p:sp>
+      <p:sp>
+        <p:nvSpPr>
+          <p:cNvPr id="22" name="Text 20"/>
+          <p:cNvSpPr/>
+          <p:nvPr/>
+        </p:nvSpPr>
+        <p:spPr>
+          <a:xfrm>
+            <a:off x="822960" y="2542032"/>
+            <a:ext cx="3200400" cy="731520"/>
+          </a:xfrm>
+          <a:prstGeom prst="rect">
+            <a:avLst/>
+          </a:prstGeom>
+          <a:noFill/>
+          <a:ln/>
+        </p:spPr>
+        <p:txBody>
+          <a:bodyPr wrap="square" lIns="0" tIns="0" rIns="0" bIns="0" rtlCol="0" anchor="ctr"/>
+          <a:lstStyle/>
+          <a:p>
+            <a:pPr algn="ctr" indent="0" marL="0">
+              <a:buNone/>
+            </a:pPr>
+            <a:r>
+              <a:rPr lang="en-US" sz="4400" dirty="0">
+                <a:solidFill>
+                  <a:srgbClr val="F2A93B"/>
+                </a:solidFill>
+                <a:latin typeface="Calibri" pitchFamily="34" charset="0"/>
+                <a:ea typeface="Calibri" pitchFamily="34" charset="-122"/>
+                <a:cs typeface="Calibri" pitchFamily="34" charset="-120"/>
+              </a:rPr>
+              <a:t>👍</a:t>
+            </a:r>
+            <a:endParaRPr lang="en-US" sz="4400" dirty="0"/>
+          </a:p>
+        </p:txBody>
+      </p:sp>
+      <p:sp>
+        <p:nvSpPr>
+          <p:cNvPr id="23" name="Text 21"/>
+          <p:cNvSpPr/>
+          <p:nvPr/>
+        </p:nvSpPr>
+        <p:spPr>
+          <a:xfrm>
+            <a:off x="822960" y="3310128"/>
+            <a:ext cx="3200400" cy="457200"/>
+          </a:xfrm>
+          <a:prstGeom prst="rect">
+            <a:avLst/>
+          </a:prstGeom>
+          <a:noFill/>
+          <a:ln/>
+        </p:spPr>
+        <p:txBody>
+          <a:bodyPr wrap="square" lIns="0" tIns="0" rIns="0" bIns="0" rtlCol="0" anchor="ctr"/>
+          <a:lstStyle/>
+          <a:p>
+            <a:pPr algn="ctr" indent="0" marL="0">
+              <a:buNone/>
+            </a:pPr>
+            <a:r>
+              <a:rPr lang="en-US" sz="2280" b="1" dirty="0">
+                <a:solidFill>
+                  <a:srgbClr val="F2A93B"/>
+                </a:solidFill>
+                <a:latin typeface="Courier New" pitchFamily="34" charset="0"/>
+                <a:ea typeface="Courier New" pitchFamily="34" charset="-122"/>
+                <a:cs typeface="Courier New" pitchFamily="34" charset="-120"/>
+              </a:rPr>
+              <a:t>Like</a:t>
+            </a:r>
+            <a:endParaRPr lang="en-US" sz="2280" dirty="0"/>
+          </a:p>
+        </p:txBody>
+      </p:sp>
+      <p:sp>
+        <p:nvSpPr>
+          <p:cNvPr id="24" name="Text 22"/>
+          <p:cNvSpPr/>
+          <p:nvPr/>
+        </p:nvSpPr>
+        <p:spPr>
+          <a:xfrm>
+            <a:off x="1051560" y="3767328"/>
+            <a:ext cx="2743200" cy="594360"/>
+          </a:xfrm>
+          <a:prstGeom prst="rect">
+            <a:avLst/>
+          </a:prstGeom>
+          <a:noFill/>
+          <a:ln/>
+        </p:spPr>
+        <p:txBody>
+          <a:bodyPr wrap="square" lIns="0" tIns="0" rIns="0" bIns="0" rtlCol="0" anchor="t"/>
+          <a:lstStyle/>
+          <a:p>
+            <a:pPr algn="ctr" indent="0" marL="0">
+              <a:lnSpc>
+                <a:spcPct val="110000"/>
+              </a:lnSpc>
+              <a:buNone/>
+            </a:pPr>
+            <a:r>
+              <a:rPr lang="en-US" sz="1440" dirty="0">
+                <a:solidFill>
+                  <a:srgbClr val="E5E9F0"/>
+                </a:solidFill>
+                <a:latin typeface="Calibri" pitchFamily="34" charset="0"/>
+                <a:ea typeface="Calibri" pitchFamily="34" charset="-122"/>
+                <a:cs typeface="Calibri" pitchFamily="34" charset="-120"/>
+              </a:rPr>
+              <a:t>Tap like if this made Spring AI click.</a:t>
+            </a:r>
+            <a:endParaRPr lang="en-US" sz="1440" dirty="0"/>
+          </a:p>
+        </p:txBody>
+      </p:sp>
+      <p:sp>
+        <p:nvSpPr>
+          <p:cNvPr id="25" name="Shape 23"/>
+          <p:cNvSpPr/>
+          <p:nvPr/>
+        </p:nvSpPr>
+        <p:spPr>
+          <a:xfrm>
+            <a:off x="4480560" y="2286000"/>
+            <a:ext cx="3200400" cy="2148840"/>
+          </a:xfrm>
+          <a:prstGeom prst="roundRect">
+            <a:avLst>
+              <a:gd name="adj" fmla="val 5957"/>
+            </a:avLst>
+          </a:prstGeom>
+          <a:solidFill>
+            <a:srgbClr val="121A2E"/>
+          </a:solidFill>
+          <a:ln w="19050">
+            <a:solidFill>
+              <a:srgbClr val="5FE0C5"/>
+            </a:solidFill>
+            <a:prstDash val="solid"/>
+          </a:ln>
+          <a:effectLst>
+            <a:outerShdw sx="100000" sy="100000" kx="0" ky="0" algn="bl" rotWithShape="0" blurRad="101600" dist="38100" dir="2700000">
+              <a:srgbClr val="000000">
+                <a:alpha val="25000"/>
+              </a:srgbClr>
+            </a:outerShdw>
+          </a:effectLst>
+        </p:spPr>
+      </p:sp>
+      <p:sp>
+        <p:nvSpPr>
+          <p:cNvPr id="26" name="Text 24"/>
+          <p:cNvSpPr/>
+          <p:nvPr/>
+        </p:nvSpPr>
+        <p:spPr>
+          <a:xfrm>
+            <a:off x="4480560" y="2542032"/>
+            <a:ext cx="3200400" cy="731520"/>
+          </a:xfrm>
+          <a:prstGeom prst="rect">
+            <a:avLst/>
+          </a:prstGeom>
+          <a:noFill/>
+          <a:ln/>
+        </p:spPr>
+        <p:txBody>
+          <a:bodyPr wrap="square" lIns="0" tIns="0" rIns="0" bIns="0" rtlCol="0" anchor="ctr"/>
+          <a:lstStyle/>
+          <a:p>
+            <a:pPr algn="ctr" indent="0" marL="0">
+              <a:buNone/>
+            </a:pPr>
+            <a:r>
+              <a:rPr lang="en-US" sz="4400" dirty="0">
+                <a:solidFill>
+                  <a:srgbClr val="5FE0C5"/>
+                </a:solidFill>
+                <a:latin typeface="Calibri" pitchFamily="34" charset="0"/>
+                <a:ea typeface="Calibri" pitchFamily="34" charset="-122"/>
+                <a:cs typeface="Calibri" pitchFamily="34" charset="-120"/>
+              </a:rPr>
+              <a:t>🔔</a:t>
+            </a:r>
+            <a:endParaRPr lang="en-US" sz="4400" dirty="0"/>
+          </a:p>
+        </p:txBody>
+      </p:sp>
+      <p:sp>
+        <p:nvSpPr>
+          <p:cNvPr id="27" name="Text 25"/>
+          <p:cNvSpPr/>
+          <p:nvPr/>
+        </p:nvSpPr>
+        <p:spPr>
+          <a:xfrm>
+            <a:off x="4480560" y="3310128"/>
+            <a:ext cx="3200400" cy="457200"/>
+          </a:xfrm>
+          <a:prstGeom prst="rect">
+            <a:avLst/>
+          </a:prstGeom>
+          <a:noFill/>
+          <a:ln/>
+        </p:spPr>
+        <p:txBody>
+          <a:bodyPr wrap="square" lIns="0" tIns="0" rIns="0" bIns="0" rtlCol="0" anchor="ctr"/>
+          <a:lstStyle/>
+          <a:p>
+            <a:pPr algn="ctr" indent="0" marL="0">
+              <a:buNone/>
+            </a:pPr>
+            <a:r>
+              <a:rPr lang="en-US" sz="2280" b="1" dirty="0">
+                <a:solidFill>
+                  <a:srgbClr val="5FE0C5"/>
+                </a:solidFill>
+                <a:latin typeface="Courier New" pitchFamily="34" charset="0"/>
+                <a:ea typeface="Courier New" pitchFamily="34" charset="-122"/>
+                <a:cs typeface="Courier New" pitchFamily="34" charset="-120"/>
+              </a:rPr>
+              <a:t>Subscribe</a:t>
+            </a:r>
+            <a:endParaRPr lang="en-US" sz="2280" dirty="0"/>
+          </a:p>
+        </p:txBody>
+      </p:sp>
+      <p:sp>
+        <p:nvSpPr>
+          <p:cNvPr id="28" name="Text 26"/>
+          <p:cNvSpPr/>
+          <p:nvPr/>
+        </p:nvSpPr>
+        <p:spPr>
+          <a:xfrm>
+            <a:off x="4709160" y="3767328"/>
+            <a:ext cx="2743200" cy="594360"/>
+          </a:xfrm>
+          <a:prstGeom prst="rect">
+            <a:avLst/>
+          </a:prstGeom>
+          <a:noFill/>
+          <a:ln/>
+        </p:spPr>
+        <p:txBody>
+          <a:bodyPr wrap="square" lIns="0" tIns="0" rIns="0" bIns="0" rtlCol="0" anchor="t"/>
+          <a:lstStyle/>
+          <a:p>
+            <a:pPr algn="ctr" indent="0" marL="0">
+              <a:lnSpc>
+                <a:spcPct val="110000"/>
+              </a:lnSpc>
+              <a:buNone/>
+            </a:pPr>
+            <a:r>
+              <a:rPr lang="en-US" sz="1440" dirty="0">
+                <a:solidFill>
+                  <a:srgbClr val="E5E9F0"/>
+                </a:solidFill>
+                <a:latin typeface="Calibri" pitchFamily="34" charset="0"/>
+                <a:ea typeface="Calibri" pitchFamily="34" charset="-122"/>
+                <a:cs typeface="Calibri" pitchFamily="34" charset="-120"/>
+              </a:rPr>
+              <a:t>Subscribe + bell for every new chapter.</a:t>
+            </a:r>
+            <a:endParaRPr lang="en-US" sz="1440" dirty="0"/>
+          </a:p>
+        </p:txBody>
+      </p:sp>
+      <p:sp>
+        <p:nvSpPr>
+          <p:cNvPr id="29" name="Shape 27"/>
+          <p:cNvSpPr/>
+          <p:nvPr/>
+        </p:nvSpPr>
+        <p:spPr>
+          <a:xfrm>
+            <a:off x="8138160" y="2286000"/>
+            <a:ext cx="3200400" cy="2148840"/>
+          </a:xfrm>
+          <a:prstGeom prst="roundRect">
+            <a:avLst>
+              <a:gd name="adj" fmla="val 5957"/>
+            </a:avLst>
+          </a:prstGeom>
+          <a:solidFill>
+            <a:srgbClr val="121A2E"/>
+          </a:solidFill>
+          <a:ln w="19050">
+            <a:solidFill>
+              <a:srgbClr val="8B98AC"/>
+            </a:solidFill>
+            <a:prstDash val="solid"/>
+          </a:ln>
+          <a:effectLst>
+            <a:outerShdw sx="100000" sy="100000" kx="0" ky="0" algn="bl" rotWithShape="0" blurRad="101600" dist="38100" dir="2700000">
+              <a:srgbClr val="000000">
+                <a:alpha val="25000"/>
+              </a:srgbClr>
+            </a:outerShdw>
+          </a:effectLst>
+        </p:spPr>
+      </p:sp>
+      <p:sp>
+        <p:nvSpPr>
+          <p:cNvPr id="30" name="Text 28"/>
+          <p:cNvSpPr/>
+          <p:nvPr/>
+        </p:nvSpPr>
+        <p:spPr>
+          <a:xfrm>
+            <a:off x="8138160" y="2542032"/>
+            <a:ext cx="3200400" cy="731520"/>
+          </a:xfrm>
+          <a:prstGeom prst="rect">
+            <a:avLst/>
+          </a:prstGeom>
+          <a:noFill/>
+          <a:ln/>
+        </p:spPr>
+        <p:txBody>
+          <a:bodyPr wrap="square" lIns="0" tIns="0" rIns="0" bIns="0" rtlCol="0" anchor="ctr"/>
+          <a:lstStyle/>
+          <a:p>
+            <a:pPr algn="ctr" indent="0" marL="0">
+              <a:buNone/>
+            </a:pPr>
+            <a:r>
+              <a:rPr lang="en-US" sz="4400" dirty="0">
+                <a:solidFill>
+                  <a:srgbClr val="8B98AC"/>
+                </a:solidFill>
+                <a:latin typeface="Calibri" pitchFamily="34" charset="0"/>
+                <a:ea typeface="Calibri" pitchFamily="34" charset="-122"/>
+                <a:cs typeface="Calibri" pitchFamily="34" charset="-120"/>
+              </a:rPr>
+              <a:t>💬</a:t>
+            </a:r>
+            <a:endParaRPr lang="en-US" sz="4400" dirty="0"/>
+          </a:p>
+        </p:txBody>
+      </p:sp>
+      <p:sp>
+        <p:nvSpPr>
+          <p:cNvPr id="31" name="Text 29"/>
+          <p:cNvSpPr/>
+          <p:nvPr/>
+        </p:nvSpPr>
+        <p:spPr>
+          <a:xfrm>
+            <a:off x="8138160" y="3310128"/>
+            <a:ext cx="3200400" cy="457200"/>
+          </a:xfrm>
+          <a:prstGeom prst="rect">
+            <a:avLst/>
+          </a:prstGeom>
+          <a:noFill/>
+          <a:ln/>
+        </p:spPr>
+        <p:txBody>
+          <a:bodyPr wrap="square" lIns="0" tIns="0" rIns="0" bIns="0" rtlCol="0" anchor="ctr"/>
+          <a:lstStyle/>
+          <a:p>
+            <a:pPr algn="ctr" indent="0" marL="0">
+              <a:buNone/>
+            </a:pPr>
+            <a:r>
+              <a:rPr lang="en-US" sz="2280" b="1" dirty="0">
+                <a:solidFill>
+                  <a:srgbClr val="8B98AC"/>
+                </a:solidFill>
+                <a:latin typeface="Courier New" pitchFamily="34" charset="0"/>
+                <a:ea typeface="Courier New" pitchFamily="34" charset="-122"/>
+                <a:cs typeface="Courier New" pitchFamily="34" charset="-120"/>
+              </a:rPr>
+              <a:t>Comment</a:t>
+            </a:r>
+            <a:endParaRPr lang="en-US" sz="2280" dirty="0"/>
+          </a:p>
+        </p:txBody>
+      </p:sp>
+      <p:sp>
+        <p:nvSpPr>
+          <p:cNvPr id="32" name="Text 30"/>
+          <p:cNvSpPr/>
+          <p:nvPr/>
+        </p:nvSpPr>
+        <p:spPr>
+          <a:xfrm>
+            <a:off x="8366760" y="3767328"/>
+            <a:ext cx="2743200" cy="594360"/>
+          </a:xfrm>
+          <a:prstGeom prst="rect">
+            <a:avLst/>
+          </a:prstGeom>
+          <a:noFill/>
+          <a:ln/>
+        </p:spPr>
+        <p:txBody>
+          <a:bodyPr wrap="square" lIns="0" tIns="0" rIns="0" bIns="0" rtlCol="0" anchor="t"/>
+          <a:lstStyle/>
+          <a:p>
+            <a:pPr algn="ctr" indent="0" marL="0">
+              <a:lnSpc>
+                <a:spcPct val="110000"/>
+              </a:lnSpc>
+              <a:buNone/>
+            </a:pPr>
+            <a:r>
+              <a:rPr lang="en-US" sz="1440" dirty="0">
+                <a:solidFill>
+                  <a:srgbClr val="E5E9F0"/>
+                </a:solidFill>
+                <a:latin typeface="Calibri" pitchFamily="34" charset="0"/>
+                <a:ea typeface="Calibri" pitchFamily="34" charset="-122"/>
+                <a:cs typeface="Calibri" pitchFamily="34" charset="-120"/>
+              </a:rPr>
+              <a:t>Ask questions — I read and reply.</a:t>
+            </a:r>
+            <a:endParaRPr lang="en-US" sz="1440" dirty="0"/>
+          </a:p>
+        </p:txBody>
+      </p:sp>
+      <p:sp>
+        <p:nvSpPr>
+          <p:cNvPr id="33" name="Shape 31"/>
+          <p:cNvSpPr/>
+          <p:nvPr/>
+        </p:nvSpPr>
+        <p:spPr>
+          <a:xfrm>
+            <a:off x="4251960" y="5029200"/>
+            <a:ext cx="3657600" cy="0"/>
+          </a:xfrm>
+          <a:prstGeom prst="line">
+            <a:avLst/>
+          </a:prstGeom>
+          <a:noFill/>
+          <a:ln w="12700">
+            <a:solidFill>
+              <a:srgbClr val="5B6478">
+                <a:alpha val="70000"/>
+              </a:srgbClr>
+            </a:solidFill>
+            <a:prstDash val="solid"/>
+          </a:ln>
+        </p:spPr>
+      </p:sp>
+      <p:sp>
+        <p:nvSpPr>
+          <p:cNvPr id="34" name="Shape 32"/>
+          <p:cNvSpPr/>
+          <p:nvPr/>
+        </p:nvSpPr>
+        <p:spPr>
+          <a:xfrm>
+            <a:off x="4210812" y="4988052"/>
+            <a:ext cx="82296" cy="82296"/>
+          </a:xfrm>
+          <a:prstGeom prst="ellipse">
+            <a:avLst/>
+          </a:prstGeom>
+          <a:solidFill>
+            <a:srgbClr val="0A0F1C"/>
+          </a:solidFill>
+          <a:ln w="19050">
+            <a:solidFill>
+              <a:srgbClr val="F2A93B"/>
+            </a:solidFill>
+            <a:prstDash val="solid"/>
+          </a:ln>
+        </p:spPr>
+      </p:sp>
+      <p:sp>
+        <p:nvSpPr>
+          <p:cNvPr id="35" name="Shape 33"/>
+          <p:cNvSpPr/>
+          <p:nvPr/>
+        </p:nvSpPr>
+        <p:spPr>
+          <a:xfrm>
+            <a:off x="6039612" y="4988052"/>
+            <a:ext cx="82296" cy="82296"/>
+          </a:xfrm>
+          <a:prstGeom prst="ellipse">
+            <a:avLst/>
+          </a:prstGeom>
+          <a:solidFill>
+            <a:srgbClr val="0A0F1C"/>
+          </a:solidFill>
+          <a:ln w="19050">
+            <a:solidFill>
+              <a:srgbClr val="8B98AC"/>
+            </a:solidFill>
+            <a:prstDash val="solid"/>
+          </a:ln>
+        </p:spPr>
+      </p:sp>
+      <p:sp>
+        <p:nvSpPr>
+          <p:cNvPr id="36" name="Shape 34"/>
+          <p:cNvSpPr/>
+          <p:nvPr/>
+        </p:nvSpPr>
+        <p:spPr>
+          <a:xfrm>
+            <a:off x="7868412" y="4988052"/>
+            <a:ext cx="82296" cy="82296"/>
+          </a:xfrm>
+          <a:prstGeom prst="ellipse">
+            <a:avLst/>
+          </a:prstGeom>
+          <a:solidFill>
+            <a:srgbClr val="0A0F1C"/>
+          </a:solidFill>
+          <a:ln w="19050">
+            <a:solidFill>
+              <a:srgbClr val="5FE0C5"/>
+            </a:solidFill>
+            <a:prstDash val="solid"/>
+          </a:ln>
+        </p:spPr>
+      </p:sp>
+      <p:sp>
+        <p:nvSpPr>
+          <p:cNvPr id="37" name="Text 35"/>
+          <p:cNvSpPr/>
+          <p:nvPr/>
+        </p:nvSpPr>
+        <p:spPr>
+          <a:xfrm>
+            <a:off x="0" y="5257800"/>
+            <a:ext cx="12161520" cy="365760"/>
+          </a:xfrm>
+          <a:prstGeom prst="rect">
+            <a:avLst/>
+          </a:prstGeom>
+          <a:noFill/>
+          <a:ln/>
+        </p:spPr>
+        <p:txBody>
+          <a:bodyPr wrap="square" lIns="0" tIns="0" rIns="0" bIns="0" rtlCol="0" anchor="ctr"/>
+          <a:lstStyle/>
+          <a:p>
+            <a:pPr algn="ctr" indent="0" marL="0">
+              <a:buNone/>
+            </a:pPr>
+            <a:r>
+              <a:rPr lang="en-US" sz="1560" dirty="0">
+                <a:solidFill>
+                  <a:srgbClr val="8B98AC"/>
+                </a:solidFill>
+                <a:latin typeface="Courier New" pitchFamily="34" charset="0"/>
+                <a:ea typeface="Courier New" pitchFamily="34" charset="-122"/>
+                <a:cs typeface="Courier New" pitchFamily="34" charset="-120"/>
+              </a:rPr>
+              <a:t>New chapter every week  ·  Spring AI with Llama  ·  PromptToApps</a:t>
+            </a:r>
+            <a:endParaRPr lang="en-US" sz="1560" dirty="0"/>
+          </a:p>
+        </p:txBody>
+      </p:sp>
+    </p:spTree>
+  </p:cSld>
+  <p:clrMapOvr>
+    <a:masterClrMapping/>
+  </p:clrMapOvr>
+</p:sld>
+</file>
+
+<file path=ppt/slides/slide11.xml><?xml version="1.0" encoding="utf-8"?>
+<p:sld xmlns:a="http://schemas.openxmlformats.org/drawingml/2006/main" xmlns:r="http://schemas.openxmlformats.org/officeDocument/2006/relationships" xmlns:p="http://schemas.openxmlformats.org/presentationml/2006/main">
+  <p:cSld name="Slide 11">
+    <p:bg>
+      <p:bgPr>
+        <a:solidFill>
+          <a:srgbClr val="0A0F1C"/>
+        </a:solidFill>
+      </p:bgPr>
+    </p:bg>
+    <p:spTree>
+      <p:nvGrpSpPr>
+        <p:cNvPr id="1" name=""/>
+        <p:cNvGrpSpPr/>
+        <p:nvPr/>
+      </p:nvGrpSpPr>
+      <p:grpSpPr>
+        <a:xfrm>
+          <a:off x="0" y="0"/>
+          <a:ext cx="0" cy="0"/>
+          <a:chOff x="0" y="0"/>
+          <a:chExt cx="0" cy="0"/>
+        </a:xfrm>
+      </p:grpSpPr>
+      <p:sp>
+        <p:nvSpPr>
+          <p:cNvPr id="2" name="Shape 0"/>
+          <p:cNvSpPr/>
+          <p:nvPr/>
+        </p:nvSpPr>
+        <p:spPr>
+          <a:xfrm>
+            <a:off x="457200" y="365760"/>
+            <a:ext cx="731520" cy="457200"/>
+          </a:xfrm>
+          <a:prstGeom prst="line">
+            <a:avLst/>
+          </a:prstGeom>
+          <a:noFill/>
+          <a:ln w="9525">
+            <a:solidFill>
+              <a:srgbClr val="5B6478">
+                <a:alpha val="30000"/>
+              </a:srgbClr>
+            </a:solidFill>
+            <a:prstDash val="solid"/>
+          </a:ln>
+        </p:spPr>
+      </p:sp>
+      <p:sp>
+        <p:nvSpPr>
+          <p:cNvPr id="3" name="Shape 1"/>
+          <p:cNvSpPr/>
+          <p:nvPr/>
+        </p:nvSpPr>
+        <p:spPr>
+          <a:xfrm>
+            <a:off x="822960" y="822960"/>
+            <a:ext cx="365760" cy="731520"/>
+          </a:xfrm>
+          <a:prstGeom prst="line">
+            <a:avLst/>
+          </a:prstGeom>
+          <a:noFill/>
+          <a:ln w="9525">
+            <a:solidFill>
+              <a:srgbClr val="5B6478">
+                <a:alpha val="30000"/>
+              </a:srgbClr>
+            </a:solidFill>
+            <a:prstDash val="solid"/>
+          </a:ln>
+        </p:spPr>
+      </p:sp>
+      <p:sp>
+        <p:nvSpPr>
+          <p:cNvPr id="4" name="Shape 2"/>
+          <p:cNvSpPr/>
+          <p:nvPr/>
+        </p:nvSpPr>
+        <p:spPr>
+          <a:xfrm flipV="1">
+            <a:off x="822960" y="1280160"/>
+            <a:ext cx="914400" cy="274320"/>
+          </a:xfrm>
+          <a:prstGeom prst="line">
+            <a:avLst/>
+          </a:prstGeom>
+          <a:noFill/>
+          <a:ln w="9525">
+            <a:solidFill>
+              <a:srgbClr val="5B6478">
+                <a:alpha val="30000"/>
+              </a:srgbClr>
+            </a:solidFill>
+            <a:prstDash val="solid"/>
+          </a:ln>
+        </p:spPr>
+      </p:sp>
+      <p:sp>
+        <p:nvSpPr>
+          <p:cNvPr id="5" name="Shape 3"/>
+          <p:cNvSpPr/>
+          <p:nvPr/>
+        </p:nvSpPr>
+        <p:spPr>
+          <a:xfrm>
+            <a:off x="429768" y="338328"/>
+            <a:ext cx="54864" cy="54864"/>
+          </a:xfrm>
+          <a:prstGeom prst="ellipse">
+            <a:avLst/>
+          </a:prstGeom>
+          <a:solidFill>
+            <a:srgbClr val="8B98AC">
+              <a:alpha val="60000"/>
+            </a:srgbClr>
+          </a:solidFill>
+          <a:ln/>
+        </p:spPr>
+      </p:sp>
+      <p:sp>
+        <p:nvSpPr>
+          <p:cNvPr id="6" name="Shape 4"/>
+          <p:cNvSpPr/>
+          <p:nvPr/>
+        </p:nvSpPr>
+        <p:spPr>
+          <a:xfrm>
+            <a:off x="1161288" y="795528"/>
+            <a:ext cx="54864" cy="54864"/>
+          </a:xfrm>
+          <a:prstGeom prst="ellipse">
+            <a:avLst/>
+          </a:prstGeom>
+          <a:solidFill>
+            <a:srgbClr val="8B98AC">
+              <a:alpha val="60000"/>
+            </a:srgbClr>
+          </a:solidFill>
+          <a:ln/>
+        </p:spPr>
+      </p:sp>
+      <p:sp>
+        <p:nvSpPr>
+          <p:cNvPr id="7" name="Shape 5"/>
+          <p:cNvSpPr/>
+          <p:nvPr/>
+        </p:nvSpPr>
+        <p:spPr>
+          <a:xfrm>
+            <a:off x="795528" y="1527048"/>
+            <a:ext cx="54864" cy="54864"/>
+          </a:xfrm>
+          <a:prstGeom prst="ellipse">
+            <a:avLst/>
+          </a:prstGeom>
+          <a:solidFill>
+            <a:srgbClr val="8B98AC">
+              <a:alpha val="60000"/>
+            </a:srgbClr>
+          </a:solidFill>
+          <a:ln/>
+        </p:spPr>
+      </p:sp>
+      <p:sp>
+        <p:nvSpPr>
+          <p:cNvPr id="8" name="Shape 6"/>
+          <p:cNvSpPr/>
+          <p:nvPr/>
+        </p:nvSpPr>
+        <p:spPr>
+          <a:xfrm>
+            <a:off x="1709928" y="1252728"/>
+            <a:ext cx="54864" cy="54864"/>
+          </a:xfrm>
+          <a:prstGeom prst="ellipse">
+            <a:avLst/>
+          </a:prstGeom>
+          <a:solidFill>
+            <a:srgbClr val="8B98AC">
+              <a:alpha val="60000"/>
+            </a:srgbClr>
+          </a:solidFill>
+          <a:ln/>
+        </p:spPr>
+      </p:sp>
+      <p:sp>
+        <p:nvSpPr>
+          <p:cNvPr id="9" name="Shape 7"/>
+          <p:cNvSpPr/>
+          <p:nvPr/>
+        </p:nvSpPr>
+        <p:spPr>
+          <a:xfrm flipV="1">
+            <a:off x="10789920" y="5486400"/>
+            <a:ext cx="731520" cy="548640"/>
+          </a:xfrm>
+          <a:prstGeom prst="line">
+            <a:avLst/>
+          </a:prstGeom>
+          <a:noFill/>
+          <a:ln w="9525">
+            <a:solidFill>
+              <a:srgbClr val="5B6478">
+                <a:alpha val="30000"/>
+              </a:srgbClr>
+            </a:solidFill>
+            <a:prstDash val="solid"/>
+          </a:ln>
+        </p:spPr>
+      </p:sp>
+      <p:sp>
+        <p:nvSpPr>
+          <p:cNvPr id="10" name="Shape 8"/>
+          <p:cNvSpPr/>
+          <p:nvPr/>
+        </p:nvSpPr>
+        <p:spPr>
+          <a:xfrm flipV="1">
+            <a:off x="11155680" y="4754880"/>
+            <a:ext cx="365760" cy="731520"/>
+          </a:xfrm>
+          <a:prstGeom prst="line">
+            <a:avLst/>
+          </a:prstGeom>
+          <a:noFill/>
+          <a:ln w="9525">
+            <a:solidFill>
+              <a:srgbClr val="5B6478">
+                <a:alpha val="30000"/>
+              </a:srgbClr>
+            </a:solidFill>
+            <a:prstDash val="solid"/>
+          </a:ln>
+        </p:spPr>
+      </p:sp>
+      <p:sp>
+        <p:nvSpPr>
+          <p:cNvPr id="11" name="Shape 9"/>
+          <p:cNvSpPr/>
+          <p:nvPr/>
+        </p:nvSpPr>
+        <p:spPr>
+          <a:xfrm>
+            <a:off x="11155680" y="4754880"/>
+            <a:ext cx="731520" cy="365760"/>
+          </a:xfrm>
+          <a:prstGeom prst="line">
+            <a:avLst/>
+          </a:prstGeom>
+          <a:noFill/>
+          <a:ln w="9525">
+            <a:solidFill>
+              <a:srgbClr val="5B6478">
+                <a:alpha val="30000"/>
+              </a:srgbClr>
+            </a:solidFill>
+            <a:prstDash val="solid"/>
+          </a:ln>
+        </p:spPr>
+      </p:sp>
+      <p:sp>
+        <p:nvSpPr>
+          <p:cNvPr id="12" name="Shape 10"/>
+          <p:cNvSpPr/>
+          <p:nvPr/>
+        </p:nvSpPr>
+        <p:spPr>
+          <a:xfrm>
+            <a:off x="10762488" y="6007608"/>
+            <a:ext cx="54864" cy="54864"/>
+          </a:xfrm>
+          <a:prstGeom prst="ellipse">
+            <a:avLst/>
+          </a:prstGeom>
+          <a:solidFill>
+            <a:srgbClr val="8B98AC">
+              <a:alpha val="60000"/>
+            </a:srgbClr>
+          </a:solidFill>
+          <a:ln/>
+        </p:spPr>
+      </p:sp>
+      <p:sp>
+        <p:nvSpPr>
+          <p:cNvPr id="13" name="Shape 11"/>
+          <p:cNvSpPr/>
+          <p:nvPr/>
+        </p:nvSpPr>
+        <p:spPr>
+          <a:xfrm>
+            <a:off x="11494008" y="5458968"/>
+            <a:ext cx="54864" cy="54864"/>
+          </a:xfrm>
+          <a:prstGeom prst="ellipse">
+            <a:avLst/>
+          </a:prstGeom>
+          <a:solidFill>
+            <a:srgbClr val="8B98AC">
+              <a:alpha val="60000"/>
+            </a:srgbClr>
+          </a:solidFill>
+          <a:ln/>
+        </p:spPr>
+      </p:sp>
+      <p:sp>
+        <p:nvSpPr>
+          <p:cNvPr id="14" name="Shape 12"/>
+          <p:cNvSpPr/>
+          <p:nvPr/>
+        </p:nvSpPr>
+        <p:spPr>
+          <a:xfrm>
+            <a:off x="11128248" y="4727448"/>
+            <a:ext cx="54864" cy="54864"/>
+          </a:xfrm>
+          <a:prstGeom prst="ellipse">
+            <a:avLst/>
+          </a:prstGeom>
+          <a:solidFill>
+            <a:srgbClr val="8B98AC">
+              <a:alpha val="60000"/>
+            </a:srgbClr>
+          </a:solidFill>
+          <a:ln/>
+        </p:spPr>
+      </p:sp>
+      <p:sp>
+        <p:nvSpPr>
+          <p:cNvPr id="15" name="Shape 13"/>
+          <p:cNvSpPr/>
+          <p:nvPr/>
+        </p:nvSpPr>
+        <p:spPr>
+          <a:xfrm>
+            <a:off x="11859768" y="5093208"/>
+            <a:ext cx="54864" cy="54864"/>
+          </a:xfrm>
+          <a:prstGeom prst="ellipse">
+            <a:avLst/>
+          </a:prstGeom>
+          <a:solidFill>
+            <a:srgbClr val="8B98AC">
+              <a:alpha val="60000"/>
+            </a:srgbClr>
+          </a:solidFill>
+          <a:ln/>
+        </p:spPr>
+      </p:sp>
+      <p:sp>
+        <p:nvSpPr>
+          <p:cNvPr id="16" name="Text 14"/>
+          <p:cNvSpPr/>
+          <p:nvPr/>
+        </p:nvSpPr>
+        <p:spPr>
+          <a:xfrm>
+            <a:off x="457200" y="6355080"/>
+            <a:ext cx="2743200" cy="274320"/>
+          </a:xfrm>
+          <a:prstGeom prst="rect">
+            <a:avLst/>
+          </a:prstGeom>
+          <a:noFill/>
+          <a:ln/>
+        </p:spPr>
+        <p:txBody>
+          <a:bodyPr wrap="square" lIns="0" tIns="0" rIns="0" bIns="0" rtlCol="0" anchor="ctr"/>
+          <a:lstStyle/>
+          <a:p>
+            <a:pPr indent="0" marL="0">
+              <a:buNone/>
+            </a:pPr>
+            <a:r>
+              <a:rPr lang="en-US" sz="1080" dirty="0">
+                <a:solidFill>
+                  <a:srgbClr val="5B6478"/>
+                </a:solidFill>
+                <a:latin typeface="Courier New" pitchFamily="34" charset="0"/>
+                <a:ea typeface="Courier New" pitchFamily="34" charset="-122"/>
+                <a:cs typeface="Courier New" pitchFamily="34" charset="-120"/>
+              </a:rPr>
+              <a:t>PromptToApps</a:t>
+            </a:r>
+            <a:endParaRPr lang="en-US" sz="1080" dirty="0"/>
+          </a:p>
+        </p:txBody>
+      </p:sp>
+      <p:sp>
+        <p:nvSpPr>
+          <p:cNvPr id="17" name="Text 15"/>
+          <p:cNvSpPr/>
+          <p:nvPr/>
+        </p:nvSpPr>
+        <p:spPr>
+          <a:xfrm>
+            <a:off x="11247120" y="6355080"/>
+            <a:ext cx="731520" cy="274320"/>
+          </a:xfrm>
+          <a:prstGeom prst="rect">
+            <a:avLst/>
+          </a:prstGeom>
+          <a:noFill/>
+          <a:ln/>
+        </p:spPr>
+        <p:txBody>
+          <a:bodyPr wrap="square" lIns="0" tIns="0" rIns="0" bIns="0" rtlCol="0" anchor="ctr"/>
+          <a:lstStyle/>
+          <a:p>
+            <a:pPr algn="r" indent="0" marL="0">
+              <a:buNone/>
+            </a:pPr>
+            <a:r>
+              <a:rPr lang="en-US" sz="1080" dirty="0">
+                <a:solidFill>
+                  <a:srgbClr val="5B6478"/>
+                </a:solidFill>
+                <a:latin typeface="Courier New" pitchFamily="34" charset="0"/>
+                <a:ea typeface="Courier New" pitchFamily="34" charset="-122"/>
+                <a:cs typeface="Courier New" pitchFamily="34" charset="-120"/>
+              </a:rPr>
+              <a:t>11 / 11</a:t>
+            </a:r>
+            <a:endParaRPr lang="en-US" sz="1080" dirty="0"/>
+          </a:p>
+        </p:txBody>
+      </p:sp>
+      <p:sp>
+        <p:nvSpPr>
+          <p:cNvPr id="18" name="Text 16"/>
+          <p:cNvSpPr/>
+          <p:nvPr/>
+        </p:nvSpPr>
+        <p:spPr>
+          <a:xfrm>
+            <a:off x="640080" y="164592"/>
+            <a:ext cx="7315200" cy="274320"/>
+          </a:xfrm>
+          <a:prstGeom prst="rect">
+            <a:avLst/>
+          </a:prstGeom>
+          <a:noFill/>
+          <a:ln/>
+        </p:spPr>
+        <p:txBody>
+          <a:bodyPr wrap="square" lIns="0" tIns="0" rIns="0" bIns="0" rtlCol="0" anchor="ctr"/>
+          <a:lstStyle/>
+          <a:p>
+            <a:pPr indent="0" marL="0">
+              <a:buNone/>
+            </a:pPr>
+            <a:r>
+              <a:rPr lang="en-US" sz="1440" spc="200" kern="0" dirty="0">
+                <a:solidFill>
+                  <a:srgbClr val="5FE0C5"/>
+                </a:solidFill>
+                <a:latin typeface="Courier New" pitchFamily="34" charset="0"/>
+                <a:ea typeface="Courier New" pitchFamily="34" charset="-122"/>
+                <a:cs typeface="Courier New" pitchFamily="34" charset="-120"/>
+              </a:rPr>
+              <a:t>CREDITS &amp; THANKS</a:t>
+            </a:r>
+            <a:endParaRPr lang="en-US" sz="1440" dirty="0"/>
+          </a:p>
+        </p:txBody>
+      </p:sp>
+      <p:sp>
+        <p:nvSpPr>
+          <p:cNvPr id="19" name="Text 17"/>
+          <p:cNvSpPr/>
+          <p:nvPr/>
+        </p:nvSpPr>
+        <p:spPr>
+          <a:xfrm>
+            <a:off x="640080" y="457200"/>
+            <a:ext cx="10881360" cy="640080"/>
+          </a:xfrm>
+          <a:prstGeom prst="rect">
+            <a:avLst/>
+          </a:prstGeom>
+          <a:noFill/>
+          <a:ln/>
+        </p:spPr>
+        <p:txBody>
+          <a:bodyPr wrap="square" lIns="0" tIns="0" rIns="0" bIns="0" rtlCol="0" anchor="ctr"/>
+          <a:lstStyle/>
+          <a:p>
+            <a:pPr algn="l" indent="0" marL="0">
+              <a:buNone/>
+            </a:pPr>
+            <a:r>
+              <a:rPr lang="en-US" sz="3360" b="1" dirty="0">
+                <a:solidFill>
+                  <a:srgbClr val="F2A93B"/>
+                </a:solidFill>
+                <a:latin typeface="Courier New" pitchFamily="34" charset="0"/>
+                <a:ea typeface="Courier New" pitchFamily="34" charset="-122"/>
+                <a:cs typeface="Courier New" pitchFamily="34" charset="-120"/>
+              </a:rPr>
+              <a:t>This isn't my merit</a:t>
+            </a:r>
+            <a:endParaRPr lang="en-US" sz="3360" dirty="0"/>
+          </a:p>
+        </p:txBody>
+      </p:sp>
+      <p:sp>
+        <p:nvSpPr>
+          <p:cNvPr id="20" name="Text 18"/>
+          <p:cNvSpPr/>
+          <p:nvPr/>
+        </p:nvSpPr>
+        <p:spPr>
+          <a:xfrm>
+            <a:off x="640080" y="1371600"/>
+            <a:ext cx="10881360" cy="731520"/>
+          </a:xfrm>
+          <a:prstGeom prst="rect">
+            <a:avLst/>
+          </a:prstGeom>
+          <a:noFill/>
+          <a:ln/>
+        </p:spPr>
+        <p:txBody>
+          <a:bodyPr wrap="square" lIns="0" tIns="0" rIns="0" bIns="0" rtlCol="0" anchor="ctr"/>
+          <a:lstStyle/>
+          <a:p>
+            <a:pPr algn="ctr" indent="0" marL="0">
+              <a:lnSpc>
+                <a:spcPct val="120000"/>
+              </a:lnSpc>
+              <a:buNone/>
+            </a:pPr>
+            <a:r>
+              <a:rPr lang="en-US" sz="1920" dirty="0">
+                <a:solidFill>
+                  <a:srgbClr val="B8C0D0"/>
+                </a:solidFill>
+                <a:latin typeface="Calibri" pitchFamily="34" charset="0"/>
+                <a:ea typeface="Calibri" pitchFamily="34" charset="-122"/>
+                <a:cs typeface="Calibri" pitchFamily="34" charset="-120"/>
+              </a:rPr>
+              <a:t>Everything in this series is built on the work of open-source projects and their communities. I only learned from them and shared what I built.</a:t>
+            </a:r>
+            <a:endParaRPr lang="en-US" sz="1920" dirty="0"/>
+          </a:p>
+        </p:txBody>
+      </p:sp>
+      <p:sp>
+        <p:nvSpPr>
+          <p:cNvPr id="21" name="Shape 19"/>
+          <p:cNvSpPr/>
+          <p:nvPr/>
+        </p:nvSpPr>
+        <p:spPr>
+          <a:xfrm>
+            <a:off x="822960" y="2423160"/>
+            <a:ext cx="5029200" cy="2011680"/>
+          </a:xfrm>
+          <a:prstGeom prst="roundRect">
+            <a:avLst>
+              <a:gd name="adj" fmla="val 5455"/>
+            </a:avLst>
+          </a:prstGeom>
+          <a:solidFill>
+            <a:srgbClr val="121A2E"/>
+          </a:solidFill>
+          <a:ln w="19050">
+            <a:solidFill>
+              <a:srgbClr val="5FE0C5"/>
+            </a:solidFill>
+            <a:prstDash val="solid"/>
+          </a:ln>
+          <a:effectLst>
+            <a:outerShdw sx="100000" sy="100000" kx="0" ky="0" algn="bl" rotWithShape="0" blurRad="101600" dist="38100" dir="2700000">
+              <a:srgbClr val="000000">
+                <a:alpha val="25000"/>
+              </a:srgbClr>
+            </a:outerShdw>
+          </a:effectLst>
+        </p:spPr>
+      </p:sp>
+      <p:sp>
+        <p:nvSpPr>
+          <p:cNvPr id="22" name="Text 20"/>
+          <p:cNvSpPr/>
+          <p:nvPr/>
+        </p:nvSpPr>
+        <p:spPr>
+          <a:xfrm>
+            <a:off x="1143000" y="2697480"/>
+            <a:ext cx="4389120" cy="548640"/>
+          </a:xfrm>
+          <a:prstGeom prst="rect">
+            <a:avLst/>
+          </a:prstGeom>
+          <a:noFill/>
+          <a:ln/>
+        </p:spPr>
+        <p:txBody>
+          <a:bodyPr wrap="square" lIns="0" tIns="0" rIns="0" bIns="0" rtlCol="0" anchor="ctr"/>
+          <a:lstStyle/>
+          <a:p>
+            <a:pPr indent="0" marL="0">
+              <a:buNone/>
+            </a:pPr>
+            <a:r>
+              <a:rPr lang="en-US" sz="2640" b="1" dirty="0">
+                <a:solidFill>
+                  <a:srgbClr val="5FE0C5"/>
+                </a:solidFill>
+                <a:latin typeface="Courier New" pitchFamily="34" charset="0"/>
+                <a:ea typeface="Courier New" pitchFamily="34" charset="-122"/>
+                <a:cs typeface="Courier New" pitchFamily="34" charset="-120"/>
+              </a:rPr>
+              <a:t>Spring AI</a:t>
+            </a:r>
+            <a:endParaRPr lang="en-US" sz="2640" dirty="0"/>
+          </a:p>
+        </p:txBody>
+      </p:sp>
+      <p:sp>
+        <p:nvSpPr>
+          <p:cNvPr id="23" name="Text 21"/>
+          <p:cNvSpPr/>
+          <p:nvPr/>
+        </p:nvSpPr>
+        <p:spPr>
+          <a:xfrm>
+            <a:off x="1143000" y="3337560"/>
+            <a:ext cx="4389120" cy="457200"/>
+          </a:xfrm>
+          <a:prstGeom prst="rect">
+            <a:avLst/>
+          </a:prstGeom>
+          <a:noFill/>
+          <a:ln/>
+        </p:spPr>
+        <p:txBody>
+          <a:bodyPr wrap="square" lIns="0" tIns="0" rIns="0" bIns="0" rtlCol="0" anchor="ctr"/>
+          <a:lstStyle/>
+          <a:p>
+            <a:pPr indent="0" marL="0">
+              <a:buNone/>
+            </a:pPr>
+            <a:r>
+              <a:rPr lang="en-US" sz="1560" dirty="0">
+                <a:solidFill>
+                  <a:srgbClr val="E5E9F0"/>
+                </a:solidFill>
+                <a:latin typeface="Calibri" pitchFamily="34" charset="0"/>
+                <a:ea typeface="Calibri" pitchFamily="34" charset="-122"/>
+                <a:cs typeface="Calibri" pitchFamily="34" charset="-120"/>
+              </a:rPr>
+              <a:t>The AI integration layer for Spring</a:t>
+            </a:r>
+            <a:endParaRPr lang="en-US" sz="1560" dirty="0"/>
+          </a:p>
+        </p:txBody>
+      </p:sp>
+      <p:sp>
+        <p:nvSpPr>
+          <p:cNvPr id="24" name="Text 22"/>
+          <p:cNvSpPr/>
+          <p:nvPr/>
+        </p:nvSpPr>
+        <p:spPr>
+          <a:xfrm>
+            <a:off x="1143000" y="3840480"/>
+            <a:ext cx="4389120" cy="365760"/>
+          </a:xfrm>
+          <a:prstGeom prst="rect">
+            <a:avLst/>
+          </a:prstGeom>
+          <a:noFill/>
+          <a:ln/>
+        </p:spPr>
+        <p:txBody>
+          <a:bodyPr wrap="square" lIns="0" tIns="0" rIns="0" bIns="0" rtlCol="0" anchor="ctr"/>
+          <a:lstStyle/>
+          <a:p>
+            <a:pPr indent="0" marL="0">
+              <a:buNone/>
+            </a:pPr>
+            <a:r>
+              <a:rPr lang="en-US" sz="1440" dirty="0">
+                <a:solidFill>
+                  <a:srgbClr val="8B98AC"/>
+                </a:solidFill>
+                <a:latin typeface="Courier New" pitchFamily="34" charset="0"/>
+                <a:ea typeface="Courier New" pitchFamily="34" charset="-122"/>
+                <a:cs typeface="Courier New" pitchFamily="34" charset="-120"/>
+              </a:rPr>
+              <a:t>spring.io/projects/spring-ai</a:t>
+            </a:r>
+            <a:endParaRPr lang="en-US" sz="1440" dirty="0"/>
+          </a:p>
+        </p:txBody>
+      </p:sp>
+      <p:sp>
+        <p:nvSpPr>
+          <p:cNvPr id="25" name="Shape 23"/>
+          <p:cNvSpPr/>
+          <p:nvPr/>
+        </p:nvSpPr>
+        <p:spPr>
+          <a:xfrm>
+            <a:off x="6309360" y="2423160"/>
+            <a:ext cx="5029200" cy="2011680"/>
+          </a:xfrm>
+          <a:prstGeom prst="roundRect">
+            <a:avLst>
+              <a:gd name="adj" fmla="val 5455"/>
+            </a:avLst>
+          </a:prstGeom>
+          <a:solidFill>
+            <a:srgbClr val="121A2E"/>
+          </a:solidFill>
+          <a:ln w="19050">
+            <a:solidFill>
+              <a:srgbClr val="F2A93B"/>
+            </a:solidFill>
+            <a:prstDash val="solid"/>
+          </a:ln>
+          <a:effectLst>
+            <a:outerShdw sx="100000" sy="100000" kx="0" ky="0" algn="bl" rotWithShape="0" blurRad="101600" dist="38100" dir="2700000">
+              <a:srgbClr val="000000">
+                <a:alpha val="25000"/>
+              </a:srgbClr>
+            </a:outerShdw>
+          </a:effectLst>
+        </p:spPr>
+      </p:sp>
+      <p:sp>
+        <p:nvSpPr>
+          <p:cNvPr id="26" name="Text 24"/>
+          <p:cNvSpPr/>
+          <p:nvPr/>
+        </p:nvSpPr>
+        <p:spPr>
+          <a:xfrm>
+            <a:off x="6629400" y="2697480"/>
+            <a:ext cx="4389120" cy="548640"/>
+          </a:xfrm>
+          <a:prstGeom prst="rect">
+            <a:avLst/>
+          </a:prstGeom>
+          <a:noFill/>
+          <a:ln/>
+        </p:spPr>
+        <p:txBody>
+          <a:bodyPr wrap="square" lIns="0" tIns="0" rIns="0" bIns="0" rtlCol="0" anchor="ctr"/>
+          <a:lstStyle/>
+          <a:p>
+            <a:pPr indent="0" marL="0">
+              <a:buNone/>
+            </a:pPr>
+            <a:r>
+              <a:rPr lang="en-US" sz="2640" b="1" dirty="0">
+                <a:solidFill>
+                  <a:srgbClr val="F2A93B"/>
+                </a:solidFill>
+                <a:latin typeface="Courier New" pitchFamily="34" charset="0"/>
+                <a:ea typeface="Courier New" pitchFamily="34" charset="-122"/>
+                <a:cs typeface="Courier New" pitchFamily="34" charset="-120"/>
+              </a:rPr>
+              <a:t>Ollama</a:t>
+            </a:r>
+            <a:endParaRPr lang="en-US" sz="2640" dirty="0"/>
+          </a:p>
+        </p:txBody>
+      </p:sp>
+      <p:sp>
+        <p:nvSpPr>
+          <p:cNvPr id="27" name="Text 25"/>
+          <p:cNvSpPr/>
+          <p:nvPr/>
+        </p:nvSpPr>
+        <p:spPr>
+          <a:xfrm>
+            <a:off x="6629400" y="3337560"/>
+            <a:ext cx="4389120" cy="457200"/>
+          </a:xfrm>
+          <a:prstGeom prst="rect">
+            <a:avLst/>
+          </a:prstGeom>
+          <a:noFill/>
+          <a:ln/>
+        </p:spPr>
+        <p:txBody>
+          <a:bodyPr wrap="square" lIns="0" tIns="0" rIns="0" bIns="0" rtlCol="0" anchor="ctr"/>
+          <a:lstStyle/>
+          <a:p>
+            <a:pPr indent="0" marL="0">
+              <a:buNone/>
+            </a:pPr>
+            <a:r>
+              <a:rPr lang="en-US" sz="1560" dirty="0">
+                <a:solidFill>
+                  <a:srgbClr val="E5E9F0"/>
+                </a:solidFill>
+                <a:latin typeface="Calibri" pitchFamily="34" charset="0"/>
+                <a:ea typeface="Calibri" pitchFamily="34" charset="-122"/>
+                <a:cs typeface="Calibri" pitchFamily="34" charset="-120"/>
+              </a:rPr>
+              <a:t>Run open LLMs locally</a:t>
+            </a:r>
+            <a:endParaRPr lang="en-US" sz="1560" dirty="0"/>
+          </a:p>
+        </p:txBody>
+      </p:sp>
+      <p:sp>
+        <p:nvSpPr>
+          <p:cNvPr id="28" name="Text 26"/>
+          <p:cNvSpPr/>
+          <p:nvPr/>
+        </p:nvSpPr>
+        <p:spPr>
+          <a:xfrm>
+            <a:off x="6629400" y="3840480"/>
+            <a:ext cx="4389120" cy="365760"/>
+          </a:xfrm>
+          <a:prstGeom prst="rect">
+            <a:avLst/>
+          </a:prstGeom>
+          <a:noFill/>
+          <a:ln/>
+        </p:spPr>
+        <p:txBody>
+          <a:bodyPr wrap="square" lIns="0" tIns="0" rIns="0" bIns="0" rtlCol="0" anchor="ctr"/>
+          <a:lstStyle/>
+          <a:p>
+            <a:pPr indent="0" marL="0">
+              <a:buNone/>
+            </a:pPr>
+            <a:r>
+              <a:rPr lang="en-US" sz="1440" dirty="0">
+                <a:solidFill>
+                  <a:srgbClr val="8B98AC"/>
+                </a:solidFill>
+                <a:latin typeface="Courier New" pitchFamily="34" charset="0"/>
+                <a:ea typeface="Courier New" pitchFamily="34" charset="-122"/>
+                <a:cs typeface="Courier New" pitchFamily="34" charset="-120"/>
+              </a:rPr>
+              <a:t>ollama.com</a:t>
+            </a:r>
+            <a:endParaRPr lang="en-US" sz="1440" dirty="0"/>
+          </a:p>
+        </p:txBody>
+      </p:sp>
+      <p:sp>
+        <p:nvSpPr>
+          <p:cNvPr id="29" name="Shape 27"/>
+          <p:cNvSpPr/>
+          <p:nvPr/>
+        </p:nvSpPr>
+        <p:spPr>
+          <a:xfrm>
+            <a:off x="4251960" y="4892040"/>
+            <a:ext cx="3657600" cy="0"/>
+          </a:xfrm>
+          <a:prstGeom prst="line">
+            <a:avLst/>
+          </a:prstGeom>
+          <a:noFill/>
+          <a:ln w="12700">
+            <a:solidFill>
+              <a:srgbClr val="5B6478">
+                <a:alpha val="70000"/>
+              </a:srgbClr>
+            </a:solidFill>
+            <a:prstDash val="solid"/>
+          </a:ln>
+        </p:spPr>
+      </p:sp>
+      <p:sp>
+        <p:nvSpPr>
+          <p:cNvPr id="30" name="Shape 28"/>
+          <p:cNvSpPr/>
+          <p:nvPr/>
+        </p:nvSpPr>
+        <p:spPr>
+          <a:xfrm>
+            <a:off x="4210812" y="4850892"/>
+            <a:ext cx="82296" cy="82296"/>
+          </a:xfrm>
+          <a:prstGeom prst="ellipse">
+            <a:avLst/>
+          </a:prstGeom>
+          <a:solidFill>
+            <a:srgbClr val="0A0F1C"/>
+          </a:solidFill>
+          <a:ln w="19050">
+            <a:solidFill>
+              <a:srgbClr val="F2A93B"/>
+            </a:solidFill>
+            <a:prstDash val="solid"/>
+          </a:ln>
+        </p:spPr>
+      </p:sp>
+      <p:sp>
+        <p:nvSpPr>
+          <p:cNvPr id="31" name="Shape 29"/>
+          <p:cNvSpPr/>
+          <p:nvPr/>
+        </p:nvSpPr>
+        <p:spPr>
+          <a:xfrm>
+            <a:off x="6039612" y="4850892"/>
+            <a:ext cx="82296" cy="82296"/>
+          </a:xfrm>
+          <a:prstGeom prst="ellipse">
+            <a:avLst/>
+          </a:prstGeom>
+          <a:solidFill>
+            <a:srgbClr val="0A0F1C"/>
+          </a:solidFill>
+          <a:ln w="19050">
+            <a:solidFill>
+              <a:srgbClr val="8B98AC"/>
+            </a:solidFill>
+            <a:prstDash val="solid"/>
+          </a:ln>
+        </p:spPr>
+      </p:sp>
+      <p:sp>
+        <p:nvSpPr>
+          <p:cNvPr id="32" name="Shape 30"/>
+          <p:cNvSpPr/>
+          <p:nvPr/>
+        </p:nvSpPr>
+        <p:spPr>
+          <a:xfrm>
+            <a:off x="7868412" y="4850892"/>
+            <a:ext cx="82296" cy="82296"/>
+          </a:xfrm>
+          <a:prstGeom prst="ellipse">
+            <a:avLst/>
+          </a:prstGeom>
+          <a:solidFill>
+            <a:srgbClr val="0A0F1C"/>
+          </a:solidFill>
+          <a:ln w="19050">
+            <a:solidFill>
+              <a:srgbClr val="5FE0C5"/>
+            </a:solidFill>
+            <a:prstDash val="solid"/>
+          </a:ln>
+        </p:spPr>
+      </p:sp>
+      <p:sp>
+        <p:nvSpPr>
+          <p:cNvPr id="33" name="Text 31"/>
+          <p:cNvSpPr/>
+          <p:nvPr/>
+        </p:nvSpPr>
+        <p:spPr>
+          <a:xfrm>
+            <a:off x="0" y="5120640"/>
+            <a:ext cx="12161520" cy="457200"/>
+          </a:xfrm>
+          <a:prstGeom prst="rect">
+            <a:avLst/>
+          </a:prstGeom>
+          <a:noFill/>
+          <a:ln/>
+        </p:spPr>
+        <p:txBody>
+          <a:bodyPr wrap="square" lIns="0" tIns="0" rIns="0" bIns="0" rtlCol="0" anchor="ctr"/>
+          <a:lstStyle/>
+          <a:p>
+            <a:pPr algn="ctr" indent="0" marL="0">
+              <a:buNone/>
+            </a:pPr>
+            <a:r>
+              <a:rPr lang="en-US" sz="1680" dirty="0">
+                <a:solidFill>
+                  <a:srgbClr val="E5E9F0"/>
+                </a:solidFill>
+                <a:latin typeface="Calibri" pitchFamily="34" charset="0"/>
+                <a:ea typeface="Calibri" pitchFamily="34" charset="-122"/>
+                <a:cs typeface="Calibri" pitchFamily="34" charset="-120"/>
+              </a:rPr>
+              <a:t>Shared with gratitude — all credit to their maintainers &amp; contributors.</a:t>
+            </a:r>
+            <a:endParaRPr lang="en-US" sz="1680" dirty="0"/>
+          </a:p>
+        </p:txBody>
+      </p:sp>
+      <p:sp>
+        <p:nvSpPr>
+          <p:cNvPr id="34" name="Text 32"/>
+          <p:cNvSpPr/>
+          <p:nvPr/>
+        </p:nvSpPr>
+        <p:spPr>
+          <a:xfrm>
+            <a:off x="0" y="5623560"/>
+            <a:ext cx="12161520" cy="365760"/>
+          </a:xfrm>
+          <a:prstGeom prst="rect">
+            <a:avLst/>
+          </a:prstGeom>
+          <a:noFill/>
+          <a:ln/>
+        </p:spPr>
+        <p:txBody>
+          <a:bodyPr wrap="square" lIns="0" tIns="0" rIns="0" bIns="0" rtlCol="0" anchor="ctr"/>
+          <a:lstStyle/>
+          <a:p>
+            <a:pPr algn="ctr" indent="0" marL="0">
+              <a:buNone/>
+            </a:pPr>
+            <a:r>
+              <a:rPr lang="en-US" sz="1440" dirty="0">
+                <a:solidFill>
+                  <a:srgbClr val="8B98AC"/>
+                </a:solidFill>
+                <a:latin typeface="Courier New" pitchFamily="34" charset="0"/>
+                <a:ea typeface="Courier New" pitchFamily="34" charset="-122"/>
+                <a:cs typeface="Courier New" pitchFamily="34" charset="-120"/>
+              </a:rPr>
+              <a:t>github.com/balajich/spring-ai-with-llama</a:t>
+            </a:r>
+            <a:endParaRPr lang="en-US" sz="1440" dirty="0"/>
           </a:p>
         </p:txBody>
       </p:sp>
@@ -2774,7 +5170,7 @@
                 <a:ea typeface="Courier New" pitchFamily="34" charset="-122"/>
                 <a:cs typeface="Courier New" pitchFamily="34" charset="-120"/>
               </a:rPr>
-              <a:t>2 / 9</a:t>
+              <a:t>2 / 11</a:t>
             </a:r>
             <a:endParaRPr lang="en-US" sz="1080" dirty="0"/>
           </a:p>
@@ -3590,7 +5986,7 @@
                 <a:ea typeface="Courier New" pitchFamily="34" charset="-122"/>
                 <a:cs typeface="Courier New" pitchFamily="34" charset="-120"/>
               </a:rPr>
-              <a:t>3 / 9</a:t>
+              <a:t>3 / 11</a:t>
             </a:r>
             <a:endParaRPr lang="en-US" sz="1080" dirty="0"/>
           </a:p>
@@ -4870,7 +7266,7 @@
                 <a:ea typeface="Courier New" pitchFamily="34" charset="-122"/>
                 <a:cs typeface="Courier New" pitchFamily="34" charset="-120"/>
               </a:rPr>
-              <a:t>4 / 9</a:t>
+              <a:t>4 / 11</a:t>
             </a:r>
             <a:endParaRPr lang="en-US" sz="1080" dirty="0"/>
           </a:p>
@@ -4948,7 +7344,7 @@
                 <a:ea typeface="Courier New" pitchFamily="34" charset="-122"/>
                 <a:cs typeface="Courier New" pitchFamily="34" charset="-120"/>
               </a:rPr>
-              <a:t>Temperature controls randomness</a:t>
+              <a:t>The context window is the memory budget</a:t>
             </a:r>
             <a:endParaRPr lang="en-US" sz="3360" dirty="0"/>
           </a:p>
@@ -4956,24 +7352,516 @@
       </p:sp>
       <p:sp>
         <p:nvSpPr>
-          <p:cNvPr id="20" name="Shape 18"/>
-          <p:cNvSpPr/>
-          <p:nvPr/>
-        </p:nvSpPr>
-        <p:spPr>
-          <a:xfrm>
-            <a:off x="640080" y="1554480"/>
-            <a:ext cx="3429000" cy="2286000"/>
+          <p:cNvPr id="20" name="Text 18"/>
+          <p:cNvSpPr/>
+          <p:nvPr/>
+        </p:nvSpPr>
+        <p:spPr>
+          <a:xfrm>
+            <a:off x="640080" y="1371600"/>
+            <a:ext cx="10881360" cy="457200"/>
+          </a:xfrm>
+          <a:prstGeom prst="rect">
+            <a:avLst/>
+          </a:prstGeom>
+          <a:noFill/>
+          <a:ln/>
+        </p:spPr>
+        <p:txBody>
+          <a:bodyPr wrap="square" lIns="0" tIns="0" rIns="0" bIns="0" rtlCol="0" anchor="ctr"/>
+          <a:lstStyle/>
+          <a:p>
+            <a:pPr indent="0" marL="0">
+              <a:buNone/>
+            </a:pPr>
+            <a:r>
+              <a:rPr lang="en-US" sz="1920" dirty="0">
+                <a:solidFill>
+                  <a:srgbClr val="B8C0D0"/>
+                </a:solidFill>
+                <a:latin typeface="Calibri" pitchFamily="34" charset="0"/>
+                <a:ea typeface="Calibri" pitchFamily="34" charset="-122"/>
+                <a:cs typeface="Calibri" pitchFamily="34" charset="-120"/>
+              </a:rPr>
+              <a:t>Every call is limited by a fixed token budget — input and output share it.</a:t>
+            </a:r>
+            <a:endParaRPr lang="en-US" sz="1920" dirty="0"/>
+          </a:p>
+        </p:txBody>
+      </p:sp>
+      <p:sp>
+        <p:nvSpPr>
+          <p:cNvPr id="21" name="Shape 19"/>
+          <p:cNvSpPr/>
+          <p:nvPr/>
+        </p:nvSpPr>
+        <p:spPr>
+          <a:xfrm>
+            <a:off x="822960" y="2148840"/>
+            <a:ext cx="10515600" cy="822960"/>
           </a:xfrm>
           <a:prstGeom prst="roundRect">
             <a:avLst>
-              <a:gd name="adj" fmla="val 4800"/>
+              <a:gd name="adj" fmla="val 8889"/>
             </a:avLst>
           </a:prstGeom>
           <a:solidFill>
             <a:srgbClr val="121A2E"/>
           </a:solidFill>
-          <a:ln w="19050">
+          <a:ln w="12700">
+            <a:solidFill>
+              <a:srgbClr val="5B6478"/>
+            </a:solidFill>
+            <a:prstDash val="solid"/>
+          </a:ln>
+        </p:spPr>
+      </p:sp>
+      <p:sp>
+        <p:nvSpPr>
+          <p:cNvPr id="22" name="Shape 20"/>
+          <p:cNvSpPr/>
+          <p:nvPr/>
+        </p:nvSpPr>
+        <p:spPr>
+          <a:xfrm>
+            <a:off x="868680" y="2240280"/>
+            <a:ext cx="1613002" cy="640080"/>
+          </a:xfrm>
+          <a:prstGeom prst="roundRect">
+            <a:avLst>
+              <a:gd name="adj" fmla="val 8571"/>
+            </a:avLst>
+          </a:prstGeom>
+          <a:solidFill>
+            <a:srgbClr val="F2A93B">
+              <a:alpha val="80000"/>
+            </a:srgbClr>
+          </a:solidFill>
+          <a:ln w="12700">
+            <a:solidFill>
+              <a:srgbClr val="F2A93B"/>
+            </a:solidFill>
+            <a:prstDash val="solid"/>
+          </a:ln>
+        </p:spPr>
+      </p:sp>
+      <p:sp>
+        <p:nvSpPr>
+          <p:cNvPr id="23" name="Text 21"/>
+          <p:cNvSpPr/>
+          <p:nvPr/>
+        </p:nvSpPr>
+        <p:spPr>
+          <a:xfrm>
+            <a:off x="868680" y="2240280"/>
+            <a:ext cx="1613002" cy="640080"/>
+          </a:xfrm>
+          <a:prstGeom prst="rect">
+            <a:avLst/>
+          </a:prstGeom>
+          <a:noFill/>
+          <a:ln/>
+        </p:spPr>
+        <p:txBody>
+          <a:bodyPr wrap="square" lIns="0" tIns="0" rIns="0" bIns="0" rtlCol="0" anchor="ctr"/>
+          <a:lstStyle/>
+          <a:p>
+            <a:pPr algn="ctr" indent="0" marL="0">
+              <a:buNone/>
+            </a:pPr>
+            <a:r>
+              <a:rPr lang="en-US" sz="1150" dirty="0">
+                <a:solidFill>
+                  <a:srgbClr val="E5E9F0"/>
+                </a:solidFill>
+                <a:latin typeface="Calibri" pitchFamily="34" charset="0"/>
+                <a:ea typeface="Calibri" pitchFamily="34" charset="-122"/>
+                <a:cs typeface="Calibri" pitchFamily="34" charset="-120"/>
+              </a:rPr>
+              <a:t>System prompt</a:t>
+            </a:r>
+            <a:endParaRPr lang="en-US" sz="1150" dirty="0"/>
+          </a:p>
+        </p:txBody>
+      </p:sp>
+      <p:sp>
+        <p:nvSpPr>
+          <p:cNvPr id="24" name="Shape 22"/>
+          <p:cNvSpPr/>
+          <p:nvPr/>
+        </p:nvSpPr>
+        <p:spPr>
+          <a:xfrm>
+            <a:off x="2536546" y="2240280"/>
+            <a:ext cx="1404518" cy="640080"/>
+          </a:xfrm>
+          <a:prstGeom prst="roundRect">
+            <a:avLst>
+              <a:gd name="adj" fmla="val 8571"/>
+            </a:avLst>
+          </a:prstGeom>
+          <a:solidFill>
+            <a:srgbClr val="5FE0C5">
+              <a:alpha val="80000"/>
+            </a:srgbClr>
+          </a:solidFill>
+          <a:ln w="12700">
+            <a:solidFill>
+              <a:srgbClr val="5FE0C5"/>
+            </a:solidFill>
+            <a:prstDash val="solid"/>
+          </a:ln>
+        </p:spPr>
+      </p:sp>
+      <p:sp>
+        <p:nvSpPr>
+          <p:cNvPr id="25" name="Text 23"/>
+          <p:cNvSpPr/>
+          <p:nvPr/>
+        </p:nvSpPr>
+        <p:spPr>
+          <a:xfrm>
+            <a:off x="2536546" y="2240280"/>
+            <a:ext cx="1404518" cy="640080"/>
+          </a:xfrm>
+          <a:prstGeom prst="rect">
+            <a:avLst/>
+          </a:prstGeom>
+          <a:noFill/>
+          <a:ln/>
+        </p:spPr>
+        <p:txBody>
+          <a:bodyPr wrap="square" lIns="0" tIns="0" rIns="0" bIns="0" rtlCol="0" anchor="ctr"/>
+          <a:lstStyle/>
+          <a:p>
+            <a:pPr algn="ctr" indent="0" marL="0">
+              <a:buNone/>
+            </a:pPr>
+            <a:r>
+              <a:rPr lang="en-US" sz="1150" dirty="0">
+                <a:solidFill>
+                  <a:srgbClr val="E5E9F0"/>
+                </a:solidFill>
+                <a:latin typeface="Calibri" pitchFamily="34" charset="0"/>
+                <a:ea typeface="Calibri" pitchFamily="34" charset="-122"/>
+                <a:cs typeface="Calibri" pitchFamily="34" charset="-120"/>
+              </a:rPr>
+              <a:t>User question</a:t>
+            </a:r>
+            <a:endParaRPr lang="en-US" sz="1150" dirty="0"/>
+          </a:p>
+        </p:txBody>
+      </p:sp>
+      <p:sp>
+        <p:nvSpPr>
+          <p:cNvPr id="26" name="Shape 24"/>
+          <p:cNvSpPr/>
+          <p:nvPr/>
+        </p:nvSpPr>
+        <p:spPr>
+          <a:xfrm>
+            <a:off x="3995928" y="2240280"/>
+            <a:ext cx="4636008" cy="640080"/>
+          </a:xfrm>
+          <a:prstGeom prst="roundRect">
+            <a:avLst>
+              <a:gd name="adj" fmla="val 8571"/>
+            </a:avLst>
+          </a:prstGeom>
+          <a:solidFill>
+            <a:srgbClr val="8B98AC">
+              <a:alpha val="80000"/>
+            </a:srgbClr>
+          </a:solidFill>
+          <a:ln w="12700">
+            <a:solidFill>
+              <a:srgbClr val="8B98AC"/>
+            </a:solidFill>
+            <a:prstDash val="solid"/>
+          </a:ln>
+        </p:spPr>
+      </p:sp>
+      <p:sp>
+        <p:nvSpPr>
+          <p:cNvPr id="27" name="Text 25"/>
+          <p:cNvSpPr/>
+          <p:nvPr/>
+        </p:nvSpPr>
+        <p:spPr>
+          <a:xfrm>
+            <a:off x="3995928" y="2240280"/>
+            <a:ext cx="4636008" cy="640080"/>
+          </a:xfrm>
+          <a:prstGeom prst="rect">
+            <a:avLst/>
+          </a:prstGeom>
+          <a:noFill/>
+          <a:ln/>
+        </p:spPr>
+        <p:txBody>
+          <a:bodyPr wrap="square" lIns="0" tIns="0" rIns="0" bIns="0" rtlCol="0" anchor="ctr"/>
+          <a:lstStyle/>
+          <a:p>
+            <a:pPr algn="ctr" indent="0" marL="0">
+              <a:buNone/>
+            </a:pPr>
+            <a:r>
+              <a:rPr lang="en-US" sz="1150" dirty="0">
+                <a:solidFill>
+                  <a:srgbClr val="E5E9F0"/>
+                </a:solidFill>
+                <a:latin typeface="Calibri" pitchFamily="34" charset="0"/>
+                <a:ea typeface="Calibri" pitchFamily="34" charset="-122"/>
+                <a:cs typeface="Calibri" pitchFamily="34" charset="-120"/>
+              </a:rPr>
+              <a:t>Model's reply (output tokens)</a:t>
+            </a:r>
+            <a:endParaRPr lang="en-US" sz="1150" dirty="0"/>
+          </a:p>
+        </p:txBody>
+      </p:sp>
+      <p:sp>
+        <p:nvSpPr>
+          <p:cNvPr id="28" name="Shape 26"/>
+          <p:cNvSpPr/>
+          <p:nvPr/>
+        </p:nvSpPr>
+        <p:spPr>
+          <a:xfrm>
+            <a:off x="8686800" y="2240280"/>
+            <a:ext cx="2551176" cy="640080"/>
+          </a:xfrm>
+          <a:prstGeom prst="roundRect">
+            <a:avLst>
+              <a:gd name="adj" fmla="val 8571"/>
+            </a:avLst>
+          </a:prstGeom>
+          <a:solidFill>
+            <a:srgbClr val="5B6478">
+              <a:alpha val="30000"/>
+            </a:srgbClr>
+          </a:solidFill>
+          <a:ln w="12700">
+            <a:solidFill>
+              <a:srgbClr val="5B6478"/>
+            </a:solidFill>
+            <a:prstDash val="solid"/>
+          </a:ln>
+        </p:spPr>
+      </p:sp>
+      <p:sp>
+        <p:nvSpPr>
+          <p:cNvPr id="29" name="Text 27"/>
+          <p:cNvSpPr/>
+          <p:nvPr/>
+        </p:nvSpPr>
+        <p:spPr>
+          <a:xfrm>
+            <a:off x="8686800" y="2240280"/>
+            <a:ext cx="2551176" cy="640080"/>
+          </a:xfrm>
+          <a:prstGeom prst="rect">
+            <a:avLst/>
+          </a:prstGeom>
+          <a:noFill/>
+          <a:ln/>
+        </p:spPr>
+        <p:txBody>
+          <a:bodyPr wrap="square" lIns="0" tIns="0" rIns="0" bIns="0" rtlCol="0" anchor="ctr"/>
+          <a:lstStyle/>
+          <a:p>
+            <a:pPr algn="ctr" indent="0" marL="0">
+              <a:buNone/>
+            </a:pPr>
+            <a:r>
+              <a:rPr lang="en-US" sz="1150" dirty="0">
+                <a:solidFill>
+                  <a:srgbClr val="E5E9F0"/>
+                </a:solidFill>
+                <a:latin typeface="Calibri" pitchFamily="34" charset="0"/>
+                <a:ea typeface="Calibri" pitchFamily="34" charset="-122"/>
+                <a:cs typeface="Calibri" pitchFamily="34" charset="-120"/>
+              </a:rPr>
+              <a:t>headroom</a:t>
+            </a:r>
+            <a:endParaRPr lang="en-US" sz="1150" dirty="0"/>
+          </a:p>
+        </p:txBody>
+      </p:sp>
+      <p:sp>
+        <p:nvSpPr>
+          <p:cNvPr id="30" name="Text 28"/>
+          <p:cNvSpPr/>
+          <p:nvPr/>
+        </p:nvSpPr>
+        <p:spPr>
+          <a:xfrm>
+            <a:off x="822960" y="3081528"/>
+            <a:ext cx="10515600" cy="320040"/>
+          </a:xfrm>
+          <a:prstGeom prst="rect">
+            <a:avLst/>
+          </a:prstGeom>
+          <a:noFill/>
+          <a:ln/>
+        </p:spPr>
+        <p:txBody>
+          <a:bodyPr wrap="square" lIns="0" tIns="0" rIns="0" bIns="0" rtlCol="0" anchor="ctr"/>
+          <a:lstStyle/>
+          <a:p>
+            <a:pPr algn="ctr" indent="0" marL="0">
+              <a:buNone/>
+            </a:pPr>
+            <a:r>
+              <a:rPr lang="en-US" sz="1320" dirty="0">
+                <a:solidFill>
+                  <a:srgbClr val="8B98AC"/>
+                </a:solidFill>
+                <a:latin typeface="Courier New" pitchFamily="34" charset="0"/>
+                <a:ea typeface="Courier New" pitchFamily="34" charset="-122"/>
+                <a:cs typeface="Courier New" pitchFamily="34" charset="-120"/>
+              </a:rPr>
+              <a:t>~128,000 tokens for Llama 3.2  —  input + output must fit together</a:t>
+            </a:r>
+            <a:endParaRPr lang="en-US" sz="1320" dirty="0"/>
+          </a:p>
+        </p:txBody>
+      </p:sp>
+      <p:sp>
+        <p:nvSpPr>
+          <p:cNvPr id="31" name="Shape 29"/>
+          <p:cNvSpPr/>
+          <p:nvPr/>
+        </p:nvSpPr>
+        <p:spPr>
+          <a:xfrm>
+            <a:off x="822960" y="3977640"/>
+            <a:ext cx="3429000" cy="1691640"/>
+          </a:xfrm>
+          <a:prstGeom prst="roundRect">
+            <a:avLst>
+              <a:gd name="adj" fmla="val 6486"/>
+            </a:avLst>
+          </a:prstGeom>
+          <a:solidFill>
+            <a:srgbClr val="121A2E"/>
+          </a:solidFill>
+          <a:ln w="15875">
+            <a:solidFill>
+              <a:srgbClr val="F2A93B"/>
+            </a:solidFill>
+            <a:prstDash val="solid"/>
+          </a:ln>
+          <a:effectLst>
+            <a:outerShdw sx="100000" sy="100000" kx="0" ky="0" algn="bl" rotWithShape="0" blurRad="101600" dist="38100" dir="2700000">
+              <a:srgbClr val="000000">
+                <a:alpha val="25000"/>
+              </a:srgbClr>
+            </a:outerShdw>
+          </a:effectLst>
+        </p:spPr>
+      </p:sp>
+      <p:sp>
+        <p:nvSpPr>
+          <p:cNvPr id="32" name="Text 30"/>
+          <p:cNvSpPr/>
+          <p:nvPr/>
+        </p:nvSpPr>
+        <p:spPr>
+          <a:xfrm>
+            <a:off x="1051560" y="4160520"/>
+            <a:ext cx="2971800" cy="365760"/>
+          </a:xfrm>
+          <a:prstGeom prst="rect">
+            <a:avLst/>
+          </a:prstGeom>
+          <a:noFill/>
+          <a:ln/>
+        </p:spPr>
+        <p:txBody>
+          <a:bodyPr wrap="square" lIns="0" tIns="0" rIns="0" bIns="0" rtlCol="0" anchor="ctr"/>
+          <a:lstStyle/>
+          <a:p>
+            <a:pPr indent="0" marL="0">
+              <a:buNone/>
+            </a:pPr>
+            <a:r>
+              <a:rPr lang="en-US" sz="1680" b="1" dirty="0">
+                <a:solidFill>
+                  <a:srgbClr val="F2A93B"/>
+                </a:solidFill>
+                <a:latin typeface="Courier New" pitchFamily="34" charset="0"/>
+                <a:ea typeface="Courier New" pitchFamily="34" charset="-122"/>
+                <a:cs typeface="Courier New" pitchFamily="34" charset="-120"/>
+              </a:rPr>
+              <a:t>Shared budget</a:t>
+            </a:r>
+            <a:endParaRPr lang="en-US" sz="1680" dirty="0"/>
+          </a:p>
+        </p:txBody>
+      </p:sp>
+      <p:sp>
+        <p:nvSpPr>
+          <p:cNvPr id="33" name="Text 31"/>
+          <p:cNvSpPr/>
+          <p:nvPr/>
+        </p:nvSpPr>
+        <p:spPr>
+          <a:xfrm>
+            <a:off x="1051560" y="4581144"/>
+            <a:ext cx="2971800" cy="1005840"/>
+          </a:xfrm>
+          <a:prstGeom prst="rect">
+            <a:avLst/>
+          </a:prstGeom>
+          <a:noFill/>
+          <a:ln/>
+        </p:spPr>
+        <p:txBody>
+          <a:bodyPr wrap="square" lIns="0" tIns="0" rIns="0" bIns="0" rtlCol="0" anchor="t"/>
+          <a:lstStyle/>
+          <a:p>
+            <a:pPr indent="0" marL="0">
+              <a:lnSpc>
+                <a:spcPct val="110000"/>
+              </a:lnSpc>
+              <a:buNone/>
+            </a:pPr>
+            <a:r>
+              <a:rPr lang="en-US" sz="1380" dirty="0">
+                <a:solidFill>
+                  <a:srgbClr val="E5E9F0"/>
+                </a:solidFill>
+                <a:latin typeface="Calibri" pitchFamily="34" charset="0"/>
+                <a:ea typeface="Calibri" pitchFamily="34" charset="-122"/>
+                <a:cs typeface="Calibri" pitchFamily="34" charset="-120"/>
+              </a:rPr>
+              <a:t>Prompt tokens + reply tokens both count. A huge prompt leaves less room to answer.</a:t>
+            </a:r>
+            <a:endParaRPr lang="en-US" sz="1380" dirty="0"/>
+          </a:p>
+        </p:txBody>
+      </p:sp>
+      <p:sp>
+        <p:nvSpPr>
+          <p:cNvPr id="34" name="Shape 32"/>
+          <p:cNvSpPr/>
+          <p:nvPr/>
+        </p:nvSpPr>
+        <p:spPr>
+          <a:xfrm>
+            <a:off x="4572000" y="3977640"/>
+            <a:ext cx="3429000" cy="1691640"/>
+          </a:xfrm>
+          <a:prstGeom prst="roundRect">
+            <a:avLst>
+              <a:gd name="adj" fmla="val 6486"/>
+            </a:avLst>
+          </a:prstGeom>
+          <a:solidFill>
+            <a:srgbClr val="121A2E"/>
+          </a:solidFill>
+          <a:ln w="15875">
             <a:solidFill>
               <a:srgbClr val="5FE0C5"/>
             </a:solidFill>
@@ -4990,14 +7878,14 @@
       </p:sp>
       <p:sp>
         <p:nvSpPr>
-          <p:cNvPr id="21" name="Text 19"/>
-          <p:cNvSpPr/>
-          <p:nvPr/>
-        </p:nvSpPr>
-        <p:spPr>
-          <a:xfrm>
-            <a:off x="640080" y="1783080"/>
-            <a:ext cx="3429000" cy="731520"/>
+          <p:cNvPr id="35" name="Text 33"/>
+          <p:cNvSpPr/>
+          <p:nvPr/>
+        </p:nvSpPr>
+        <p:spPr>
+          <a:xfrm>
+            <a:off x="4800600" y="4160520"/>
+            <a:ext cx="2971800" cy="365760"/>
           </a:xfrm>
           <a:prstGeom prst="rect">
             <a:avLst/>
@@ -5009,11 +7897,11 @@
           <a:bodyPr wrap="square" lIns="0" tIns="0" rIns="0" bIns="0" rtlCol="0" anchor="ctr"/>
           <a:lstStyle/>
           <a:p>
-            <a:pPr algn="ctr" indent="0" marL="0">
-              <a:buNone/>
-            </a:pPr>
-            <a:r>
-              <a:rPr lang="en-US" sz="4080" b="1" dirty="0">
+            <a:pPr indent="0" marL="0">
+              <a:buNone/>
+            </a:pPr>
+            <a:r>
+              <a:rPr lang="en-US" sz="1680" b="1" dirty="0">
                 <a:solidFill>
                   <a:srgbClr val="5FE0C5"/>
                 </a:solidFill>
@@ -5021,85 +7909,49 @@
                 <a:ea typeface="Courier New" pitchFamily="34" charset="-122"/>
                 <a:cs typeface="Courier New" pitchFamily="34" charset="-120"/>
               </a:rPr>
-              <a:t>0.0</a:t>
-            </a:r>
-            <a:endParaRPr lang="en-US" sz="4080" dirty="0"/>
-          </a:p>
-        </p:txBody>
-      </p:sp>
-      <p:sp>
-        <p:nvSpPr>
-          <p:cNvPr id="22" name="Text 20"/>
-          <p:cNvSpPr/>
-          <p:nvPr/>
-        </p:nvSpPr>
-        <p:spPr>
-          <a:xfrm>
-            <a:off x="640080" y="2606040"/>
-            <a:ext cx="3429000" cy="320040"/>
-          </a:xfrm>
-          <a:prstGeom prst="rect">
-            <a:avLst/>
-          </a:prstGeom>
-          <a:noFill/>
-          <a:ln/>
-        </p:spPr>
-        <p:txBody>
-          <a:bodyPr wrap="square" lIns="0" tIns="0" rIns="0" bIns="0" rtlCol="0" anchor="ctr"/>
-          <a:lstStyle/>
-          <a:p>
-            <a:pPr algn="ctr" indent="0" marL="0">
-              <a:buNone/>
-            </a:pPr>
-            <a:r>
-              <a:rPr lang="en-US" sz="1680" b="1" spc="300" kern="0" dirty="0">
+              <a:t>Overflow is dropped</a:t>
+            </a:r>
+            <a:endParaRPr lang="en-US" sz="1680" dirty="0"/>
+          </a:p>
+        </p:txBody>
+      </p:sp>
+      <p:sp>
+        <p:nvSpPr>
+          <p:cNvPr id="36" name="Text 34"/>
+          <p:cNvSpPr/>
+          <p:nvPr/>
+        </p:nvSpPr>
+        <p:spPr>
+          <a:xfrm>
+            <a:off x="4800600" y="4581144"/>
+            <a:ext cx="2971800" cy="1005840"/>
+          </a:xfrm>
+          <a:prstGeom prst="rect">
+            <a:avLst/>
+          </a:prstGeom>
+          <a:noFill/>
+          <a:ln/>
+        </p:spPr>
+        <p:txBody>
+          <a:bodyPr wrap="square" lIns="0" tIns="0" rIns="0" bIns="0" rtlCol="0" anchor="t"/>
+          <a:lstStyle/>
+          <a:p>
+            <a:pPr indent="0" marL="0">
+              <a:lnSpc>
+                <a:spcPct val="110000"/>
+              </a:lnSpc>
+              <a:buNone/>
+            </a:pPr>
+            <a:r>
+              <a:rPr lang="en-US" sz="1380" dirty="0">
                 <a:solidFill>
                   <a:srgbClr val="E5E9F0"/>
-                </a:solidFill>
-                <a:latin typeface="Courier New" pitchFamily="34" charset="0"/>
-                <a:ea typeface="Courier New" pitchFamily="34" charset="-122"/>
-                <a:cs typeface="Courier New" pitchFamily="34" charset="-120"/>
-              </a:rPr>
-              <a:t>COLD</a:t>
-            </a:r>
-            <a:endParaRPr lang="en-US" sz="1680" dirty="0"/>
-          </a:p>
-        </p:txBody>
-      </p:sp>
-      <p:sp>
-        <p:nvSpPr>
-          <p:cNvPr id="23" name="Text 21"/>
-          <p:cNvSpPr/>
-          <p:nvPr/>
-        </p:nvSpPr>
-        <p:spPr>
-          <a:xfrm>
-            <a:off x="914400" y="2971800"/>
-            <a:ext cx="2880360" cy="777240"/>
-          </a:xfrm>
-          <a:prstGeom prst="rect">
-            <a:avLst/>
-          </a:prstGeom>
-          <a:noFill/>
-          <a:ln/>
-        </p:spPr>
-        <p:txBody>
-          <a:bodyPr wrap="square" lIns="0" tIns="0" rIns="0" bIns="0" rtlCol="0" anchor="ctr"/>
-          <a:lstStyle/>
-          <a:p>
-            <a:pPr algn="ctr" indent="0" marL="0">
-              <a:buNone/>
-            </a:pPr>
-            <a:r>
-              <a:rPr lang="en-US" sz="1380" dirty="0">
-                <a:solidFill>
-                  <a:srgbClr val="B8C0D0"/>
                 </a:solidFill>
                 <a:latin typeface="Calibri" pitchFamily="34" charset="0"/>
                 <a:ea typeface="Calibri" pitchFamily="34" charset="-122"/>
                 <a:cs typeface="Calibri" pitchFamily="34" charset="-120"/>
               </a:rPr>
-              <a:t>Always the most likely token. Deterministic — same answer every time.</a:t>
+              <a:t>Exceed the window and the oldest tokens fall off — the model simply can't see them.</a:t>
             </a:r>
             <a:endParaRPr lang="en-US" sz="1380" dirty="0"/>
           </a:p>
@@ -5107,175 +7959,24 @@
       </p:sp>
       <p:sp>
         <p:nvSpPr>
-          <p:cNvPr id="24" name="Shape 22"/>
-          <p:cNvSpPr/>
-          <p:nvPr/>
-        </p:nvSpPr>
-        <p:spPr>
-          <a:xfrm>
-            <a:off x="4343400" y="1554480"/>
-            <a:ext cx="3429000" cy="2286000"/>
+          <p:cNvPr id="37" name="Shape 35"/>
+          <p:cNvSpPr/>
+          <p:nvPr/>
+        </p:nvSpPr>
+        <p:spPr>
+          <a:xfrm>
+            <a:off x="8321040" y="3977640"/>
+            <a:ext cx="3429000" cy="1691640"/>
           </a:xfrm>
           <a:prstGeom prst="roundRect">
             <a:avLst>
-              <a:gd name="adj" fmla="val 4800"/>
+              <a:gd name="adj" fmla="val 6486"/>
             </a:avLst>
           </a:prstGeom>
           <a:solidFill>
             <a:srgbClr val="121A2E"/>
           </a:solidFill>
-          <a:ln w="19050">
-            <a:solidFill>
-              <a:srgbClr val="F2A93B"/>
-            </a:solidFill>
-            <a:prstDash val="solid"/>
-          </a:ln>
-          <a:effectLst>
-            <a:outerShdw sx="100000" sy="100000" kx="0" ky="0" algn="bl" rotWithShape="0" blurRad="101600" dist="38100" dir="2700000">
-              <a:srgbClr val="000000">
-                <a:alpha val="25000"/>
-              </a:srgbClr>
-            </a:outerShdw>
-          </a:effectLst>
-        </p:spPr>
-      </p:sp>
-      <p:sp>
-        <p:nvSpPr>
-          <p:cNvPr id="25" name="Text 23"/>
-          <p:cNvSpPr/>
-          <p:nvPr/>
-        </p:nvSpPr>
-        <p:spPr>
-          <a:xfrm>
-            <a:off x="4343400" y="1783080"/>
-            <a:ext cx="3429000" cy="731520"/>
-          </a:xfrm>
-          <a:prstGeom prst="rect">
-            <a:avLst/>
-          </a:prstGeom>
-          <a:noFill/>
-          <a:ln/>
-        </p:spPr>
-        <p:txBody>
-          <a:bodyPr wrap="square" lIns="0" tIns="0" rIns="0" bIns="0" rtlCol="0" anchor="ctr"/>
-          <a:lstStyle/>
-          <a:p>
-            <a:pPr algn="ctr" indent="0" marL="0">
-              <a:buNone/>
-            </a:pPr>
-            <a:r>
-              <a:rPr lang="en-US" sz="4080" b="1" dirty="0">
-                <a:solidFill>
-                  <a:srgbClr val="F2A93B"/>
-                </a:solidFill>
-                <a:latin typeface="Courier New" pitchFamily="34" charset="0"/>
-                <a:ea typeface="Courier New" pitchFamily="34" charset="-122"/>
-                <a:cs typeface="Courier New" pitchFamily="34" charset="-120"/>
-              </a:rPr>
-              <a:t>0.7</a:t>
-            </a:r>
-            <a:endParaRPr lang="en-US" sz="4080" dirty="0"/>
-          </a:p>
-        </p:txBody>
-      </p:sp>
-      <p:sp>
-        <p:nvSpPr>
-          <p:cNvPr id="26" name="Text 24"/>
-          <p:cNvSpPr/>
-          <p:nvPr/>
-        </p:nvSpPr>
-        <p:spPr>
-          <a:xfrm>
-            <a:off x="4343400" y="2606040"/>
-            <a:ext cx="3429000" cy="320040"/>
-          </a:xfrm>
-          <a:prstGeom prst="rect">
-            <a:avLst/>
-          </a:prstGeom>
-          <a:noFill/>
-          <a:ln/>
-        </p:spPr>
-        <p:txBody>
-          <a:bodyPr wrap="square" lIns="0" tIns="0" rIns="0" bIns="0" rtlCol="0" anchor="ctr"/>
-          <a:lstStyle/>
-          <a:p>
-            <a:pPr algn="ctr" indent="0" marL="0">
-              <a:buNone/>
-            </a:pPr>
-            <a:r>
-              <a:rPr lang="en-US" sz="1680" b="1" spc="300" kern="0" dirty="0">
-                <a:solidFill>
-                  <a:srgbClr val="E5E9F0"/>
-                </a:solidFill>
-                <a:latin typeface="Courier New" pitchFamily="34" charset="0"/>
-                <a:ea typeface="Courier New" pitchFamily="34" charset="-122"/>
-                <a:cs typeface="Courier New" pitchFamily="34" charset="-120"/>
-              </a:rPr>
-              <a:t>WARM</a:t>
-            </a:r>
-            <a:endParaRPr lang="en-US" sz="1680" dirty="0"/>
-          </a:p>
-        </p:txBody>
-      </p:sp>
-      <p:sp>
-        <p:nvSpPr>
-          <p:cNvPr id="27" name="Text 25"/>
-          <p:cNvSpPr/>
-          <p:nvPr/>
-        </p:nvSpPr>
-        <p:spPr>
-          <a:xfrm>
-            <a:off x="4617720" y="2971800"/>
-            <a:ext cx="2880360" cy="777240"/>
-          </a:xfrm>
-          <a:prstGeom prst="rect">
-            <a:avLst/>
-          </a:prstGeom>
-          <a:noFill/>
-          <a:ln/>
-        </p:spPr>
-        <p:txBody>
-          <a:bodyPr wrap="square" lIns="0" tIns="0" rIns="0" bIns="0" rtlCol="0" anchor="ctr"/>
-          <a:lstStyle/>
-          <a:p>
-            <a:pPr algn="ctr" indent="0" marL="0">
-              <a:buNone/>
-            </a:pPr>
-            <a:r>
-              <a:rPr lang="en-US" sz="1380" dirty="0">
-                <a:solidFill>
-                  <a:srgbClr val="B8C0D0"/>
-                </a:solidFill>
-                <a:latin typeface="Calibri" pitchFamily="34" charset="0"/>
-                <a:ea typeface="Calibri" pitchFamily="34" charset="-122"/>
-                <a:cs typeface="Calibri" pitchFamily="34" charset="-120"/>
-              </a:rPr>
-              <a:t>Samples from the distribution. Different each run — good for ideas.</a:t>
-            </a:r>
-            <a:endParaRPr lang="en-US" sz="1380" dirty="0"/>
-          </a:p>
-        </p:txBody>
-      </p:sp>
-      <p:sp>
-        <p:nvSpPr>
-          <p:cNvPr id="28" name="Shape 26"/>
-          <p:cNvSpPr/>
-          <p:nvPr/>
-        </p:nvSpPr>
-        <p:spPr>
-          <a:xfrm>
-            <a:off x="8046720" y="1554480"/>
-            <a:ext cx="3429000" cy="2286000"/>
-          </a:xfrm>
-          <a:prstGeom prst="roundRect">
-            <a:avLst>
-              <a:gd name="adj" fmla="val 4800"/>
-            </a:avLst>
-          </a:prstGeom>
-          <a:solidFill>
-            <a:srgbClr val="121A2E"/>
-          </a:solidFill>
-          <a:ln w="19050">
+          <a:ln w="15875">
             <a:solidFill>
               <a:srgbClr val="8B98AC"/>
             </a:solidFill>
@@ -5292,14 +7993,14 @@
       </p:sp>
       <p:sp>
         <p:nvSpPr>
-          <p:cNvPr id="29" name="Text 27"/>
-          <p:cNvSpPr/>
-          <p:nvPr/>
-        </p:nvSpPr>
-        <p:spPr>
-          <a:xfrm>
-            <a:off x="8046720" y="1783080"/>
-            <a:ext cx="3429000" cy="731520"/>
+          <p:cNvPr id="38" name="Text 36"/>
+          <p:cNvSpPr/>
+          <p:nvPr/>
+        </p:nvSpPr>
+        <p:spPr>
+          <a:xfrm>
+            <a:off x="8549640" y="4160520"/>
+            <a:ext cx="2971800" cy="365760"/>
           </a:xfrm>
           <a:prstGeom prst="rect">
             <a:avLst/>
@@ -5311,11 +8012,11 @@
           <a:bodyPr wrap="square" lIns="0" tIns="0" rIns="0" bIns="0" rtlCol="0" anchor="ctr"/>
           <a:lstStyle/>
           <a:p>
-            <a:pPr algn="ctr" indent="0" marL="0">
-              <a:buNone/>
-            </a:pPr>
-            <a:r>
-              <a:rPr lang="en-US" sz="4080" b="1" dirty="0">
+            <a:pPr indent="0" marL="0">
+              <a:buNone/>
+            </a:pPr>
+            <a:r>
+              <a:rPr lang="en-US" sz="1680" b="1" dirty="0">
                 <a:solidFill>
                   <a:srgbClr val="8B98AC"/>
                 </a:solidFill>
@@ -5323,546 +8024,51 @@
                 <a:ea typeface="Courier New" pitchFamily="34" charset="-122"/>
                 <a:cs typeface="Courier New" pitchFamily="34" charset="-120"/>
               </a:rPr>
-              <a:t>1.5</a:t>
-            </a:r>
-            <a:endParaRPr lang="en-US" sz="4080" dirty="0"/>
-          </a:p>
-        </p:txBody>
-      </p:sp>
-      <p:sp>
-        <p:nvSpPr>
-          <p:cNvPr id="30" name="Text 28"/>
-          <p:cNvSpPr/>
-          <p:nvPr/>
-        </p:nvSpPr>
-        <p:spPr>
-          <a:xfrm>
-            <a:off x="8046720" y="2606040"/>
-            <a:ext cx="3429000" cy="320040"/>
-          </a:xfrm>
-          <a:prstGeom prst="rect">
-            <a:avLst/>
-          </a:prstGeom>
-          <a:noFill/>
-          <a:ln/>
-        </p:spPr>
-        <p:txBody>
-          <a:bodyPr wrap="square" lIns="0" tIns="0" rIns="0" bIns="0" rtlCol="0" anchor="ctr"/>
-          <a:lstStyle/>
-          <a:p>
-            <a:pPr algn="ctr" indent="0" marL="0">
-              <a:buNone/>
-            </a:pPr>
-            <a:r>
-              <a:rPr lang="en-US" sz="1680" b="1" spc="300" kern="0" dirty="0">
+              <a:t>Why memory matters</a:t>
+            </a:r>
+            <a:endParaRPr lang="en-US" sz="1680" dirty="0"/>
+          </a:p>
+        </p:txBody>
+      </p:sp>
+      <p:sp>
+        <p:nvSpPr>
+          <p:cNvPr id="39" name="Text 37"/>
+          <p:cNvSpPr/>
+          <p:nvPr/>
+        </p:nvSpPr>
+        <p:spPr>
+          <a:xfrm>
+            <a:off x="8549640" y="4581144"/>
+            <a:ext cx="2971800" cy="1005840"/>
+          </a:xfrm>
+          <a:prstGeom prst="rect">
+            <a:avLst/>
+          </a:prstGeom>
+          <a:noFill/>
+          <a:ln/>
+        </p:spPr>
+        <p:txBody>
+          <a:bodyPr wrap="square" lIns="0" tIns="0" rIns="0" bIns="0" rtlCol="0" anchor="t"/>
+          <a:lstStyle/>
+          <a:p>
+            <a:pPr indent="0" marL="0">
+              <a:lnSpc>
+                <a:spcPct val="110000"/>
+              </a:lnSpc>
+              <a:buNone/>
+            </a:pPr>
+            <a:r>
+              <a:rPr lang="en-US" sz="1380" dirty="0">
                 <a:solidFill>
                   <a:srgbClr val="E5E9F0"/>
-                </a:solidFill>
-                <a:latin typeface="Courier New" pitchFamily="34" charset="0"/>
-                <a:ea typeface="Courier New" pitchFamily="34" charset="-122"/>
-                <a:cs typeface="Courier New" pitchFamily="34" charset="-120"/>
-              </a:rPr>
-              <a:t>HOT</a:t>
-            </a:r>
-            <a:endParaRPr lang="en-US" sz="1680" dirty="0"/>
-          </a:p>
-        </p:txBody>
-      </p:sp>
-      <p:sp>
-        <p:nvSpPr>
-          <p:cNvPr id="31" name="Text 29"/>
-          <p:cNvSpPr/>
-          <p:nvPr/>
-        </p:nvSpPr>
-        <p:spPr>
-          <a:xfrm>
-            <a:off x="8321040" y="2971800"/>
-            <a:ext cx="2880360" cy="777240"/>
-          </a:xfrm>
-          <a:prstGeom prst="rect">
-            <a:avLst/>
-          </a:prstGeom>
-          <a:noFill/>
-          <a:ln/>
-        </p:spPr>
-        <p:txBody>
-          <a:bodyPr wrap="square" lIns="0" tIns="0" rIns="0" bIns="0" rtlCol="0" anchor="ctr"/>
-          <a:lstStyle/>
-          <a:p>
-            <a:pPr algn="ctr" indent="0" marL="0">
-              <a:buNone/>
-            </a:pPr>
-            <a:r>
-              <a:rPr lang="en-US" sz="1380" dirty="0">
-                <a:solidFill>
-                  <a:srgbClr val="B8C0D0"/>
                 </a:solidFill>
                 <a:latin typeface="Calibri" pitchFamily="34" charset="0"/>
                 <a:ea typeface="Calibri" pitchFamily="34" charset="-122"/>
                 <a:cs typeface="Calibri" pitchFamily="34" charset="-120"/>
               </a:rPr>
-              <a:t>All tokens near-equal probability. Output becomes incoherent.</a:t>
+              <a:t>Chat history eats the budget too — Chapter 6 manages this with a memory window.</a:t>
             </a:r>
             <a:endParaRPr lang="en-US" sz="1380" dirty="0"/>
-          </a:p>
-        </p:txBody>
-      </p:sp>
-      <p:sp>
-        <p:nvSpPr>
-          <p:cNvPr id="32" name="Text 30"/>
-          <p:cNvSpPr/>
-          <p:nvPr/>
-        </p:nvSpPr>
-        <p:spPr>
-          <a:xfrm>
-            <a:off x="640080" y="4160520"/>
-            <a:ext cx="10881360" cy="320040"/>
-          </a:xfrm>
-          <a:prstGeom prst="rect">
-            <a:avLst/>
-          </a:prstGeom>
-          <a:noFill/>
-          <a:ln/>
-        </p:spPr>
-        <p:txBody>
-          <a:bodyPr wrap="square" lIns="0" tIns="0" rIns="0" bIns="0" rtlCol="0" anchor="ctr"/>
-          <a:lstStyle/>
-          <a:p>
-            <a:pPr indent="0" marL="0">
-              <a:buNone/>
-            </a:pPr>
-            <a:r>
-              <a:rPr lang="en-US" sz="1440" spc="200" kern="0" dirty="0">
-                <a:solidFill>
-                  <a:srgbClr val="8B98AC"/>
-                </a:solidFill>
-                <a:latin typeface="Courier New" pitchFamily="34" charset="0"/>
-                <a:ea typeface="Courier New" pitchFamily="34" charset="-122"/>
-                <a:cs typeface="Courier New" pitchFamily="34" charset="-120"/>
-              </a:rPr>
-              <a:t>Recommended for HR tasks</a:t>
-            </a:r>
-            <a:endParaRPr lang="en-US" sz="1440" dirty="0"/>
-          </a:p>
-        </p:txBody>
-      </p:sp>
-      <p:sp>
-        <p:nvSpPr>
-          <p:cNvPr id="33" name="Shape 31"/>
-          <p:cNvSpPr/>
-          <p:nvPr/>
-        </p:nvSpPr>
-        <p:spPr>
-          <a:xfrm>
-            <a:off x="640080" y="4572000"/>
-            <a:ext cx="2560320" cy="914400"/>
-          </a:xfrm>
-          <a:prstGeom prst="roundRect">
-            <a:avLst>
-              <a:gd name="adj" fmla="val 10000"/>
-            </a:avLst>
-          </a:prstGeom>
-          <a:solidFill>
-            <a:srgbClr val="121A2E"/>
-          </a:solidFill>
-          <a:ln w="9525">
-            <a:solidFill>
-              <a:srgbClr val="5B6478"/>
-            </a:solidFill>
-            <a:prstDash val="solid"/>
-          </a:ln>
-        </p:spPr>
-      </p:sp>
-      <p:sp>
-        <p:nvSpPr>
-          <p:cNvPr id="34" name="Text 32"/>
-          <p:cNvSpPr/>
-          <p:nvPr/>
-        </p:nvSpPr>
-        <p:spPr>
-          <a:xfrm>
-            <a:off x="777240" y="4709160"/>
-            <a:ext cx="2286000" cy="320040"/>
-          </a:xfrm>
-          <a:prstGeom prst="rect">
-            <a:avLst/>
-          </a:prstGeom>
-          <a:noFill/>
-          <a:ln/>
-        </p:spPr>
-        <p:txBody>
-          <a:bodyPr wrap="square" lIns="0" tIns="0" rIns="0" bIns="0" rtlCol="0" anchor="ctr"/>
-          <a:lstStyle/>
-          <a:p>
-            <a:pPr algn="ctr" indent="0" marL="0">
-              <a:buNone/>
-            </a:pPr>
-            <a:r>
-              <a:rPr lang="en-US" sz="1440" dirty="0">
-                <a:solidFill>
-                  <a:srgbClr val="E5E9F0"/>
-                </a:solidFill>
-                <a:latin typeface="Calibri" pitchFamily="34" charset="0"/>
-                <a:ea typeface="Calibri" pitchFamily="34" charset="-122"/>
-                <a:cs typeface="Calibri" pitchFamily="34" charset="-120"/>
-              </a:rPr>
-              <a:t>Policy lookup</a:t>
-            </a:r>
-            <a:endParaRPr lang="en-US" sz="1440" dirty="0"/>
-          </a:p>
-        </p:txBody>
-      </p:sp>
-      <p:sp>
-        <p:nvSpPr>
-          <p:cNvPr id="35" name="Text 33"/>
-          <p:cNvSpPr/>
-          <p:nvPr/>
-        </p:nvSpPr>
-        <p:spPr>
-          <a:xfrm>
-            <a:off x="777240" y="5029200"/>
-            <a:ext cx="2286000" cy="365760"/>
-          </a:xfrm>
-          <a:prstGeom prst="rect">
-            <a:avLst/>
-          </a:prstGeom>
-          <a:noFill/>
-          <a:ln/>
-        </p:spPr>
-        <p:txBody>
-          <a:bodyPr wrap="square" lIns="0" tIns="0" rIns="0" bIns="0" rtlCol="0" anchor="ctr"/>
-          <a:lstStyle/>
-          <a:p>
-            <a:pPr algn="ctr" indent="0" marL="0">
-              <a:buNone/>
-            </a:pPr>
-            <a:r>
-              <a:rPr lang="en-US" sz="1740" b="1" dirty="0">
-                <a:solidFill>
-                  <a:srgbClr val="F2A93B"/>
-                </a:solidFill>
-                <a:latin typeface="Courier New" pitchFamily="34" charset="0"/>
-                <a:ea typeface="Courier New" pitchFamily="34" charset="-122"/>
-                <a:cs typeface="Courier New" pitchFamily="34" charset="-120"/>
-              </a:rPr>
-              <a:t>0.0 – 0.1</a:t>
-            </a:r>
-            <a:endParaRPr lang="en-US" sz="1740" dirty="0"/>
-          </a:p>
-        </p:txBody>
-      </p:sp>
-      <p:sp>
-        <p:nvSpPr>
-          <p:cNvPr id="36" name="Shape 34"/>
-          <p:cNvSpPr/>
-          <p:nvPr/>
-        </p:nvSpPr>
-        <p:spPr>
-          <a:xfrm>
-            <a:off x="3383280" y="4572000"/>
-            <a:ext cx="2560320" cy="914400"/>
-          </a:xfrm>
-          <a:prstGeom prst="roundRect">
-            <a:avLst>
-              <a:gd name="adj" fmla="val 10000"/>
-            </a:avLst>
-          </a:prstGeom>
-          <a:solidFill>
-            <a:srgbClr val="121A2E"/>
-          </a:solidFill>
-          <a:ln w="9525">
-            <a:solidFill>
-              <a:srgbClr val="5B6478"/>
-            </a:solidFill>
-            <a:prstDash val="solid"/>
-          </a:ln>
-        </p:spPr>
-      </p:sp>
-      <p:sp>
-        <p:nvSpPr>
-          <p:cNvPr id="37" name="Text 35"/>
-          <p:cNvSpPr/>
-          <p:nvPr/>
-        </p:nvSpPr>
-        <p:spPr>
-          <a:xfrm>
-            <a:off x="3520440" y="4709160"/>
-            <a:ext cx="2286000" cy="320040"/>
-          </a:xfrm>
-          <a:prstGeom prst="rect">
-            <a:avLst/>
-          </a:prstGeom>
-          <a:noFill/>
-          <a:ln/>
-        </p:spPr>
-        <p:txBody>
-          <a:bodyPr wrap="square" lIns="0" tIns="0" rIns="0" bIns="0" rtlCol="0" anchor="ctr"/>
-          <a:lstStyle/>
-          <a:p>
-            <a:pPr algn="ctr" indent="0" marL="0">
-              <a:buNone/>
-            </a:pPr>
-            <a:r>
-              <a:rPr lang="en-US" sz="1440" dirty="0">
-                <a:solidFill>
-                  <a:srgbClr val="E5E9F0"/>
-                </a:solidFill>
-                <a:latin typeface="Calibri" pitchFamily="34" charset="0"/>
-                <a:ea typeface="Calibri" pitchFamily="34" charset="-122"/>
-                <a:cs typeface="Calibri" pitchFamily="34" charset="-120"/>
-              </a:rPr>
-              <a:t>Standard Q&amp;A</a:t>
-            </a:r>
-            <a:endParaRPr lang="en-US" sz="1440" dirty="0"/>
-          </a:p>
-        </p:txBody>
-      </p:sp>
-      <p:sp>
-        <p:nvSpPr>
-          <p:cNvPr id="38" name="Text 36"/>
-          <p:cNvSpPr/>
-          <p:nvPr/>
-        </p:nvSpPr>
-        <p:spPr>
-          <a:xfrm>
-            <a:off x="3520440" y="5029200"/>
-            <a:ext cx="2286000" cy="365760"/>
-          </a:xfrm>
-          <a:prstGeom prst="rect">
-            <a:avLst/>
-          </a:prstGeom>
-          <a:noFill/>
-          <a:ln/>
-        </p:spPr>
-        <p:txBody>
-          <a:bodyPr wrap="square" lIns="0" tIns="0" rIns="0" bIns="0" rtlCol="0" anchor="ctr"/>
-          <a:lstStyle/>
-          <a:p>
-            <a:pPr algn="ctr" indent="0" marL="0">
-              <a:buNone/>
-            </a:pPr>
-            <a:r>
-              <a:rPr lang="en-US" sz="1740" b="1" dirty="0">
-                <a:solidFill>
-                  <a:srgbClr val="F2A93B"/>
-                </a:solidFill>
-                <a:latin typeface="Courier New" pitchFamily="34" charset="0"/>
-                <a:ea typeface="Courier New" pitchFamily="34" charset="-122"/>
-                <a:cs typeface="Courier New" pitchFamily="34" charset="-120"/>
-              </a:rPr>
-              <a:t>0.3</a:t>
-            </a:r>
-            <a:endParaRPr lang="en-US" sz="1740" dirty="0"/>
-          </a:p>
-        </p:txBody>
-      </p:sp>
-      <p:sp>
-        <p:nvSpPr>
-          <p:cNvPr id="39" name="Shape 37"/>
-          <p:cNvSpPr/>
-          <p:nvPr/>
-        </p:nvSpPr>
-        <p:spPr>
-          <a:xfrm>
-            <a:off x="6126480" y="4572000"/>
-            <a:ext cx="2560320" cy="914400"/>
-          </a:xfrm>
-          <a:prstGeom prst="roundRect">
-            <a:avLst>
-              <a:gd name="adj" fmla="val 10000"/>
-            </a:avLst>
-          </a:prstGeom>
-          <a:solidFill>
-            <a:srgbClr val="121A2E"/>
-          </a:solidFill>
-          <a:ln w="9525">
-            <a:solidFill>
-              <a:srgbClr val="5B6478"/>
-            </a:solidFill>
-            <a:prstDash val="solid"/>
-          </a:ln>
-        </p:spPr>
-      </p:sp>
-      <p:sp>
-        <p:nvSpPr>
-          <p:cNvPr id="40" name="Text 38"/>
-          <p:cNvSpPr/>
-          <p:nvPr/>
-        </p:nvSpPr>
-        <p:spPr>
-          <a:xfrm>
-            <a:off x="6263640" y="4709160"/>
-            <a:ext cx="2286000" cy="320040"/>
-          </a:xfrm>
-          <a:prstGeom prst="rect">
-            <a:avLst/>
-          </a:prstGeom>
-          <a:noFill/>
-          <a:ln/>
-        </p:spPr>
-        <p:txBody>
-          <a:bodyPr wrap="square" lIns="0" tIns="0" rIns="0" bIns="0" rtlCol="0" anchor="ctr"/>
-          <a:lstStyle/>
-          <a:p>
-            <a:pPr algn="ctr" indent="0" marL="0">
-              <a:buNone/>
-            </a:pPr>
-            <a:r>
-              <a:rPr lang="en-US" sz="1440" dirty="0">
-                <a:solidFill>
-                  <a:srgbClr val="E5E9F0"/>
-                </a:solidFill>
-                <a:latin typeface="Calibri" pitchFamily="34" charset="0"/>
-                <a:ea typeface="Calibri" pitchFamily="34" charset="-122"/>
-                <a:cs typeface="Calibri" pitchFamily="34" charset="-120"/>
-              </a:rPr>
-              <a:t>Job descriptions</a:t>
-            </a:r>
-            <a:endParaRPr lang="en-US" sz="1440" dirty="0"/>
-          </a:p>
-        </p:txBody>
-      </p:sp>
-      <p:sp>
-        <p:nvSpPr>
-          <p:cNvPr id="41" name="Text 39"/>
-          <p:cNvSpPr/>
-          <p:nvPr/>
-        </p:nvSpPr>
-        <p:spPr>
-          <a:xfrm>
-            <a:off x="6263640" y="5029200"/>
-            <a:ext cx="2286000" cy="365760"/>
-          </a:xfrm>
-          <a:prstGeom prst="rect">
-            <a:avLst/>
-          </a:prstGeom>
-          <a:noFill/>
-          <a:ln/>
-        </p:spPr>
-        <p:txBody>
-          <a:bodyPr wrap="square" lIns="0" tIns="0" rIns="0" bIns="0" rtlCol="0" anchor="ctr"/>
-          <a:lstStyle/>
-          <a:p>
-            <a:pPr algn="ctr" indent="0" marL="0">
-              <a:buNone/>
-            </a:pPr>
-            <a:r>
-              <a:rPr lang="en-US" sz="1740" b="1" dirty="0">
-                <a:solidFill>
-                  <a:srgbClr val="F2A93B"/>
-                </a:solidFill>
-                <a:latin typeface="Courier New" pitchFamily="34" charset="0"/>
-                <a:ea typeface="Courier New" pitchFamily="34" charset="-122"/>
-                <a:cs typeface="Courier New" pitchFamily="34" charset="-120"/>
-              </a:rPr>
-              <a:t>0.7</a:t>
-            </a:r>
-            <a:endParaRPr lang="en-US" sz="1740" dirty="0"/>
-          </a:p>
-        </p:txBody>
-      </p:sp>
-      <p:sp>
-        <p:nvSpPr>
-          <p:cNvPr id="42" name="Shape 40"/>
-          <p:cNvSpPr/>
-          <p:nvPr/>
-        </p:nvSpPr>
-        <p:spPr>
-          <a:xfrm>
-            <a:off x="8869680" y="4572000"/>
-            <a:ext cx="2560320" cy="914400"/>
-          </a:xfrm>
-          <a:prstGeom prst="roundRect">
-            <a:avLst>
-              <a:gd name="adj" fmla="val 10000"/>
-            </a:avLst>
-          </a:prstGeom>
-          <a:solidFill>
-            <a:srgbClr val="121A2E"/>
-          </a:solidFill>
-          <a:ln w="9525">
-            <a:solidFill>
-              <a:srgbClr val="5B6478"/>
-            </a:solidFill>
-            <a:prstDash val="solid"/>
-          </a:ln>
-        </p:spPr>
-      </p:sp>
-      <p:sp>
-        <p:nvSpPr>
-          <p:cNvPr id="43" name="Text 41"/>
-          <p:cNvSpPr/>
-          <p:nvPr/>
-        </p:nvSpPr>
-        <p:spPr>
-          <a:xfrm>
-            <a:off x="9006840" y="4709160"/>
-            <a:ext cx="2286000" cy="320040"/>
-          </a:xfrm>
-          <a:prstGeom prst="rect">
-            <a:avLst/>
-          </a:prstGeom>
-          <a:noFill/>
-          <a:ln/>
-        </p:spPr>
-        <p:txBody>
-          <a:bodyPr wrap="square" lIns="0" tIns="0" rIns="0" bIns="0" rtlCol="0" anchor="ctr"/>
-          <a:lstStyle/>
-          <a:p>
-            <a:pPr algn="ctr" indent="0" marL="0">
-              <a:buNone/>
-            </a:pPr>
-            <a:r>
-              <a:rPr lang="en-US" sz="1440" dirty="0">
-                <a:solidFill>
-                  <a:srgbClr val="E5E9F0"/>
-                </a:solidFill>
-                <a:latin typeface="Calibri" pitchFamily="34" charset="0"/>
-                <a:ea typeface="Calibri" pitchFamily="34" charset="-122"/>
-                <a:cs typeface="Calibri" pitchFamily="34" charset="-120"/>
-              </a:rPr>
-              <a:t>Brainstorming</a:t>
-            </a:r>
-            <a:endParaRPr lang="en-US" sz="1440" dirty="0"/>
-          </a:p>
-        </p:txBody>
-      </p:sp>
-      <p:sp>
-        <p:nvSpPr>
-          <p:cNvPr id="44" name="Text 42"/>
-          <p:cNvSpPr/>
-          <p:nvPr/>
-        </p:nvSpPr>
-        <p:spPr>
-          <a:xfrm>
-            <a:off x="9006840" y="5029200"/>
-            <a:ext cx="2286000" cy="365760"/>
-          </a:xfrm>
-          <a:prstGeom prst="rect">
-            <a:avLst/>
-          </a:prstGeom>
-          <a:noFill/>
-          <a:ln/>
-        </p:spPr>
-        <p:txBody>
-          <a:bodyPr wrap="square" lIns="0" tIns="0" rIns="0" bIns="0" rtlCol="0" anchor="ctr"/>
-          <a:lstStyle/>
-          <a:p>
-            <a:pPr algn="ctr" indent="0" marL="0">
-              <a:buNone/>
-            </a:pPr>
-            <a:r>
-              <a:rPr lang="en-US" sz="1740" b="1" dirty="0">
-                <a:solidFill>
-                  <a:srgbClr val="F2A93B"/>
-                </a:solidFill>
-                <a:latin typeface="Courier New" pitchFamily="34" charset="0"/>
-                <a:ea typeface="Courier New" pitchFamily="34" charset="-122"/>
-                <a:cs typeface="Courier New" pitchFamily="34" charset="-120"/>
-              </a:rPr>
-              <a:t>0.8 – 0.9</a:t>
-            </a:r>
-            <a:endParaRPr lang="en-US" sz="1740" dirty="0"/>
           </a:p>
         </p:txBody>
       </p:sp>
@@ -6296,7 +8502,7 @@
                 <a:ea typeface="Courier New" pitchFamily="34" charset="-122"/>
                 <a:cs typeface="Courier New" pitchFamily="34" charset="-120"/>
               </a:rPr>
-              <a:t>5 / 9</a:t>
+              <a:t>5 / 11</a:t>
             </a:r>
             <a:endParaRPr lang="en-US" sz="1080" dirty="0"/>
           </a:p>
@@ -6374,7 +8580,7 @@
                 <a:ea typeface="Courier New" pitchFamily="34" charset="-122"/>
                 <a:cs typeface="Courier New" pitchFamily="34" charset="-120"/>
               </a:rPr>
-              <a:t>A Prompt is a list of Messages</a:t>
+              <a:t>Temperature controls randomness</a:t>
             </a:r>
             <a:endParaRPr lang="en-US" sz="3360" dirty="0"/>
           </a:p>
@@ -6388,18 +8594,169 @@
         </p:nvSpPr>
         <p:spPr>
           <a:xfrm>
-            <a:off x="640080" y="1600200"/>
-            <a:ext cx="10881360" cy="1051560"/>
+            <a:off x="640080" y="1554480"/>
+            <a:ext cx="3429000" cy="2286000"/>
           </a:xfrm>
           <a:prstGeom prst="roundRect">
             <a:avLst>
-              <a:gd name="adj" fmla="val 10435"/>
+              <a:gd name="adj" fmla="val 4800"/>
             </a:avLst>
           </a:prstGeom>
           <a:solidFill>
             <a:srgbClr val="121A2E"/>
           </a:solidFill>
-          <a:ln w="15875">
+          <a:ln w="19050">
+            <a:solidFill>
+              <a:srgbClr val="5FE0C5"/>
+            </a:solidFill>
+            <a:prstDash val="solid"/>
+          </a:ln>
+          <a:effectLst>
+            <a:outerShdw sx="100000" sy="100000" kx="0" ky="0" algn="bl" rotWithShape="0" blurRad="101600" dist="38100" dir="2700000">
+              <a:srgbClr val="000000">
+                <a:alpha val="25000"/>
+              </a:srgbClr>
+            </a:outerShdw>
+          </a:effectLst>
+        </p:spPr>
+      </p:sp>
+      <p:sp>
+        <p:nvSpPr>
+          <p:cNvPr id="21" name="Text 19"/>
+          <p:cNvSpPr/>
+          <p:nvPr/>
+        </p:nvSpPr>
+        <p:spPr>
+          <a:xfrm>
+            <a:off x="640080" y="1783080"/>
+            <a:ext cx="3429000" cy="731520"/>
+          </a:xfrm>
+          <a:prstGeom prst="rect">
+            <a:avLst/>
+          </a:prstGeom>
+          <a:noFill/>
+          <a:ln/>
+        </p:spPr>
+        <p:txBody>
+          <a:bodyPr wrap="square" lIns="0" tIns="0" rIns="0" bIns="0" rtlCol="0" anchor="ctr"/>
+          <a:lstStyle/>
+          <a:p>
+            <a:pPr algn="ctr" indent="0" marL="0">
+              <a:buNone/>
+            </a:pPr>
+            <a:r>
+              <a:rPr lang="en-US" sz="4080" b="1" dirty="0">
+                <a:solidFill>
+                  <a:srgbClr val="5FE0C5"/>
+                </a:solidFill>
+                <a:latin typeface="Courier New" pitchFamily="34" charset="0"/>
+                <a:ea typeface="Courier New" pitchFamily="34" charset="-122"/>
+                <a:cs typeface="Courier New" pitchFamily="34" charset="-120"/>
+              </a:rPr>
+              <a:t>0.0</a:t>
+            </a:r>
+            <a:endParaRPr lang="en-US" sz="4080" dirty="0"/>
+          </a:p>
+        </p:txBody>
+      </p:sp>
+      <p:sp>
+        <p:nvSpPr>
+          <p:cNvPr id="22" name="Text 20"/>
+          <p:cNvSpPr/>
+          <p:nvPr/>
+        </p:nvSpPr>
+        <p:spPr>
+          <a:xfrm>
+            <a:off x="640080" y="2606040"/>
+            <a:ext cx="3429000" cy="320040"/>
+          </a:xfrm>
+          <a:prstGeom prst="rect">
+            <a:avLst/>
+          </a:prstGeom>
+          <a:noFill/>
+          <a:ln/>
+        </p:spPr>
+        <p:txBody>
+          <a:bodyPr wrap="square" lIns="0" tIns="0" rIns="0" bIns="0" rtlCol="0" anchor="ctr"/>
+          <a:lstStyle/>
+          <a:p>
+            <a:pPr algn="ctr" indent="0" marL="0">
+              <a:buNone/>
+            </a:pPr>
+            <a:r>
+              <a:rPr lang="en-US" sz="1680" b="1" spc="300" kern="0" dirty="0">
+                <a:solidFill>
+                  <a:srgbClr val="E5E9F0"/>
+                </a:solidFill>
+                <a:latin typeface="Courier New" pitchFamily="34" charset="0"/>
+                <a:ea typeface="Courier New" pitchFamily="34" charset="-122"/>
+                <a:cs typeface="Courier New" pitchFamily="34" charset="-120"/>
+              </a:rPr>
+              <a:t>COLD</a:t>
+            </a:r>
+            <a:endParaRPr lang="en-US" sz="1680" dirty="0"/>
+          </a:p>
+        </p:txBody>
+      </p:sp>
+      <p:sp>
+        <p:nvSpPr>
+          <p:cNvPr id="23" name="Text 21"/>
+          <p:cNvSpPr/>
+          <p:nvPr/>
+        </p:nvSpPr>
+        <p:spPr>
+          <a:xfrm>
+            <a:off x="914400" y="2971800"/>
+            <a:ext cx="2880360" cy="777240"/>
+          </a:xfrm>
+          <a:prstGeom prst="rect">
+            <a:avLst/>
+          </a:prstGeom>
+          <a:noFill/>
+          <a:ln/>
+        </p:spPr>
+        <p:txBody>
+          <a:bodyPr wrap="square" lIns="0" tIns="0" rIns="0" bIns="0" rtlCol="0" anchor="ctr"/>
+          <a:lstStyle/>
+          <a:p>
+            <a:pPr algn="ctr" indent="0" marL="0">
+              <a:buNone/>
+            </a:pPr>
+            <a:r>
+              <a:rPr lang="en-US" sz="1380" dirty="0">
+                <a:solidFill>
+                  <a:srgbClr val="B8C0D0"/>
+                </a:solidFill>
+                <a:latin typeface="Calibri" pitchFamily="34" charset="0"/>
+                <a:ea typeface="Calibri" pitchFamily="34" charset="-122"/>
+                <a:cs typeface="Calibri" pitchFamily="34" charset="-120"/>
+              </a:rPr>
+              <a:t>Always the most likely token. Deterministic — same answer every time.</a:t>
+            </a:r>
+            <a:endParaRPr lang="en-US" sz="1380" dirty="0"/>
+          </a:p>
+        </p:txBody>
+      </p:sp>
+      <p:sp>
+        <p:nvSpPr>
+          <p:cNvPr id="24" name="Shape 22"/>
+          <p:cNvSpPr/>
+          <p:nvPr/>
+        </p:nvSpPr>
+        <p:spPr>
+          <a:xfrm>
+            <a:off x="4343400" y="1554480"/>
+            <a:ext cx="3429000" cy="2286000"/>
+          </a:xfrm>
+          <a:prstGeom prst="roundRect">
+            <a:avLst>
+              <a:gd name="adj" fmla="val 4800"/>
+            </a:avLst>
+          </a:prstGeom>
+          <a:solidFill>
+            <a:srgbClr val="121A2E"/>
+          </a:solidFill>
+          <a:ln w="19050">
             <a:solidFill>
               <a:srgbClr val="F2A93B"/>
             </a:solidFill>
@@ -6416,14 +8773,14 @@
       </p:sp>
       <p:sp>
         <p:nvSpPr>
-          <p:cNvPr id="21" name="Text 19"/>
-          <p:cNvSpPr/>
-          <p:nvPr/>
-        </p:nvSpPr>
-        <p:spPr>
-          <a:xfrm>
-            <a:off x="914400" y="1783080"/>
-            <a:ext cx="3291840" cy="685800"/>
+          <p:cNvPr id="25" name="Text 23"/>
+          <p:cNvSpPr/>
+          <p:nvPr/>
+        </p:nvSpPr>
+        <p:spPr>
+          <a:xfrm>
+            <a:off x="4343400" y="1783080"/>
+            <a:ext cx="3429000" cy="731520"/>
           </a:xfrm>
           <a:prstGeom prst="rect">
             <a:avLst/>
@@ -6435,11 +8792,11 @@
           <a:bodyPr wrap="square" lIns="0" tIns="0" rIns="0" bIns="0" rtlCol="0" anchor="ctr"/>
           <a:lstStyle/>
           <a:p>
-            <a:pPr indent="0" marL="0">
-              <a:buNone/>
-            </a:pPr>
-            <a:r>
-              <a:rPr lang="en-US" sz="1920" b="1" dirty="0">
+            <a:pPr algn="ctr" indent="0" marL="0">
+              <a:buNone/>
+            </a:pPr>
+            <a:r>
+              <a:rPr lang="en-US" sz="4080" b="1" dirty="0">
                 <a:solidFill>
                   <a:srgbClr val="F2A93B"/>
                 </a:solidFill>
@@ -6447,45 +8804,22 @@
                 <a:ea typeface="Courier New" pitchFamily="34" charset="-122"/>
                 <a:cs typeface="Courier New" pitchFamily="34" charset="-120"/>
               </a:rPr>
-              <a:t>SystemMessage</a:t>
-            </a:r>
-            <a:endParaRPr lang="en-US" sz="1920" dirty="0"/>
-          </a:p>
-        </p:txBody>
-      </p:sp>
-      <p:sp>
-        <p:nvSpPr>
-          <p:cNvPr id="22" name="Shape 20"/>
-          <p:cNvSpPr/>
-          <p:nvPr/>
-        </p:nvSpPr>
-        <p:spPr>
-          <a:xfrm>
-            <a:off x="4434840" y="1783080"/>
-            <a:ext cx="0" cy="685800"/>
-          </a:xfrm>
-          <a:prstGeom prst="line">
-            <a:avLst/>
-          </a:prstGeom>
-          <a:noFill/>
-          <a:ln w="12700">
-            <a:solidFill>
-              <a:srgbClr val="5B6478"/>
-            </a:solidFill>
-            <a:prstDash val="solid"/>
-          </a:ln>
-        </p:spPr>
-      </p:sp>
-      <p:sp>
-        <p:nvSpPr>
-          <p:cNvPr id="23" name="Text 21"/>
-          <p:cNvSpPr/>
-          <p:nvPr/>
-        </p:nvSpPr>
-        <p:spPr>
-          <a:xfrm>
-            <a:off x="4663440" y="1783080"/>
-            <a:ext cx="2103120" cy="685800"/>
+              <a:t>0.7</a:t>
+            </a:r>
+            <a:endParaRPr lang="en-US" sz="4080" dirty="0"/>
+          </a:p>
+        </p:txBody>
+      </p:sp>
+      <p:sp>
+        <p:nvSpPr>
+          <p:cNvPr id="26" name="Text 24"/>
+          <p:cNvSpPr/>
+          <p:nvPr/>
+        </p:nvSpPr>
+        <p:spPr>
+          <a:xfrm>
+            <a:off x="4343400" y="2606040"/>
+            <a:ext cx="3429000" cy="320040"/>
           </a:xfrm>
           <a:prstGeom prst="rect">
             <a:avLst/>
@@ -6497,257 +8831,83 @@
           <a:bodyPr wrap="square" lIns="0" tIns="0" rIns="0" bIns="0" rtlCol="0" anchor="ctr"/>
           <a:lstStyle/>
           <a:p>
-            <a:pPr indent="0" marL="0">
-              <a:buNone/>
-            </a:pPr>
-            <a:r>
-              <a:rPr lang="en-US" sz="1560" dirty="0">
+            <a:pPr algn="ctr" indent="0" marL="0">
+              <a:buNone/>
+            </a:pPr>
+            <a:r>
+              <a:rPr lang="en-US" sz="1680" b="1" spc="300" kern="0" dirty="0">
                 <a:solidFill>
                   <a:srgbClr val="E5E9F0"/>
+                </a:solidFill>
+                <a:latin typeface="Courier New" pitchFamily="34" charset="0"/>
+                <a:ea typeface="Courier New" pitchFamily="34" charset="-122"/>
+                <a:cs typeface="Courier New" pitchFamily="34" charset="-120"/>
+              </a:rPr>
+              <a:t>WARM</a:t>
+            </a:r>
+            <a:endParaRPr lang="en-US" sz="1680" dirty="0"/>
+          </a:p>
+        </p:txBody>
+      </p:sp>
+      <p:sp>
+        <p:nvSpPr>
+          <p:cNvPr id="27" name="Text 25"/>
+          <p:cNvSpPr/>
+          <p:nvPr/>
+        </p:nvSpPr>
+        <p:spPr>
+          <a:xfrm>
+            <a:off x="4617720" y="2971800"/>
+            <a:ext cx="2880360" cy="777240"/>
+          </a:xfrm>
+          <a:prstGeom prst="rect">
+            <a:avLst/>
+          </a:prstGeom>
+          <a:noFill/>
+          <a:ln/>
+        </p:spPr>
+        <p:txBody>
+          <a:bodyPr wrap="square" lIns="0" tIns="0" rIns="0" bIns="0" rtlCol="0" anchor="ctr"/>
+          <a:lstStyle/>
+          <a:p>
+            <a:pPr algn="ctr" indent="0" marL="0">
+              <a:buNone/>
+            </a:pPr>
+            <a:r>
+              <a:rPr lang="en-US" sz="1380" dirty="0">
+                <a:solidFill>
+                  <a:srgbClr val="B8C0D0"/>
                 </a:solidFill>
                 <a:latin typeface="Calibri" pitchFamily="34" charset="0"/>
                 <a:ea typeface="Calibri" pitchFamily="34" charset="-122"/>
                 <a:cs typeface="Calibri" pitchFamily="34" charset="-120"/>
               </a:rPr>
-              <a:t>Developer</a:t>
-            </a:r>
-            <a:endParaRPr lang="en-US" sz="1560" dirty="0"/>
-          </a:p>
-        </p:txBody>
-      </p:sp>
-      <p:sp>
-        <p:nvSpPr>
-          <p:cNvPr id="24" name="Text 22"/>
-          <p:cNvSpPr/>
-          <p:nvPr/>
-        </p:nvSpPr>
-        <p:spPr>
-          <a:xfrm>
-            <a:off x="6858000" y="1783080"/>
-            <a:ext cx="4480560" cy="685800"/>
-          </a:xfrm>
-          <a:prstGeom prst="rect">
-            <a:avLst/>
-          </a:prstGeom>
-          <a:noFill/>
-          <a:ln/>
-        </p:spPr>
-        <p:txBody>
-          <a:bodyPr wrap="square" lIns="0" tIns="0" rIns="0" bIns="0" rtlCol="0" anchor="ctr"/>
-          <a:lstStyle/>
-          <a:p>
-            <a:pPr indent="0" marL="0">
-              <a:buNone/>
-            </a:pPr>
-            <a:r>
-              <a:rPr lang="en-US" sz="1560" dirty="0">
-                <a:solidFill>
-                  <a:srgbClr val="B8C0D0"/>
-                </a:solidFill>
-                <a:latin typeface="Calibri" pitchFamily="34" charset="0"/>
-                <a:ea typeface="Calibri" pitchFamily="34" charset="-122"/>
-                <a:cs typeface="Calibri" pitchFamily="34" charset="-120"/>
-              </a:rPr>
-              <a:t>Instructions, persona, constraints</a:t>
-            </a:r>
-            <a:endParaRPr lang="en-US" sz="1560" dirty="0"/>
-          </a:p>
-        </p:txBody>
-      </p:sp>
-      <p:sp>
-        <p:nvSpPr>
-          <p:cNvPr id="25" name="Shape 23"/>
-          <p:cNvSpPr/>
-          <p:nvPr/>
-        </p:nvSpPr>
-        <p:spPr>
-          <a:xfrm>
-            <a:off x="640080" y="2880360"/>
-            <a:ext cx="10881360" cy="1051560"/>
+              <a:t>Samples from the distribution. Different each run — good for ideas.</a:t>
+            </a:r>
+            <a:endParaRPr lang="en-US" sz="1380" dirty="0"/>
+          </a:p>
+        </p:txBody>
+      </p:sp>
+      <p:sp>
+        <p:nvSpPr>
+          <p:cNvPr id="28" name="Shape 26"/>
+          <p:cNvSpPr/>
+          <p:nvPr/>
+        </p:nvSpPr>
+        <p:spPr>
+          <a:xfrm>
+            <a:off x="8046720" y="1554480"/>
+            <a:ext cx="3429000" cy="2286000"/>
           </a:xfrm>
           <a:prstGeom prst="roundRect">
             <a:avLst>
-              <a:gd name="adj" fmla="val 10435"/>
+              <a:gd name="adj" fmla="val 4800"/>
             </a:avLst>
           </a:prstGeom>
           <a:solidFill>
             <a:srgbClr val="121A2E"/>
           </a:solidFill>
-          <a:ln w="15875">
-            <a:solidFill>
-              <a:srgbClr val="5FE0C5"/>
-            </a:solidFill>
-            <a:prstDash val="solid"/>
-          </a:ln>
-          <a:effectLst>
-            <a:outerShdw sx="100000" sy="100000" kx="0" ky="0" algn="bl" rotWithShape="0" blurRad="101600" dist="38100" dir="2700000">
-              <a:srgbClr val="000000">
-                <a:alpha val="25000"/>
-              </a:srgbClr>
-            </a:outerShdw>
-          </a:effectLst>
-        </p:spPr>
-      </p:sp>
-      <p:sp>
-        <p:nvSpPr>
-          <p:cNvPr id="26" name="Text 24"/>
-          <p:cNvSpPr/>
-          <p:nvPr/>
-        </p:nvSpPr>
-        <p:spPr>
-          <a:xfrm>
-            <a:off x="914400" y="3063240"/>
-            <a:ext cx="3291840" cy="685800"/>
-          </a:xfrm>
-          <a:prstGeom prst="rect">
-            <a:avLst/>
-          </a:prstGeom>
-          <a:noFill/>
-          <a:ln/>
-        </p:spPr>
-        <p:txBody>
-          <a:bodyPr wrap="square" lIns="0" tIns="0" rIns="0" bIns="0" rtlCol="0" anchor="ctr"/>
-          <a:lstStyle/>
-          <a:p>
-            <a:pPr indent="0" marL="0">
-              <a:buNone/>
-            </a:pPr>
-            <a:r>
-              <a:rPr lang="en-US" sz="1920" b="1" dirty="0">
-                <a:solidFill>
-                  <a:srgbClr val="5FE0C5"/>
-                </a:solidFill>
-                <a:latin typeface="Courier New" pitchFamily="34" charset="0"/>
-                <a:ea typeface="Courier New" pitchFamily="34" charset="-122"/>
-                <a:cs typeface="Courier New" pitchFamily="34" charset="-120"/>
-              </a:rPr>
-              <a:t>UserMessage</a:t>
-            </a:r>
-            <a:endParaRPr lang="en-US" sz="1920" dirty="0"/>
-          </a:p>
-        </p:txBody>
-      </p:sp>
-      <p:sp>
-        <p:nvSpPr>
-          <p:cNvPr id="27" name="Shape 25"/>
-          <p:cNvSpPr/>
-          <p:nvPr/>
-        </p:nvSpPr>
-        <p:spPr>
-          <a:xfrm>
-            <a:off x="4434840" y="3063240"/>
-            <a:ext cx="0" cy="685800"/>
-          </a:xfrm>
-          <a:prstGeom prst="line">
-            <a:avLst/>
-          </a:prstGeom>
-          <a:noFill/>
-          <a:ln w="12700">
-            <a:solidFill>
-              <a:srgbClr val="5B6478"/>
-            </a:solidFill>
-            <a:prstDash val="solid"/>
-          </a:ln>
-        </p:spPr>
-      </p:sp>
-      <p:sp>
-        <p:nvSpPr>
-          <p:cNvPr id="28" name="Text 26"/>
-          <p:cNvSpPr/>
-          <p:nvPr/>
-        </p:nvSpPr>
-        <p:spPr>
-          <a:xfrm>
-            <a:off x="4663440" y="3063240"/>
-            <a:ext cx="2103120" cy="685800"/>
-          </a:xfrm>
-          <a:prstGeom prst="rect">
-            <a:avLst/>
-          </a:prstGeom>
-          <a:noFill/>
-          <a:ln/>
-        </p:spPr>
-        <p:txBody>
-          <a:bodyPr wrap="square" lIns="0" tIns="0" rIns="0" bIns="0" rtlCol="0" anchor="ctr"/>
-          <a:lstStyle/>
-          <a:p>
-            <a:pPr indent="0" marL="0">
-              <a:buNone/>
-            </a:pPr>
-            <a:r>
-              <a:rPr lang="en-US" sz="1560" dirty="0">
-                <a:solidFill>
-                  <a:srgbClr val="E5E9F0"/>
-                </a:solidFill>
-                <a:latin typeface="Calibri" pitchFamily="34" charset="0"/>
-                <a:ea typeface="Calibri" pitchFamily="34" charset="-122"/>
-                <a:cs typeface="Calibri" pitchFamily="34" charset="-120"/>
-              </a:rPr>
-              <a:t>End user</a:t>
-            </a:r>
-            <a:endParaRPr lang="en-US" sz="1560" dirty="0"/>
-          </a:p>
-        </p:txBody>
-      </p:sp>
-      <p:sp>
-        <p:nvSpPr>
-          <p:cNvPr id="29" name="Text 27"/>
-          <p:cNvSpPr/>
-          <p:nvPr/>
-        </p:nvSpPr>
-        <p:spPr>
-          <a:xfrm>
-            <a:off x="6858000" y="3063240"/>
-            <a:ext cx="4480560" cy="685800"/>
-          </a:xfrm>
-          <a:prstGeom prst="rect">
-            <a:avLst/>
-          </a:prstGeom>
-          <a:noFill/>
-          <a:ln/>
-        </p:spPr>
-        <p:txBody>
-          <a:bodyPr wrap="square" lIns="0" tIns="0" rIns="0" bIns="0" rtlCol="0" anchor="ctr"/>
-          <a:lstStyle/>
-          <a:p>
-            <a:pPr indent="0" marL="0">
-              <a:buNone/>
-            </a:pPr>
-            <a:r>
-              <a:rPr lang="en-US" sz="1560" dirty="0">
-                <a:solidFill>
-                  <a:srgbClr val="B8C0D0"/>
-                </a:solidFill>
-                <a:latin typeface="Calibri" pitchFamily="34" charset="0"/>
-                <a:ea typeface="Calibri" pitchFamily="34" charset="-122"/>
-                <a:cs typeface="Calibri" pitchFamily="34" charset="-120"/>
-              </a:rPr>
-              <a:t>The actual question</a:t>
-            </a:r>
-            <a:endParaRPr lang="en-US" sz="1560" dirty="0"/>
-          </a:p>
-        </p:txBody>
-      </p:sp>
-      <p:sp>
-        <p:nvSpPr>
-          <p:cNvPr id="30" name="Shape 28"/>
-          <p:cNvSpPr/>
-          <p:nvPr/>
-        </p:nvSpPr>
-        <p:spPr>
-          <a:xfrm>
-            <a:off x="640080" y="4160520"/>
-            <a:ext cx="10881360" cy="1051560"/>
-          </a:xfrm>
-          <a:prstGeom prst="roundRect">
-            <a:avLst>
-              <a:gd name="adj" fmla="val 10435"/>
-            </a:avLst>
-          </a:prstGeom>
-          <a:solidFill>
-            <a:srgbClr val="121A2E"/>
-          </a:solidFill>
-          <a:ln w="15875">
+          <a:ln w="19050">
             <a:solidFill>
               <a:srgbClr val="8B98AC"/>
             </a:solidFill>
@@ -6764,14 +8924,14 @@
       </p:sp>
       <p:sp>
         <p:nvSpPr>
-          <p:cNvPr id="31" name="Text 29"/>
-          <p:cNvSpPr/>
-          <p:nvPr/>
-        </p:nvSpPr>
-        <p:spPr>
-          <a:xfrm>
-            <a:off x="914400" y="4343400"/>
-            <a:ext cx="3291840" cy="685800"/>
+          <p:cNvPr id="29" name="Text 27"/>
+          <p:cNvSpPr/>
+          <p:nvPr/>
+        </p:nvSpPr>
+        <p:spPr>
+          <a:xfrm>
+            <a:off x="8046720" y="1783080"/>
+            <a:ext cx="3429000" cy="731520"/>
           </a:xfrm>
           <a:prstGeom prst="rect">
             <a:avLst/>
@@ -6783,11 +8943,11 @@
           <a:bodyPr wrap="square" lIns="0" tIns="0" rIns="0" bIns="0" rtlCol="0" anchor="ctr"/>
           <a:lstStyle/>
           <a:p>
-            <a:pPr indent="0" marL="0">
-              <a:buNone/>
-            </a:pPr>
-            <a:r>
-              <a:rPr lang="en-US" sz="1920" b="1" dirty="0">
+            <a:pPr algn="ctr" indent="0" marL="0">
+              <a:buNone/>
+            </a:pPr>
+            <a:r>
+              <a:rPr lang="en-US" sz="4080" b="1" dirty="0">
                 <a:solidFill>
                   <a:srgbClr val="8B98AC"/>
                 </a:solidFill>
@@ -6795,28 +8955,149 @@
                 <a:ea typeface="Courier New" pitchFamily="34" charset="-122"/>
                 <a:cs typeface="Courier New" pitchFamily="34" charset="-120"/>
               </a:rPr>
-              <a:t>AssistantMessage</a:t>
-            </a:r>
-            <a:endParaRPr lang="en-US" sz="1920" dirty="0"/>
-          </a:p>
-        </p:txBody>
-      </p:sp>
-      <p:sp>
-        <p:nvSpPr>
-          <p:cNvPr id="32" name="Shape 30"/>
-          <p:cNvSpPr/>
-          <p:nvPr/>
-        </p:nvSpPr>
-        <p:spPr>
-          <a:xfrm>
-            <a:off x="4434840" y="4343400"/>
-            <a:ext cx="0" cy="685800"/>
-          </a:xfrm>
-          <a:prstGeom prst="line">
-            <a:avLst/>
-          </a:prstGeom>
-          <a:noFill/>
-          <a:ln w="12700">
+              <a:t>1.5</a:t>
+            </a:r>
+            <a:endParaRPr lang="en-US" sz="4080" dirty="0"/>
+          </a:p>
+        </p:txBody>
+      </p:sp>
+      <p:sp>
+        <p:nvSpPr>
+          <p:cNvPr id="30" name="Text 28"/>
+          <p:cNvSpPr/>
+          <p:nvPr/>
+        </p:nvSpPr>
+        <p:spPr>
+          <a:xfrm>
+            <a:off x="8046720" y="2606040"/>
+            <a:ext cx="3429000" cy="320040"/>
+          </a:xfrm>
+          <a:prstGeom prst="rect">
+            <a:avLst/>
+          </a:prstGeom>
+          <a:noFill/>
+          <a:ln/>
+        </p:spPr>
+        <p:txBody>
+          <a:bodyPr wrap="square" lIns="0" tIns="0" rIns="0" bIns="0" rtlCol="0" anchor="ctr"/>
+          <a:lstStyle/>
+          <a:p>
+            <a:pPr algn="ctr" indent="0" marL="0">
+              <a:buNone/>
+            </a:pPr>
+            <a:r>
+              <a:rPr lang="en-US" sz="1680" b="1" spc="300" kern="0" dirty="0">
+                <a:solidFill>
+                  <a:srgbClr val="E5E9F0"/>
+                </a:solidFill>
+                <a:latin typeface="Courier New" pitchFamily="34" charset="0"/>
+                <a:ea typeface="Courier New" pitchFamily="34" charset="-122"/>
+                <a:cs typeface="Courier New" pitchFamily="34" charset="-120"/>
+              </a:rPr>
+              <a:t>HOT</a:t>
+            </a:r>
+            <a:endParaRPr lang="en-US" sz="1680" dirty="0"/>
+          </a:p>
+        </p:txBody>
+      </p:sp>
+      <p:sp>
+        <p:nvSpPr>
+          <p:cNvPr id="31" name="Text 29"/>
+          <p:cNvSpPr/>
+          <p:nvPr/>
+        </p:nvSpPr>
+        <p:spPr>
+          <a:xfrm>
+            <a:off x="8321040" y="2971800"/>
+            <a:ext cx="2880360" cy="777240"/>
+          </a:xfrm>
+          <a:prstGeom prst="rect">
+            <a:avLst/>
+          </a:prstGeom>
+          <a:noFill/>
+          <a:ln/>
+        </p:spPr>
+        <p:txBody>
+          <a:bodyPr wrap="square" lIns="0" tIns="0" rIns="0" bIns="0" rtlCol="0" anchor="ctr"/>
+          <a:lstStyle/>
+          <a:p>
+            <a:pPr algn="ctr" indent="0" marL="0">
+              <a:buNone/>
+            </a:pPr>
+            <a:r>
+              <a:rPr lang="en-US" sz="1380" dirty="0">
+                <a:solidFill>
+                  <a:srgbClr val="B8C0D0"/>
+                </a:solidFill>
+                <a:latin typeface="Calibri" pitchFamily="34" charset="0"/>
+                <a:ea typeface="Calibri" pitchFamily="34" charset="-122"/>
+                <a:cs typeface="Calibri" pitchFamily="34" charset="-120"/>
+              </a:rPr>
+              <a:t>All tokens near-equal probability. Output becomes incoherent.</a:t>
+            </a:r>
+            <a:endParaRPr lang="en-US" sz="1380" dirty="0"/>
+          </a:p>
+        </p:txBody>
+      </p:sp>
+      <p:sp>
+        <p:nvSpPr>
+          <p:cNvPr id="32" name="Text 30"/>
+          <p:cNvSpPr/>
+          <p:nvPr/>
+        </p:nvSpPr>
+        <p:spPr>
+          <a:xfrm>
+            <a:off x="640080" y="4160520"/>
+            <a:ext cx="10881360" cy="320040"/>
+          </a:xfrm>
+          <a:prstGeom prst="rect">
+            <a:avLst/>
+          </a:prstGeom>
+          <a:noFill/>
+          <a:ln/>
+        </p:spPr>
+        <p:txBody>
+          <a:bodyPr wrap="square" lIns="0" tIns="0" rIns="0" bIns="0" rtlCol="0" anchor="ctr"/>
+          <a:lstStyle/>
+          <a:p>
+            <a:pPr indent="0" marL="0">
+              <a:buNone/>
+            </a:pPr>
+            <a:r>
+              <a:rPr lang="en-US" sz="1440" spc="200" kern="0" dirty="0">
+                <a:solidFill>
+                  <a:srgbClr val="8B98AC"/>
+                </a:solidFill>
+                <a:latin typeface="Courier New" pitchFamily="34" charset="0"/>
+                <a:ea typeface="Courier New" pitchFamily="34" charset="-122"/>
+                <a:cs typeface="Courier New" pitchFamily="34" charset="-120"/>
+              </a:rPr>
+              <a:t>Recommended for HR tasks</a:t>
+            </a:r>
+            <a:endParaRPr lang="en-US" sz="1440" dirty="0"/>
+          </a:p>
+        </p:txBody>
+      </p:sp>
+      <p:sp>
+        <p:nvSpPr>
+          <p:cNvPr id="33" name="Shape 31"/>
+          <p:cNvSpPr/>
+          <p:nvPr/>
+        </p:nvSpPr>
+        <p:spPr>
+          <a:xfrm>
+            <a:off x="640080" y="4572000"/>
+            <a:ext cx="2560320" cy="914400"/>
+          </a:xfrm>
+          <a:prstGeom prst="roundRect">
+            <a:avLst>
+              <a:gd name="adj" fmla="val 10000"/>
+            </a:avLst>
+          </a:prstGeom>
+          <a:solidFill>
+            <a:srgbClr val="121A2E"/>
+          </a:solidFill>
+          <a:ln w="9525">
             <a:solidFill>
               <a:srgbClr val="5B6478"/>
             </a:solidFill>
@@ -6826,14 +9107,14 @@
       </p:sp>
       <p:sp>
         <p:nvSpPr>
-          <p:cNvPr id="33" name="Text 31"/>
-          <p:cNvSpPr/>
-          <p:nvPr/>
-        </p:nvSpPr>
-        <p:spPr>
-          <a:xfrm>
-            <a:off x="4663440" y="4343400"/>
-            <a:ext cx="2103120" cy="685800"/>
+          <p:cNvPr id="34" name="Text 32"/>
+          <p:cNvSpPr/>
+          <p:nvPr/>
+        </p:nvSpPr>
+        <p:spPr>
+          <a:xfrm>
+            <a:off x="777240" y="4709160"/>
+            <a:ext cx="2286000" cy="320040"/>
           </a:xfrm>
           <a:prstGeom prst="rect">
             <a:avLst/>
@@ -6845,11 +9126,11 @@
           <a:bodyPr wrap="square" lIns="0" tIns="0" rIns="0" bIns="0" rtlCol="0" anchor="ctr"/>
           <a:lstStyle/>
           <a:p>
-            <a:pPr indent="0" marL="0">
-              <a:buNone/>
-            </a:pPr>
-            <a:r>
-              <a:rPr lang="en-US" sz="1560" dirty="0">
+            <a:pPr algn="ctr" indent="0" marL="0">
+              <a:buNone/>
+            </a:pPr>
+            <a:r>
+              <a:rPr lang="en-US" sz="1440" dirty="0">
                 <a:solidFill>
                   <a:srgbClr val="E5E9F0"/>
                 </a:solidFill>
@@ -6857,22 +9138,22 @@
                 <a:ea typeface="Calibri" pitchFamily="34" charset="-122"/>
                 <a:cs typeface="Calibri" pitchFamily="34" charset="-120"/>
               </a:rPr>
-              <a:t>The model</a:t>
-            </a:r>
-            <a:endParaRPr lang="en-US" sz="1560" dirty="0"/>
-          </a:p>
-        </p:txBody>
-      </p:sp>
-      <p:sp>
-        <p:nvSpPr>
-          <p:cNvPr id="34" name="Text 32"/>
-          <p:cNvSpPr/>
-          <p:nvPr/>
-        </p:nvSpPr>
-        <p:spPr>
-          <a:xfrm>
-            <a:off x="6858000" y="4343400"/>
-            <a:ext cx="4480560" cy="685800"/>
+              <a:t>Policy lookup</a:t>
+            </a:r>
+            <a:endParaRPr lang="en-US" sz="1440" dirty="0"/>
+          </a:p>
+        </p:txBody>
+      </p:sp>
+      <p:sp>
+        <p:nvSpPr>
+          <p:cNvPr id="35" name="Text 33"/>
+          <p:cNvSpPr/>
+          <p:nvPr/>
+        </p:nvSpPr>
+        <p:spPr>
+          <a:xfrm>
+            <a:off x="777240" y="5029200"/>
+            <a:ext cx="2286000" cy="365760"/>
           </a:xfrm>
           <a:prstGeom prst="rect">
             <a:avLst/>
@@ -6884,34 +9165,100 @@
           <a:bodyPr wrap="square" lIns="0" tIns="0" rIns="0" bIns="0" rtlCol="0" anchor="ctr"/>
           <a:lstStyle/>
           <a:p>
-            <a:pPr indent="0" marL="0">
-              <a:buNone/>
-            </a:pPr>
-            <a:r>
-              <a:rPr lang="en-US" sz="1560" dirty="0">
-                <a:solidFill>
-                  <a:srgbClr val="B8C0D0"/>
+            <a:pPr algn="ctr" indent="0" marL="0">
+              <a:buNone/>
+            </a:pPr>
+            <a:r>
+              <a:rPr lang="en-US" sz="1740" b="1" dirty="0">
+                <a:solidFill>
+                  <a:srgbClr val="F2A93B"/>
+                </a:solidFill>
+                <a:latin typeface="Courier New" pitchFamily="34" charset="0"/>
+                <a:ea typeface="Courier New" pitchFamily="34" charset="-122"/>
+                <a:cs typeface="Courier New" pitchFamily="34" charset="-120"/>
+              </a:rPr>
+              <a:t>0.0 – 0.1</a:t>
+            </a:r>
+            <a:endParaRPr lang="en-US" sz="1740" dirty="0"/>
+          </a:p>
+        </p:txBody>
+      </p:sp>
+      <p:sp>
+        <p:nvSpPr>
+          <p:cNvPr id="36" name="Shape 34"/>
+          <p:cNvSpPr/>
+          <p:nvPr/>
+        </p:nvSpPr>
+        <p:spPr>
+          <a:xfrm>
+            <a:off x="3383280" y="4572000"/>
+            <a:ext cx="2560320" cy="914400"/>
+          </a:xfrm>
+          <a:prstGeom prst="roundRect">
+            <a:avLst>
+              <a:gd name="adj" fmla="val 10000"/>
+            </a:avLst>
+          </a:prstGeom>
+          <a:solidFill>
+            <a:srgbClr val="121A2E"/>
+          </a:solidFill>
+          <a:ln w="9525">
+            <a:solidFill>
+              <a:srgbClr val="5B6478"/>
+            </a:solidFill>
+            <a:prstDash val="solid"/>
+          </a:ln>
+        </p:spPr>
+      </p:sp>
+      <p:sp>
+        <p:nvSpPr>
+          <p:cNvPr id="37" name="Text 35"/>
+          <p:cNvSpPr/>
+          <p:nvPr/>
+        </p:nvSpPr>
+        <p:spPr>
+          <a:xfrm>
+            <a:off x="3520440" y="4709160"/>
+            <a:ext cx="2286000" cy="320040"/>
+          </a:xfrm>
+          <a:prstGeom prst="rect">
+            <a:avLst/>
+          </a:prstGeom>
+          <a:noFill/>
+          <a:ln/>
+        </p:spPr>
+        <p:txBody>
+          <a:bodyPr wrap="square" lIns="0" tIns="0" rIns="0" bIns="0" rtlCol="0" anchor="ctr"/>
+          <a:lstStyle/>
+          <a:p>
+            <a:pPr algn="ctr" indent="0" marL="0">
+              <a:buNone/>
+            </a:pPr>
+            <a:r>
+              <a:rPr lang="en-US" sz="1440" dirty="0">
+                <a:solidFill>
+                  <a:srgbClr val="E5E9F0"/>
                 </a:solidFill>
                 <a:latin typeface="Calibri" pitchFamily="34" charset="0"/>
                 <a:ea typeface="Calibri" pitchFamily="34" charset="-122"/>
                 <a:cs typeface="Calibri" pitchFamily="34" charset="-120"/>
               </a:rPr>
-              <a:t>Previous AI reply — used in multi-turn (Ch. 6)</a:t>
-            </a:r>
-            <a:endParaRPr lang="en-US" sz="1560" dirty="0"/>
-          </a:p>
-        </p:txBody>
-      </p:sp>
-      <p:sp>
-        <p:nvSpPr>
-          <p:cNvPr id="35" name="Text 33"/>
-          <p:cNvSpPr/>
-          <p:nvPr/>
-        </p:nvSpPr>
-        <p:spPr>
-          <a:xfrm>
-            <a:off x="640080" y="5623560"/>
-            <a:ext cx="10881360" cy="365760"/>
+              <a:t>Standard Q&amp;A</a:t>
+            </a:r>
+            <a:endParaRPr lang="en-US" sz="1440" dirty="0"/>
+          </a:p>
+        </p:txBody>
+      </p:sp>
+      <p:sp>
+        <p:nvSpPr>
+          <p:cNvPr id="38" name="Text 36"/>
+          <p:cNvSpPr/>
+          <p:nvPr/>
+        </p:nvSpPr>
+        <p:spPr>
+          <a:xfrm>
+            <a:off x="3520440" y="5029200"/>
+            <a:ext cx="2286000" cy="365760"/>
           </a:xfrm>
           <a:prstGeom prst="rect">
             <a:avLst/>
@@ -6927,17 +9274,227 @@
               <a:buNone/>
             </a:pPr>
             <a:r>
-              <a:rPr lang="en-US" sz="1560" dirty="0">
-                <a:solidFill>
-                  <a:srgbClr val="B8C0D0"/>
+              <a:rPr lang="en-US" sz="1740" b="1" dirty="0">
+                <a:solidFill>
+                  <a:srgbClr val="F2A93B"/>
+                </a:solidFill>
+                <a:latin typeface="Courier New" pitchFamily="34" charset="0"/>
+                <a:ea typeface="Courier New" pitchFamily="34" charset="-122"/>
+                <a:cs typeface="Courier New" pitchFamily="34" charset="-120"/>
+              </a:rPr>
+              <a:t>0.3</a:t>
+            </a:r>
+            <a:endParaRPr lang="en-US" sz="1740" dirty="0"/>
+          </a:p>
+        </p:txBody>
+      </p:sp>
+      <p:sp>
+        <p:nvSpPr>
+          <p:cNvPr id="39" name="Shape 37"/>
+          <p:cNvSpPr/>
+          <p:nvPr/>
+        </p:nvSpPr>
+        <p:spPr>
+          <a:xfrm>
+            <a:off x="6126480" y="4572000"/>
+            <a:ext cx="2560320" cy="914400"/>
+          </a:xfrm>
+          <a:prstGeom prst="roundRect">
+            <a:avLst>
+              <a:gd name="adj" fmla="val 10000"/>
+            </a:avLst>
+          </a:prstGeom>
+          <a:solidFill>
+            <a:srgbClr val="121A2E"/>
+          </a:solidFill>
+          <a:ln w="9525">
+            <a:solidFill>
+              <a:srgbClr val="5B6478"/>
+            </a:solidFill>
+            <a:prstDash val="solid"/>
+          </a:ln>
+        </p:spPr>
+      </p:sp>
+      <p:sp>
+        <p:nvSpPr>
+          <p:cNvPr id="40" name="Text 38"/>
+          <p:cNvSpPr/>
+          <p:nvPr/>
+        </p:nvSpPr>
+        <p:spPr>
+          <a:xfrm>
+            <a:off x="6263640" y="4709160"/>
+            <a:ext cx="2286000" cy="320040"/>
+          </a:xfrm>
+          <a:prstGeom prst="rect">
+            <a:avLst/>
+          </a:prstGeom>
+          <a:noFill/>
+          <a:ln/>
+        </p:spPr>
+        <p:txBody>
+          <a:bodyPr wrap="square" lIns="0" tIns="0" rIns="0" bIns="0" rtlCol="0" anchor="ctr"/>
+          <a:lstStyle/>
+          <a:p>
+            <a:pPr algn="ctr" indent="0" marL="0">
+              <a:buNone/>
+            </a:pPr>
+            <a:r>
+              <a:rPr lang="en-US" sz="1440" dirty="0">
+                <a:solidFill>
+                  <a:srgbClr val="E5E9F0"/>
                 </a:solidFill>
                 <a:latin typeface="Calibri" pitchFamily="34" charset="0"/>
                 <a:ea typeface="Calibri" pitchFamily="34" charset="-122"/>
                 <a:cs typeface="Calibri" pitchFamily="34" charset="-120"/>
               </a:rPr>
-              <a:t>Spring AI assembles these into a Prompt on every call — you rarely build them by hand.</a:t>
-            </a:r>
-            <a:endParaRPr lang="en-US" sz="1560" dirty="0"/>
+              <a:t>Job descriptions</a:t>
+            </a:r>
+            <a:endParaRPr lang="en-US" sz="1440" dirty="0"/>
+          </a:p>
+        </p:txBody>
+      </p:sp>
+      <p:sp>
+        <p:nvSpPr>
+          <p:cNvPr id="41" name="Text 39"/>
+          <p:cNvSpPr/>
+          <p:nvPr/>
+        </p:nvSpPr>
+        <p:spPr>
+          <a:xfrm>
+            <a:off x="6263640" y="5029200"/>
+            <a:ext cx="2286000" cy="365760"/>
+          </a:xfrm>
+          <a:prstGeom prst="rect">
+            <a:avLst/>
+          </a:prstGeom>
+          <a:noFill/>
+          <a:ln/>
+        </p:spPr>
+        <p:txBody>
+          <a:bodyPr wrap="square" lIns="0" tIns="0" rIns="0" bIns="0" rtlCol="0" anchor="ctr"/>
+          <a:lstStyle/>
+          <a:p>
+            <a:pPr algn="ctr" indent="0" marL="0">
+              <a:buNone/>
+            </a:pPr>
+            <a:r>
+              <a:rPr lang="en-US" sz="1740" b="1" dirty="0">
+                <a:solidFill>
+                  <a:srgbClr val="F2A93B"/>
+                </a:solidFill>
+                <a:latin typeface="Courier New" pitchFamily="34" charset="0"/>
+                <a:ea typeface="Courier New" pitchFamily="34" charset="-122"/>
+                <a:cs typeface="Courier New" pitchFamily="34" charset="-120"/>
+              </a:rPr>
+              <a:t>0.7</a:t>
+            </a:r>
+            <a:endParaRPr lang="en-US" sz="1740" dirty="0"/>
+          </a:p>
+        </p:txBody>
+      </p:sp>
+      <p:sp>
+        <p:nvSpPr>
+          <p:cNvPr id="42" name="Shape 40"/>
+          <p:cNvSpPr/>
+          <p:nvPr/>
+        </p:nvSpPr>
+        <p:spPr>
+          <a:xfrm>
+            <a:off x="8869680" y="4572000"/>
+            <a:ext cx="2560320" cy="914400"/>
+          </a:xfrm>
+          <a:prstGeom prst="roundRect">
+            <a:avLst>
+              <a:gd name="adj" fmla="val 10000"/>
+            </a:avLst>
+          </a:prstGeom>
+          <a:solidFill>
+            <a:srgbClr val="121A2E"/>
+          </a:solidFill>
+          <a:ln w="9525">
+            <a:solidFill>
+              <a:srgbClr val="5B6478"/>
+            </a:solidFill>
+            <a:prstDash val="solid"/>
+          </a:ln>
+        </p:spPr>
+      </p:sp>
+      <p:sp>
+        <p:nvSpPr>
+          <p:cNvPr id="43" name="Text 41"/>
+          <p:cNvSpPr/>
+          <p:nvPr/>
+        </p:nvSpPr>
+        <p:spPr>
+          <a:xfrm>
+            <a:off x="9006840" y="4709160"/>
+            <a:ext cx="2286000" cy="320040"/>
+          </a:xfrm>
+          <a:prstGeom prst="rect">
+            <a:avLst/>
+          </a:prstGeom>
+          <a:noFill/>
+          <a:ln/>
+        </p:spPr>
+        <p:txBody>
+          <a:bodyPr wrap="square" lIns="0" tIns="0" rIns="0" bIns="0" rtlCol="0" anchor="ctr"/>
+          <a:lstStyle/>
+          <a:p>
+            <a:pPr algn="ctr" indent="0" marL="0">
+              <a:buNone/>
+            </a:pPr>
+            <a:r>
+              <a:rPr lang="en-US" sz="1440" dirty="0">
+                <a:solidFill>
+                  <a:srgbClr val="E5E9F0"/>
+                </a:solidFill>
+                <a:latin typeface="Calibri" pitchFamily="34" charset="0"/>
+                <a:ea typeface="Calibri" pitchFamily="34" charset="-122"/>
+                <a:cs typeface="Calibri" pitchFamily="34" charset="-120"/>
+              </a:rPr>
+              <a:t>Brainstorming</a:t>
+            </a:r>
+            <a:endParaRPr lang="en-US" sz="1440" dirty="0"/>
+          </a:p>
+        </p:txBody>
+      </p:sp>
+      <p:sp>
+        <p:nvSpPr>
+          <p:cNvPr id="44" name="Text 42"/>
+          <p:cNvSpPr/>
+          <p:nvPr/>
+        </p:nvSpPr>
+        <p:spPr>
+          <a:xfrm>
+            <a:off x="9006840" y="5029200"/>
+            <a:ext cx="2286000" cy="365760"/>
+          </a:xfrm>
+          <a:prstGeom prst="rect">
+            <a:avLst/>
+          </a:prstGeom>
+          <a:noFill/>
+          <a:ln/>
+        </p:spPr>
+        <p:txBody>
+          <a:bodyPr wrap="square" lIns="0" tIns="0" rIns="0" bIns="0" rtlCol="0" anchor="ctr"/>
+          <a:lstStyle/>
+          <a:p>
+            <a:pPr algn="ctr" indent="0" marL="0">
+              <a:buNone/>
+            </a:pPr>
+            <a:r>
+              <a:rPr lang="en-US" sz="1740" b="1" dirty="0">
+                <a:solidFill>
+                  <a:srgbClr val="F2A93B"/>
+                </a:solidFill>
+                <a:latin typeface="Courier New" pitchFamily="34" charset="0"/>
+                <a:ea typeface="Courier New" pitchFamily="34" charset="-122"/>
+                <a:cs typeface="Courier New" pitchFamily="34" charset="-120"/>
+              </a:rPr>
+              <a:t>0.8 – 0.9</a:t>
+            </a:r>
+            <a:endParaRPr lang="en-US" sz="1740" dirty="0"/>
           </a:p>
         </p:txBody>
       </p:sp>
@@ -7371,7 +9928,7 @@
                 <a:ea typeface="Courier New" pitchFamily="34" charset="-122"/>
                 <a:cs typeface="Courier New" pitchFamily="34" charset="-120"/>
               </a:rPr>
-              <a:t>6 / 9</a:t>
+              <a:t>6 / 11</a:t>
             </a:r>
             <a:endParaRPr lang="en-US" sz="1080" dirty="0"/>
           </a:p>
@@ -7410,7 +9967,7 @@
                 <a:ea typeface="Courier New" pitchFamily="34" charset="-122"/>
                 <a:cs typeface="Courier New" pitchFamily="34" charset="-120"/>
               </a:rPr>
-              <a:t>THE ABSTRACTION</a:t>
+              <a:t>CONCEPT 4</a:t>
             </a:r>
             <a:endParaRPr lang="en-US" sz="1440" dirty="0"/>
           </a:p>
@@ -7449,7 +10006,7 @@
                 <a:ea typeface="Courier New" pitchFamily="34" charset="-122"/>
                 <a:cs typeface="Courier New" pitchFamily="34" charset="-120"/>
               </a:rPr>
-              <a:t>ChatClient sits on top of ChatModel</a:t>
+              <a:t>A Prompt is a list of Messages</a:t>
             </a:r>
             <a:endParaRPr lang="en-US" sz="3360" dirty="0"/>
           </a:p>
@@ -7463,42 +10020,104 @@
         </p:nvSpPr>
         <p:spPr>
           <a:xfrm>
-            <a:off x="640080" y="1554480"/>
-            <a:ext cx="10881360" cy="731520"/>
+            <a:off x="640080" y="1600200"/>
+            <a:ext cx="10881360" cy="1051560"/>
           </a:xfrm>
           <a:prstGeom prst="roundRect">
             <a:avLst>
-              <a:gd name="adj" fmla="val 12500"/>
+              <a:gd name="adj" fmla="val 10435"/>
             </a:avLst>
           </a:prstGeom>
           <a:solidFill>
             <a:srgbClr val="121A2E"/>
           </a:solidFill>
           <a:ln w="15875">
+            <a:solidFill>
+              <a:srgbClr val="F2A93B"/>
+            </a:solidFill>
+            <a:prstDash val="solid"/>
+          </a:ln>
+          <a:effectLst>
+            <a:outerShdw sx="100000" sy="100000" kx="0" ky="0" algn="bl" rotWithShape="0" blurRad="101600" dist="38100" dir="2700000">
+              <a:srgbClr val="000000">
+                <a:alpha val="25000"/>
+              </a:srgbClr>
+            </a:outerShdw>
+          </a:effectLst>
+        </p:spPr>
+      </p:sp>
+      <p:sp>
+        <p:nvSpPr>
+          <p:cNvPr id="21" name="Text 19"/>
+          <p:cNvSpPr/>
+          <p:nvPr/>
+        </p:nvSpPr>
+        <p:spPr>
+          <a:xfrm>
+            <a:off x="914400" y="1783080"/>
+            <a:ext cx="3291840" cy="685800"/>
+          </a:xfrm>
+          <a:prstGeom prst="rect">
+            <a:avLst/>
+          </a:prstGeom>
+          <a:noFill/>
+          <a:ln/>
+        </p:spPr>
+        <p:txBody>
+          <a:bodyPr wrap="square" lIns="0" tIns="0" rIns="0" bIns="0" rtlCol="0" anchor="ctr"/>
+          <a:lstStyle/>
+          <a:p>
+            <a:pPr indent="0" marL="0">
+              <a:buNone/>
+            </a:pPr>
+            <a:r>
+              <a:rPr lang="en-US" sz="1920" b="1" dirty="0">
+                <a:solidFill>
+                  <a:srgbClr val="F2A93B"/>
+                </a:solidFill>
+                <a:latin typeface="Courier New" pitchFamily="34" charset="0"/>
+                <a:ea typeface="Courier New" pitchFamily="34" charset="-122"/>
+                <a:cs typeface="Courier New" pitchFamily="34" charset="-120"/>
+              </a:rPr>
+              <a:t>SystemMessage</a:t>
+            </a:r>
+            <a:endParaRPr lang="en-US" sz="1920" dirty="0"/>
+          </a:p>
+        </p:txBody>
+      </p:sp>
+      <p:sp>
+        <p:nvSpPr>
+          <p:cNvPr id="22" name="Shape 20"/>
+          <p:cNvSpPr/>
+          <p:nvPr/>
+        </p:nvSpPr>
+        <p:spPr>
+          <a:xfrm>
+            <a:off x="4434840" y="1783080"/>
+            <a:ext cx="0" cy="685800"/>
+          </a:xfrm>
+          <a:prstGeom prst="line">
+            <a:avLst/>
+          </a:prstGeom>
+          <a:noFill/>
+          <a:ln w="12700">
             <a:solidFill>
               <a:srgbClr val="5B6478"/>
             </a:solidFill>
             <a:prstDash val="solid"/>
           </a:ln>
-          <a:effectLst>
-            <a:outerShdw sx="100000" sy="100000" kx="0" ky="0" algn="bl" rotWithShape="0" blurRad="63500" dist="25400" dir="2700000">
-              <a:srgbClr val="000000">
-                <a:alpha val="15000"/>
-              </a:srgbClr>
-            </a:outerShdw>
-          </a:effectLst>
-        </p:spPr>
-      </p:sp>
-      <p:sp>
-        <p:nvSpPr>
-          <p:cNvPr id="21" name="Text 19"/>
-          <p:cNvSpPr/>
-          <p:nvPr/>
-        </p:nvSpPr>
-        <p:spPr>
-          <a:xfrm>
-            <a:off x="640080" y="1554480"/>
-            <a:ext cx="10881360" cy="731520"/>
+        </p:spPr>
+      </p:sp>
+      <p:sp>
+        <p:nvSpPr>
+          <p:cNvPr id="23" name="Text 21"/>
+          <p:cNvSpPr/>
+          <p:nvPr/>
+        </p:nvSpPr>
+        <p:spPr>
+          <a:xfrm>
+            <a:off x="4663440" y="1783080"/>
+            <a:ext cx="2103120" cy="685800"/>
           </a:xfrm>
           <a:prstGeom prst="rect">
             <a:avLst/>
@@ -7510,56 +10129,81 @@
           <a:bodyPr wrap="square" lIns="0" tIns="0" rIns="0" bIns="0" rtlCol="0" anchor="ctr"/>
           <a:lstStyle/>
           <a:p>
-            <a:pPr algn="ctr" indent="0" marL="0">
-              <a:buNone/>
-            </a:pPr>
-            <a:r>
-              <a:rPr lang="en-US" sz="1740" b="1" dirty="0">
+            <a:pPr indent="0" marL="0">
+              <a:buNone/>
+            </a:pPr>
+            <a:r>
+              <a:rPr lang="en-US" sz="1560" dirty="0">
                 <a:solidFill>
                   <a:srgbClr val="E5E9F0"/>
-                </a:solidFill>
-                <a:latin typeface="Courier New" pitchFamily="34" charset="0"/>
-                <a:ea typeface="Courier New" pitchFamily="34" charset="-122"/>
-                <a:cs typeface="Courier New" pitchFamily="34" charset="-120"/>
-              </a:rPr>
-              <a:t>Your Code   </a:t>
-            </a:r>
-            <a:pPr algn="ctr" indent="0" marL="0">
-              <a:buNone/>
-            </a:pPr>
-            <a:r>
-              <a:rPr lang="en-US" sz="1440" dirty="0">
-                <a:solidFill>
-                  <a:srgbClr val="B8C0D0"/>
                 </a:solidFill>
                 <a:latin typeface="Calibri" pitchFamily="34" charset="0"/>
                 <a:ea typeface="Calibri" pitchFamily="34" charset="-122"/>
                 <a:cs typeface="Calibri" pitchFamily="34" charset="-120"/>
               </a:rPr>
-              <a:t>the endpoints you write</a:t>
-            </a:r>
-            <a:endParaRPr lang="en-US" sz="1740" dirty="0"/>
-          </a:p>
-        </p:txBody>
-      </p:sp>
-      <p:sp>
-        <p:nvSpPr>
-          <p:cNvPr id="22" name="Shape 20"/>
-          <p:cNvSpPr/>
-          <p:nvPr/>
-        </p:nvSpPr>
-        <p:spPr>
-          <a:xfrm>
-            <a:off x="1143000" y="2450592"/>
-            <a:ext cx="9875520" cy="731520"/>
+              <a:t>Developer</a:t>
+            </a:r>
+            <a:endParaRPr lang="en-US" sz="1560" dirty="0"/>
+          </a:p>
+        </p:txBody>
+      </p:sp>
+      <p:sp>
+        <p:nvSpPr>
+          <p:cNvPr id="24" name="Text 22"/>
+          <p:cNvSpPr/>
+          <p:nvPr/>
+        </p:nvSpPr>
+        <p:spPr>
+          <a:xfrm>
+            <a:off x="6858000" y="1783080"/>
+            <a:ext cx="4480560" cy="685800"/>
+          </a:xfrm>
+          <a:prstGeom prst="rect">
+            <a:avLst/>
+          </a:prstGeom>
+          <a:noFill/>
+          <a:ln/>
+        </p:spPr>
+        <p:txBody>
+          <a:bodyPr wrap="square" lIns="0" tIns="0" rIns="0" bIns="0" rtlCol="0" anchor="ctr"/>
+          <a:lstStyle/>
+          <a:p>
+            <a:pPr indent="0" marL="0">
+              <a:buNone/>
+            </a:pPr>
+            <a:r>
+              <a:rPr lang="en-US" sz="1560" dirty="0">
+                <a:solidFill>
+                  <a:srgbClr val="B8C0D0"/>
+                </a:solidFill>
+                <a:latin typeface="Calibri" pitchFamily="34" charset="0"/>
+                <a:ea typeface="Calibri" pitchFamily="34" charset="-122"/>
+                <a:cs typeface="Calibri" pitchFamily="34" charset="-120"/>
+              </a:rPr>
+              <a:t>Instructions, persona, constraints</a:t>
+            </a:r>
+            <a:endParaRPr lang="en-US" sz="1560" dirty="0"/>
+          </a:p>
+        </p:txBody>
+      </p:sp>
+      <p:sp>
+        <p:nvSpPr>
+          <p:cNvPr id="25" name="Shape 23"/>
+          <p:cNvSpPr/>
+          <p:nvPr/>
+        </p:nvSpPr>
+        <p:spPr>
+          <a:xfrm>
+            <a:off x="640080" y="2880360"/>
+            <a:ext cx="10881360" cy="1051560"/>
           </a:xfrm>
           <a:prstGeom prst="roundRect">
             <a:avLst>
-              <a:gd name="adj" fmla="val 12500"/>
+              <a:gd name="adj" fmla="val 10435"/>
             </a:avLst>
           </a:prstGeom>
           <a:solidFill>
-            <a:srgbClr val="172238"/>
+            <a:srgbClr val="121A2E"/>
           </a:solidFill>
           <a:ln w="15875">
             <a:solidFill>
@@ -7568,9 +10212,9 @@
             <a:prstDash val="solid"/>
           </a:ln>
           <a:effectLst>
-            <a:outerShdw sx="100000" sy="100000" kx="0" ky="0" algn="bl" rotWithShape="0" blurRad="63500" dist="25400" dir="2700000">
+            <a:outerShdw sx="100000" sy="100000" kx="0" ky="0" algn="bl" rotWithShape="0" blurRad="101600" dist="38100" dir="2700000">
               <a:srgbClr val="000000">
-                <a:alpha val="15000"/>
+                <a:alpha val="25000"/>
               </a:srgbClr>
             </a:outerShdw>
           </a:effectLst>
@@ -7578,14 +10222,14 @@
       </p:sp>
       <p:sp>
         <p:nvSpPr>
-          <p:cNvPr id="23" name="Text 21"/>
-          <p:cNvSpPr/>
-          <p:nvPr/>
-        </p:nvSpPr>
-        <p:spPr>
-          <a:xfrm>
-            <a:off x="1143000" y="2450592"/>
-            <a:ext cx="9875520" cy="731520"/>
+          <p:cNvPr id="26" name="Text 24"/>
+          <p:cNvSpPr/>
+          <p:nvPr/>
+        </p:nvSpPr>
+        <p:spPr>
+          <a:xfrm>
+            <a:off x="914400" y="3063240"/>
+            <a:ext cx="3291840" cy="685800"/>
           </a:xfrm>
           <a:prstGeom prst="rect">
             <a:avLst/>
@@ -7597,11 +10241,11 @@
           <a:bodyPr wrap="square" lIns="0" tIns="0" rIns="0" bIns="0" rtlCol="0" anchor="ctr"/>
           <a:lstStyle/>
           <a:p>
-            <a:pPr algn="ctr" indent="0" marL="0">
-              <a:buNone/>
-            </a:pPr>
-            <a:r>
-              <a:rPr lang="en-US" sz="1740" b="1" dirty="0">
+            <a:pPr indent="0" marL="0">
+              <a:buNone/>
+            </a:pPr>
+            <a:r>
+              <a:rPr lang="en-US" sz="1920" b="1" dirty="0">
                 <a:solidFill>
                   <a:srgbClr val="5FE0C5"/>
                 </a:solidFill>
@@ -7609,70 +10253,84 @@
                 <a:ea typeface="Courier New" pitchFamily="34" charset="-122"/>
                 <a:cs typeface="Courier New" pitchFamily="34" charset="-120"/>
               </a:rPr>
-              <a:t>ChatClient   </a:t>
-            </a:r>
-            <a:pPr algn="ctr" indent="0" marL="0">
-              <a:buNone/>
-            </a:pPr>
-            <a:r>
-              <a:rPr lang="en-US" sz="1440" dirty="0">
-                <a:solidFill>
-                  <a:srgbClr val="B8C0D0"/>
+              <a:t>UserMessage</a:t>
+            </a:r>
+            <a:endParaRPr lang="en-US" sz="1920" dirty="0"/>
+          </a:p>
+        </p:txBody>
+      </p:sp>
+      <p:sp>
+        <p:nvSpPr>
+          <p:cNvPr id="27" name="Shape 25"/>
+          <p:cNvSpPr/>
+          <p:nvPr/>
+        </p:nvSpPr>
+        <p:spPr>
+          <a:xfrm>
+            <a:off x="4434840" y="3063240"/>
+            <a:ext cx="0" cy="685800"/>
+          </a:xfrm>
+          <a:prstGeom prst="line">
+            <a:avLst/>
+          </a:prstGeom>
+          <a:noFill/>
+          <a:ln w="12700">
+            <a:solidFill>
+              <a:srgbClr val="5B6478"/>
+            </a:solidFill>
+            <a:prstDash val="solid"/>
+          </a:ln>
+        </p:spPr>
+      </p:sp>
+      <p:sp>
+        <p:nvSpPr>
+          <p:cNvPr id="28" name="Text 26"/>
+          <p:cNvSpPr/>
+          <p:nvPr/>
+        </p:nvSpPr>
+        <p:spPr>
+          <a:xfrm>
+            <a:off x="4663440" y="3063240"/>
+            <a:ext cx="2103120" cy="685800"/>
+          </a:xfrm>
+          <a:prstGeom prst="rect">
+            <a:avLst/>
+          </a:prstGeom>
+          <a:noFill/>
+          <a:ln/>
+        </p:spPr>
+        <p:txBody>
+          <a:bodyPr wrap="square" lIns="0" tIns="0" rIns="0" bIns="0" rtlCol="0" anchor="ctr"/>
+          <a:lstStyle/>
+          <a:p>
+            <a:pPr indent="0" marL="0">
+              <a:buNone/>
+            </a:pPr>
+            <a:r>
+              <a:rPr lang="en-US" sz="1560" dirty="0">
+                <a:solidFill>
+                  <a:srgbClr val="E5E9F0"/>
                 </a:solidFill>
                 <a:latin typeface="Calibri" pitchFamily="34" charset="0"/>
                 <a:ea typeface="Calibri" pitchFamily="34" charset="-122"/>
                 <a:cs typeface="Calibri" pitchFamily="34" charset="-120"/>
               </a:rPr>
-              <a:t>high-level — fluent API, advisors, defaults</a:t>
-            </a:r>
-            <a:endParaRPr lang="en-US" sz="1740" dirty="0"/>
-          </a:p>
-        </p:txBody>
-      </p:sp>
-      <p:sp>
-        <p:nvSpPr>
-          <p:cNvPr id="24" name="Shape 22"/>
-          <p:cNvSpPr/>
-          <p:nvPr/>
-        </p:nvSpPr>
-        <p:spPr>
-          <a:xfrm>
-            <a:off x="1645920" y="3346704"/>
-            <a:ext cx="8869680" cy="731520"/>
-          </a:xfrm>
-          <a:prstGeom prst="roundRect">
-            <a:avLst>
-              <a:gd name="adj" fmla="val 12500"/>
-            </a:avLst>
-          </a:prstGeom>
-          <a:solidFill>
-            <a:srgbClr val="121A2E"/>
-          </a:solidFill>
-          <a:ln w="15875">
-            <a:solidFill>
-              <a:srgbClr val="F2A93B"/>
-            </a:solidFill>
-            <a:prstDash val="solid"/>
-          </a:ln>
-          <a:effectLst>
-            <a:outerShdw sx="100000" sy="100000" kx="0" ky="0" algn="bl" rotWithShape="0" blurRad="63500" dist="25400" dir="2700000">
-              <a:srgbClr val="000000">
-                <a:alpha val="15000"/>
-              </a:srgbClr>
-            </a:outerShdw>
-          </a:effectLst>
-        </p:spPr>
-      </p:sp>
-      <p:sp>
-        <p:nvSpPr>
-          <p:cNvPr id="25" name="Text 23"/>
-          <p:cNvSpPr/>
-          <p:nvPr/>
-        </p:nvSpPr>
-        <p:spPr>
-          <a:xfrm>
-            <a:off x="1645920" y="3346704"/>
-            <a:ext cx="8869680" cy="731520"/>
+              <a:t>End user</a:t>
+            </a:r>
+            <a:endParaRPr lang="en-US" sz="1560" dirty="0"/>
+          </a:p>
+        </p:txBody>
+      </p:sp>
+      <p:sp>
+        <p:nvSpPr>
+          <p:cNvPr id="29" name="Text 27"/>
+          <p:cNvSpPr/>
+          <p:nvPr/>
+        </p:nvSpPr>
+        <p:spPr>
+          <a:xfrm>
+            <a:off x="6858000" y="3063240"/>
+            <a:ext cx="4480560" cy="685800"/>
           </a:xfrm>
           <a:prstGeom prst="rect">
             <a:avLst/>
@@ -7684,25 +10342,11 @@
           <a:bodyPr wrap="square" lIns="0" tIns="0" rIns="0" bIns="0" rtlCol="0" anchor="ctr"/>
           <a:lstStyle/>
           <a:p>
-            <a:pPr algn="ctr" indent="0" marL="0">
-              <a:buNone/>
-            </a:pPr>
-            <a:r>
-              <a:rPr lang="en-US" sz="1740" b="1" dirty="0">
-                <a:solidFill>
-                  <a:srgbClr val="F2A93B"/>
-                </a:solidFill>
-                <a:latin typeface="Courier New" pitchFamily="34" charset="0"/>
-                <a:ea typeface="Courier New" pitchFamily="34" charset="-122"/>
-                <a:cs typeface="Courier New" pitchFamily="34" charset="-120"/>
-              </a:rPr>
-              <a:t>ChatModel   </a:t>
-            </a:r>
-            <a:pPr algn="ctr" indent="0" marL="0">
-              <a:buNone/>
-            </a:pPr>
-            <a:r>
-              <a:rPr lang="en-US" sz="1440" dirty="0">
+            <a:pPr indent="0" marL="0">
+              <a:buNone/>
+            </a:pPr>
+            <a:r>
+              <a:rPr lang="en-US" sz="1560" dirty="0">
                 <a:solidFill>
                   <a:srgbClr val="B8C0D0"/>
                 </a:solidFill>
@@ -7710,30 +10354,30 @@
                 <a:ea typeface="Calibri" pitchFamily="34" charset="-122"/>
                 <a:cs typeface="Calibri" pitchFamily="34" charset="-120"/>
               </a:rPr>
-              <a:t>low-level — send Prompt, get ChatResponse</a:t>
-            </a:r>
-            <a:endParaRPr lang="en-US" sz="1740" dirty="0"/>
-          </a:p>
-        </p:txBody>
-      </p:sp>
-      <p:sp>
-        <p:nvSpPr>
-          <p:cNvPr id="26" name="Shape 24"/>
-          <p:cNvSpPr/>
-          <p:nvPr/>
-        </p:nvSpPr>
-        <p:spPr>
-          <a:xfrm>
-            <a:off x="2148840" y="4242816"/>
-            <a:ext cx="7863840" cy="731520"/>
+              <a:t>The actual question</a:t>
+            </a:r>
+            <a:endParaRPr lang="en-US" sz="1560" dirty="0"/>
+          </a:p>
+        </p:txBody>
+      </p:sp>
+      <p:sp>
+        <p:nvSpPr>
+          <p:cNvPr id="30" name="Shape 28"/>
+          <p:cNvSpPr/>
+          <p:nvPr/>
+        </p:nvSpPr>
+        <p:spPr>
+          <a:xfrm>
+            <a:off x="640080" y="4160520"/>
+            <a:ext cx="10881360" cy="1051560"/>
           </a:xfrm>
           <a:prstGeom prst="roundRect">
             <a:avLst>
-              <a:gd name="adj" fmla="val 12500"/>
+              <a:gd name="adj" fmla="val 10435"/>
             </a:avLst>
           </a:prstGeom>
           <a:solidFill>
-            <a:srgbClr val="172238"/>
+            <a:srgbClr val="121A2E"/>
           </a:solidFill>
           <a:ln w="15875">
             <a:solidFill>
@@ -7742,9 +10386,9 @@
             <a:prstDash val="solid"/>
           </a:ln>
           <a:effectLst>
-            <a:outerShdw sx="100000" sy="100000" kx="0" ky="0" algn="bl" rotWithShape="0" blurRad="63500" dist="25400" dir="2700000">
+            <a:outerShdw sx="100000" sy="100000" kx="0" ky="0" algn="bl" rotWithShape="0" blurRad="101600" dist="38100" dir="2700000">
               <a:srgbClr val="000000">
-                <a:alpha val="15000"/>
+                <a:alpha val="25000"/>
               </a:srgbClr>
             </a:outerShdw>
           </a:effectLst>
@@ -7752,14 +10396,14 @@
       </p:sp>
       <p:sp>
         <p:nvSpPr>
-          <p:cNvPr id="27" name="Text 25"/>
-          <p:cNvSpPr/>
-          <p:nvPr/>
-        </p:nvSpPr>
-        <p:spPr>
-          <a:xfrm>
-            <a:off x="2148840" y="4242816"/>
-            <a:ext cx="7863840" cy="731520"/>
+          <p:cNvPr id="31" name="Text 29"/>
+          <p:cNvSpPr/>
+          <p:nvPr/>
+        </p:nvSpPr>
+        <p:spPr>
+          <a:xfrm>
+            <a:off x="914400" y="4343400"/>
+            <a:ext cx="3291840" cy="685800"/>
           </a:xfrm>
           <a:prstGeom prst="rect">
             <a:avLst/>
@@ -7771,11 +10415,11 @@
           <a:bodyPr wrap="square" lIns="0" tIns="0" rIns="0" bIns="0" rtlCol="0" anchor="ctr"/>
           <a:lstStyle/>
           <a:p>
-            <a:pPr algn="ctr" indent="0" marL="0">
-              <a:buNone/>
-            </a:pPr>
-            <a:r>
-              <a:rPr lang="en-US" sz="1740" b="1" dirty="0">
+            <a:pPr indent="0" marL="0">
+              <a:buNone/>
+            </a:pPr>
+            <a:r>
+              <a:rPr lang="en-US" sz="1920" b="1" dirty="0">
                 <a:solidFill>
                   <a:srgbClr val="8B98AC"/>
                 </a:solidFill>
@@ -7783,70 +10427,45 @@
                 <a:ea typeface="Courier New" pitchFamily="34" charset="-122"/>
                 <a:cs typeface="Courier New" pitchFamily="34" charset="-120"/>
               </a:rPr>
-              <a:t>OllamaChatModel   </a:t>
-            </a:r>
-            <a:pPr algn="ctr" indent="0" marL="0">
-              <a:buNone/>
-            </a:pPr>
-            <a:r>
-              <a:rPr lang="en-US" sz="1440" dirty="0">
-                <a:solidFill>
-                  <a:srgbClr val="B8C0D0"/>
-                </a:solidFill>
-                <a:latin typeface="Calibri" pitchFamily="34" charset="0"/>
-                <a:ea typeface="Calibri" pitchFamily="34" charset="-122"/>
-                <a:cs typeface="Calibri" pitchFamily="34" charset="-120"/>
-              </a:rPr>
-              <a:t>Ollama-specific implementation</a:t>
-            </a:r>
-            <a:endParaRPr lang="en-US" sz="1740" dirty="0"/>
-          </a:p>
-        </p:txBody>
-      </p:sp>
-      <p:sp>
-        <p:nvSpPr>
-          <p:cNvPr id="28" name="Shape 26"/>
-          <p:cNvSpPr/>
-          <p:nvPr/>
-        </p:nvSpPr>
-        <p:spPr>
-          <a:xfrm>
-            <a:off x="2651760" y="5138928"/>
-            <a:ext cx="6858000" cy="731520"/>
-          </a:xfrm>
-          <a:prstGeom prst="roundRect">
-            <a:avLst>
-              <a:gd name="adj" fmla="val 12500"/>
-            </a:avLst>
-          </a:prstGeom>
-          <a:solidFill>
-            <a:srgbClr val="121A2E"/>
-          </a:solidFill>
-          <a:ln w="15875">
+              <a:t>AssistantMessage</a:t>
+            </a:r>
+            <a:endParaRPr lang="en-US" sz="1920" dirty="0"/>
+          </a:p>
+        </p:txBody>
+      </p:sp>
+      <p:sp>
+        <p:nvSpPr>
+          <p:cNvPr id="32" name="Shape 30"/>
+          <p:cNvSpPr/>
+          <p:nvPr/>
+        </p:nvSpPr>
+        <p:spPr>
+          <a:xfrm>
+            <a:off x="4434840" y="4343400"/>
+            <a:ext cx="0" cy="685800"/>
+          </a:xfrm>
+          <a:prstGeom prst="line">
+            <a:avLst/>
+          </a:prstGeom>
+          <a:noFill/>
+          <a:ln w="12700">
             <a:solidFill>
               <a:srgbClr val="5B6478"/>
             </a:solidFill>
             <a:prstDash val="solid"/>
           </a:ln>
-          <a:effectLst>
-            <a:outerShdw sx="100000" sy="100000" kx="0" ky="0" algn="bl" rotWithShape="0" blurRad="63500" dist="25400" dir="2700000">
-              <a:srgbClr val="000000">
-                <a:alpha val="15000"/>
-              </a:srgbClr>
-            </a:outerShdw>
-          </a:effectLst>
-        </p:spPr>
-      </p:sp>
-      <p:sp>
-        <p:nvSpPr>
-          <p:cNvPr id="29" name="Text 27"/>
-          <p:cNvSpPr/>
-          <p:nvPr/>
-        </p:nvSpPr>
-        <p:spPr>
-          <a:xfrm>
-            <a:off x="2651760" y="5138928"/>
-            <a:ext cx="6858000" cy="731520"/>
+        </p:spPr>
+      </p:sp>
+      <p:sp>
+        <p:nvSpPr>
+          <p:cNvPr id="33" name="Text 31"/>
+          <p:cNvSpPr/>
+          <p:nvPr/>
+        </p:nvSpPr>
+        <p:spPr>
+          <a:xfrm>
+            <a:off x="4663440" y="4343400"/>
+            <a:ext cx="2103120" cy="685800"/>
           </a:xfrm>
           <a:prstGeom prst="rect">
             <a:avLst/>
@@ -7858,48 +10477,34 @@
           <a:bodyPr wrap="square" lIns="0" tIns="0" rIns="0" bIns="0" rtlCol="0" anchor="ctr"/>
           <a:lstStyle/>
           <a:p>
-            <a:pPr algn="ctr" indent="0" marL="0">
-              <a:buNone/>
-            </a:pPr>
-            <a:r>
-              <a:rPr lang="en-US" sz="1740" b="1" dirty="0">
-                <a:solidFill>
-                  <a:srgbClr val="B8C0D0"/>
-                </a:solidFill>
-                <a:latin typeface="Courier New" pitchFamily="34" charset="0"/>
-                <a:ea typeface="Courier New" pitchFamily="34" charset="-122"/>
-                <a:cs typeface="Courier New" pitchFamily="34" charset="-120"/>
-              </a:rPr>
-              <a:t>Ollama HTTP API → Llama 3.2   </a:t>
-            </a:r>
-            <a:pPr algn="ctr" indent="0" marL="0">
-              <a:buNone/>
-            </a:pPr>
-            <a:r>
-              <a:rPr lang="en-US" sz="1440" dirty="0">
-                <a:solidFill>
-                  <a:srgbClr val="B8C0D0"/>
+            <a:pPr indent="0" marL="0">
+              <a:buNone/>
+            </a:pPr>
+            <a:r>
+              <a:rPr lang="en-US" sz="1560" dirty="0">
+                <a:solidFill>
+                  <a:srgbClr val="E5E9F0"/>
                 </a:solidFill>
                 <a:latin typeface="Calibri" pitchFamily="34" charset="0"/>
                 <a:ea typeface="Calibri" pitchFamily="34" charset="-122"/>
                 <a:cs typeface="Calibri" pitchFamily="34" charset="-120"/>
               </a:rPr>
-              <a:t>the model itself</a:t>
-            </a:r>
-            <a:endParaRPr lang="en-US" sz="1740" dirty="0"/>
-          </a:p>
-        </p:txBody>
-      </p:sp>
-      <p:sp>
-        <p:nvSpPr>
-          <p:cNvPr id="30" name="Text 28"/>
-          <p:cNvSpPr/>
-          <p:nvPr/>
-        </p:nvSpPr>
-        <p:spPr>
-          <a:xfrm>
-            <a:off x="640080" y="6080760"/>
-            <a:ext cx="10881360" cy="274320"/>
+              <a:t>The model</a:t>
+            </a:r>
+            <a:endParaRPr lang="en-US" sz="1560" dirty="0"/>
+          </a:p>
+        </p:txBody>
+      </p:sp>
+      <p:sp>
+        <p:nvSpPr>
+          <p:cNvPr id="34" name="Text 32"/>
+          <p:cNvSpPr/>
+          <p:nvPr/>
+        </p:nvSpPr>
+        <p:spPr>
+          <a:xfrm>
+            <a:off x="6858000" y="4343400"/>
+            <a:ext cx="4480560" cy="685800"/>
           </a:xfrm>
           <a:prstGeom prst="rect">
             <a:avLst/>
@@ -7911,11 +10516,11 @@
           <a:bodyPr wrap="square" lIns="0" tIns="0" rIns="0" bIns="0" rtlCol="0" anchor="ctr"/>
           <a:lstStyle/>
           <a:p>
-            <a:pPr algn="ctr" indent="0" marL="0">
-              <a:buNone/>
-            </a:pPr>
-            <a:r>
-              <a:rPr lang="en-US" sz="1440" dirty="0">
+            <a:pPr indent="0" marL="0">
+              <a:buNone/>
+            </a:pPr>
+            <a:r>
+              <a:rPr lang="en-US" sz="1560" dirty="0">
                 <a:solidFill>
                   <a:srgbClr val="B8C0D0"/>
                 </a:solidFill>
@@ -7923,9 +10528,48 @@
                 <a:ea typeface="Calibri" pitchFamily="34" charset="-122"/>
                 <a:cs typeface="Calibri" pitchFamily="34" charset="-120"/>
               </a:rPr>
-              <a:t>Switch to OpenAI later? Only the bottom layer changes — your code stays identical.</a:t>
-            </a:r>
-            <a:endParaRPr lang="en-US" sz="1440" dirty="0"/>
+              <a:t>Previous AI reply — used in multi-turn (Ch. 6)</a:t>
+            </a:r>
+            <a:endParaRPr lang="en-US" sz="1560" dirty="0"/>
+          </a:p>
+        </p:txBody>
+      </p:sp>
+      <p:sp>
+        <p:nvSpPr>
+          <p:cNvPr id="35" name="Text 33"/>
+          <p:cNvSpPr/>
+          <p:nvPr/>
+        </p:nvSpPr>
+        <p:spPr>
+          <a:xfrm>
+            <a:off x="640080" y="5623560"/>
+            <a:ext cx="10881360" cy="365760"/>
+          </a:xfrm>
+          <a:prstGeom prst="rect">
+            <a:avLst/>
+          </a:prstGeom>
+          <a:noFill/>
+          <a:ln/>
+        </p:spPr>
+        <p:txBody>
+          <a:bodyPr wrap="square" lIns="0" tIns="0" rIns="0" bIns="0" rtlCol="0" anchor="ctr"/>
+          <a:lstStyle/>
+          <a:p>
+            <a:pPr algn="ctr" indent="0" marL="0">
+              <a:buNone/>
+            </a:pPr>
+            <a:r>
+              <a:rPr lang="en-US" sz="1560" dirty="0">
+                <a:solidFill>
+                  <a:srgbClr val="B8C0D0"/>
+                </a:solidFill>
+                <a:latin typeface="Calibri" pitchFamily="34" charset="0"/>
+                <a:ea typeface="Calibri" pitchFamily="34" charset="-122"/>
+                <a:cs typeface="Calibri" pitchFamily="34" charset="-120"/>
+              </a:rPr>
+              <a:t>Spring AI assembles these into a Prompt on every call — you rarely build them by hand.</a:t>
+            </a:r>
+            <a:endParaRPr lang="en-US" sz="1560" dirty="0"/>
           </a:p>
         </p:txBody>
       </p:sp>
@@ -8359,7 +11003,7 @@
                 <a:ea typeface="Courier New" pitchFamily="34" charset="-122"/>
                 <a:cs typeface="Courier New" pitchFamily="34" charset="-120"/>
               </a:rPr>
-              <a:t>7 / 9</a:t>
+              <a:t>7 / 11</a:t>
             </a:r>
             <a:endParaRPr lang="en-US" sz="1080" dirty="0"/>
           </a:p>
@@ -8398,7 +11042,7 @@
                 <a:ea typeface="Courier New" pitchFamily="34" charset="-122"/>
                 <a:cs typeface="Courier New" pitchFamily="34" charset="-120"/>
               </a:rPr>
-              <a:t>WHAT YOU BUILD</a:t>
+              <a:t>THE ABSTRACTION</a:t>
             </a:r>
             <a:endParaRPr lang="en-US" sz="1440" dirty="0"/>
           </a:p>
@@ -8437,7 +11081,7 @@
                 <a:ea typeface="Courier New" pitchFamily="34" charset="-122"/>
                 <a:cs typeface="Courier New" pitchFamily="34" charset="-120"/>
               </a:rPr>
-              <a:t>Three modes, one controller</a:t>
+              <a:t>ChatClient sits on top of ChatModel</a:t>
             </a:r>
             <a:endParaRPr lang="en-US" sz="3360" dirty="0"/>
           </a:p>
@@ -8451,27 +11095,27 @@
         </p:nvSpPr>
         <p:spPr>
           <a:xfrm>
-            <a:off x="640080" y="1234440"/>
-            <a:ext cx="10881360" cy="5029200"/>
+            <a:off x="640080" y="1554480"/>
+            <a:ext cx="10881360" cy="731520"/>
           </a:xfrm>
           <a:prstGeom prst="roundRect">
             <a:avLst>
-              <a:gd name="adj" fmla="val 1455"/>
+              <a:gd name="adj" fmla="val 12500"/>
             </a:avLst>
           </a:prstGeom>
           <a:solidFill>
             <a:srgbClr val="121A2E"/>
           </a:solidFill>
-          <a:ln w="9525">
+          <a:ln w="15875">
             <a:solidFill>
               <a:srgbClr val="5B6478"/>
             </a:solidFill>
             <a:prstDash val="solid"/>
           </a:ln>
           <a:effectLst>
-            <a:outerShdw sx="100000" sy="100000" kx="0" ky="0" algn="bl" rotWithShape="0" blurRad="127000" dist="50800" dir="5400000">
+            <a:outerShdw sx="100000" sy="100000" kx="0" ky="0" algn="bl" rotWithShape="0" blurRad="63500" dist="25400" dir="2700000">
               <a:srgbClr val="000000">
-                <a:alpha val="30000"/>
+                <a:alpha val="15000"/>
               </a:srgbClr>
             </a:outerShdw>
           </a:effectLst>
@@ -8479,74 +11123,14 @@
       </p:sp>
       <p:sp>
         <p:nvSpPr>
-          <p:cNvPr id="21" name="Shape 19"/>
-          <p:cNvSpPr/>
-          <p:nvPr/>
-        </p:nvSpPr>
-        <p:spPr>
-          <a:xfrm>
-            <a:off x="841248" y="1399032"/>
-            <a:ext cx="91440" cy="91440"/>
-          </a:xfrm>
-          <a:prstGeom prst="ellipse">
-            <a:avLst/>
-          </a:prstGeom>
-          <a:solidFill>
-            <a:srgbClr val="F2A93B"/>
-          </a:solidFill>
-          <a:ln/>
-        </p:spPr>
-      </p:sp>
-      <p:sp>
-        <p:nvSpPr>
-          <p:cNvPr id="22" name="Shape 20"/>
-          <p:cNvSpPr/>
-          <p:nvPr/>
-        </p:nvSpPr>
-        <p:spPr>
-          <a:xfrm>
-            <a:off x="1042416" y="1399032"/>
-            <a:ext cx="91440" cy="91440"/>
-          </a:xfrm>
-          <a:prstGeom prst="ellipse">
-            <a:avLst/>
-          </a:prstGeom>
-          <a:solidFill>
-            <a:srgbClr val="8B98AC"/>
-          </a:solidFill>
-          <a:ln/>
-        </p:spPr>
-      </p:sp>
-      <p:sp>
-        <p:nvSpPr>
-          <p:cNvPr id="23" name="Shape 21"/>
-          <p:cNvSpPr/>
-          <p:nvPr/>
-        </p:nvSpPr>
-        <p:spPr>
-          <a:xfrm>
-            <a:off x="1243584" y="1399032"/>
-            <a:ext cx="91440" cy="91440"/>
-          </a:xfrm>
-          <a:prstGeom prst="ellipse">
-            <a:avLst/>
-          </a:prstGeom>
-          <a:solidFill>
-            <a:srgbClr val="5FE0C5"/>
-          </a:solidFill>
-          <a:ln/>
-        </p:spPr>
-      </p:sp>
-      <p:sp>
-        <p:nvSpPr>
-          <p:cNvPr id="24" name="Text 22"/>
-          <p:cNvSpPr/>
-          <p:nvPr/>
-        </p:nvSpPr>
-        <p:spPr>
-          <a:xfrm>
-            <a:off x="9509760" y="1325880"/>
-            <a:ext cx="1828800" cy="274320"/>
+          <p:cNvPr id="21" name="Text 19"/>
+          <p:cNvSpPr/>
+          <p:nvPr/>
+        </p:nvSpPr>
+        <p:spPr>
+          <a:xfrm>
+            <a:off x="640080" y="1554480"/>
+            <a:ext cx="10881360" cy="731520"/>
           </a:xfrm>
           <a:prstGeom prst="rect">
             <a:avLst/>
@@ -8558,101 +11142,245 @@
           <a:bodyPr wrap="square" lIns="0" tIns="0" rIns="0" bIns="0" rtlCol="0" anchor="ctr"/>
           <a:lstStyle/>
           <a:p>
-            <a:pPr algn="r" indent="0" marL="0">
-              <a:buNone/>
-            </a:pPr>
-            <a:r>
-              <a:rPr lang="en-US" sz="1200" dirty="0">
-                <a:solidFill>
-                  <a:srgbClr val="8B98AC"/>
+            <a:pPr algn="ctr" indent="0" marL="0">
+              <a:buNone/>
+            </a:pPr>
+            <a:r>
+              <a:rPr lang="en-US" sz="1740" b="1" dirty="0">
+                <a:solidFill>
+                  <a:srgbClr val="E5E9F0"/>
                 </a:solidFill>
                 <a:latin typeface="Courier New" pitchFamily="34" charset="0"/>
                 <a:ea typeface="Courier New" pitchFamily="34" charset="-122"/>
                 <a:cs typeface="Courier New" pitchFamily="34" charset="-120"/>
               </a:rPr>
-              <a:t>HrChatController.java</a:t>
-            </a:r>
-            <a:endParaRPr lang="en-US" sz="1200" dirty="0"/>
-          </a:p>
-        </p:txBody>
-      </p:sp>
-      <p:sp>
-        <p:nvSpPr>
-          <p:cNvPr id="25" name="Text 23"/>
-          <p:cNvSpPr/>
-          <p:nvPr/>
-        </p:nvSpPr>
-        <p:spPr>
-          <a:xfrm>
-            <a:off x="960120" y="1691640"/>
-            <a:ext cx="10332720" cy="274320"/>
-          </a:xfrm>
-          <a:prstGeom prst="rect">
-            <a:avLst/>
-          </a:prstGeom>
-          <a:noFill/>
-          <a:ln/>
-        </p:spPr>
-        <p:txBody>
-          <a:bodyPr wrap="square" lIns="0" tIns="0" rIns="0" bIns="0" rtlCol="0" anchor="t"/>
-          <a:lstStyle/>
-          <a:p>
-            <a:pPr indent="0" marL="0">
-              <a:buNone/>
-            </a:pPr>
-            <a:r>
-              <a:rPr lang="en-US" sz="1500" dirty="0">
-                <a:solidFill>
-                  <a:srgbClr val="8B98AC"/>
+              <a:t>Your Code   </a:t>
+            </a:r>
+            <a:pPr algn="ctr" indent="0" marL="0">
+              <a:buNone/>
+            </a:pPr>
+            <a:r>
+              <a:rPr lang="en-US" sz="1440" dirty="0">
+                <a:solidFill>
+                  <a:srgbClr val="B8C0D0"/>
+                </a:solidFill>
+                <a:latin typeface="Calibri" pitchFamily="34" charset="0"/>
+                <a:ea typeface="Calibri" pitchFamily="34" charset="-122"/>
+                <a:cs typeface="Calibri" pitchFamily="34" charset="-120"/>
+              </a:rPr>
+              <a:t>the endpoints you write</a:t>
+            </a:r>
+            <a:endParaRPr lang="en-US" sz="1740" dirty="0"/>
+          </a:p>
+        </p:txBody>
+      </p:sp>
+      <p:sp>
+        <p:nvSpPr>
+          <p:cNvPr id="22" name="Shape 20"/>
+          <p:cNvSpPr/>
+          <p:nvPr/>
+        </p:nvSpPr>
+        <p:spPr>
+          <a:xfrm>
+            <a:off x="1143000" y="2450592"/>
+            <a:ext cx="9875520" cy="731520"/>
+          </a:xfrm>
+          <a:prstGeom prst="roundRect">
+            <a:avLst>
+              <a:gd name="adj" fmla="val 12500"/>
+            </a:avLst>
+          </a:prstGeom>
+          <a:solidFill>
+            <a:srgbClr val="172238"/>
+          </a:solidFill>
+          <a:ln w="15875">
+            <a:solidFill>
+              <a:srgbClr val="5FE0C5"/>
+            </a:solidFill>
+            <a:prstDash val="solid"/>
+          </a:ln>
+          <a:effectLst>
+            <a:outerShdw sx="100000" sy="100000" kx="0" ky="0" algn="bl" rotWithShape="0" blurRad="63500" dist="25400" dir="2700000">
+              <a:srgbClr val="000000">
+                <a:alpha val="15000"/>
+              </a:srgbClr>
+            </a:outerShdw>
+          </a:effectLst>
+        </p:spPr>
+      </p:sp>
+      <p:sp>
+        <p:nvSpPr>
+          <p:cNvPr id="23" name="Text 21"/>
+          <p:cNvSpPr/>
+          <p:nvPr/>
+        </p:nvSpPr>
+        <p:spPr>
+          <a:xfrm>
+            <a:off x="1143000" y="2450592"/>
+            <a:ext cx="9875520" cy="731520"/>
+          </a:xfrm>
+          <a:prstGeom prst="rect">
+            <a:avLst/>
+          </a:prstGeom>
+          <a:noFill/>
+          <a:ln/>
+        </p:spPr>
+        <p:txBody>
+          <a:bodyPr wrap="square" lIns="0" tIns="0" rIns="0" bIns="0" rtlCol="0" anchor="ctr"/>
+          <a:lstStyle/>
+          <a:p>
+            <a:pPr algn="ctr" indent="0" marL="0">
+              <a:buNone/>
+            </a:pPr>
+            <a:r>
+              <a:rPr lang="en-US" sz="1740" b="1" dirty="0">
+                <a:solidFill>
+                  <a:srgbClr val="5FE0C5"/>
                 </a:solidFill>
                 <a:latin typeface="Courier New" pitchFamily="34" charset="0"/>
                 <a:ea typeface="Courier New" pitchFamily="34" charset="-122"/>
                 <a:cs typeface="Courier New" pitchFamily="34" charset="-120"/>
               </a:rPr>
-              <a:t>// PRECISE — deterministic, capped short</a:t>
-            </a:r>
-            <a:endParaRPr lang="en-US" sz="1500" dirty="0"/>
-          </a:p>
-        </p:txBody>
-      </p:sp>
-      <p:sp>
-        <p:nvSpPr>
-          <p:cNvPr id="26" name="Text 24"/>
-          <p:cNvSpPr/>
-          <p:nvPr/>
-        </p:nvSpPr>
-        <p:spPr>
-          <a:xfrm>
-            <a:off x="960120" y="1965960"/>
-            <a:ext cx="10332720" cy="274320"/>
-          </a:xfrm>
-          <a:prstGeom prst="rect">
-            <a:avLst/>
-          </a:prstGeom>
-          <a:noFill/>
-          <a:ln/>
-        </p:spPr>
-        <p:txBody>
-          <a:bodyPr wrap="square" lIns="0" tIns="0" rIns="0" bIns="0" rtlCol="0" anchor="t"/>
-          <a:lstStyle/>
-          <a:p>
-            <a:pPr indent="0" marL="0">
-              <a:buNone/>
-            </a:pPr>
-            <a:r>
-              <a:rPr lang="en-US" sz="1500" dirty="0">
-                <a:solidFill>
-                  <a:srgbClr val="E5E9F0"/>
+              <a:t>ChatClient   </a:t>
+            </a:r>
+            <a:pPr algn="ctr" indent="0" marL="0">
+              <a:buNone/>
+            </a:pPr>
+            <a:r>
+              <a:rPr lang="en-US" sz="1440" dirty="0">
+                <a:solidFill>
+                  <a:srgbClr val="B8C0D0"/>
+                </a:solidFill>
+                <a:latin typeface="Calibri" pitchFamily="34" charset="0"/>
+                <a:ea typeface="Calibri" pitchFamily="34" charset="-122"/>
+                <a:cs typeface="Calibri" pitchFamily="34" charset="-120"/>
+              </a:rPr>
+              <a:t>high-level — fluent API, advisors, defaults</a:t>
+            </a:r>
+            <a:endParaRPr lang="en-US" sz="1740" dirty="0"/>
+          </a:p>
+        </p:txBody>
+      </p:sp>
+      <p:sp>
+        <p:nvSpPr>
+          <p:cNvPr id="24" name="Shape 22"/>
+          <p:cNvSpPr/>
+          <p:nvPr/>
+        </p:nvSpPr>
+        <p:spPr>
+          <a:xfrm>
+            <a:off x="1645920" y="3346704"/>
+            <a:ext cx="8869680" cy="731520"/>
+          </a:xfrm>
+          <a:prstGeom prst="roundRect">
+            <a:avLst>
+              <a:gd name="adj" fmla="val 12500"/>
+            </a:avLst>
+          </a:prstGeom>
+          <a:solidFill>
+            <a:srgbClr val="121A2E"/>
+          </a:solidFill>
+          <a:ln w="15875">
+            <a:solidFill>
+              <a:srgbClr val="F2A93B"/>
+            </a:solidFill>
+            <a:prstDash val="solid"/>
+          </a:ln>
+          <a:effectLst>
+            <a:outerShdw sx="100000" sy="100000" kx="0" ky="0" algn="bl" rotWithShape="0" blurRad="63500" dist="25400" dir="2700000">
+              <a:srgbClr val="000000">
+                <a:alpha val="15000"/>
+              </a:srgbClr>
+            </a:outerShdw>
+          </a:effectLst>
+        </p:spPr>
+      </p:sp>
+      <p:sp>
+        <p:nvSpPr>
+          <p:cNvPr id="25" name="Text 23"/>
+          <p:cNvSpPr/>
+          <p:nvPr/>
+        </p:nvSpPr>
+        <p:spPr>
+          <a:xfrm>
+            <a:off x="1645920" y="3346704"/>
+            <a:ext cx="8869680" cy="731520"/>
+          </a:xfrm>
+          <a:prstGeom prst="rect">
+            <a:avLst/>
+          </a:prstGeom>
+          <a:noFill/>
+          <a:ln/>
+        </p:spPr>
+        <p:txBody>
+          <a:bodyPr wrap="square" lIns="0" tIns="0" rIns="0" bIns="0" rtlCol="0" anchor="ctr"/>
+          <a:lstStyle/>
+          <a:p>
+            <a:pPr algn="ctr" indent="0" marL="0">
+              <a:buNone/>
+            </a:pPr>
+            <a:r>
+              <a:rPr lang="en-US" sz="1740" b="1" dirty="0">
+                <a:solidFill>
+                  <a:srgbClr val="F2A93B"/>
                 </a:solidFill>
                 <a:latin typeface="Courier New" pitchFamily="34" charset="0"/>
                 <a:ea typeface="Courier New" pitchFamily="34" charset="-122"/>
                 <a:cs typeface="Courier New" pitchFamily="34" charset="-120"/>
               </a:rPr>
-              <a:t>chatClient.prompt()</a:t>
-            </a:r>
-            <a:endParaRPr lang="en-US" sz="1500" dirty="0"/>
-          </a:p>
-        </p:txBody>
+              <a:t>ChatModel   </a:t>
+            </a:r>
+            <a:pPr algn="ctr" indent="0" marL="0">
+              <a:buNone/>
+            </a:pPr>
+            <a:r>
+              <a:rPr lang="en-US" sz="1440" dirty="0">
+                <a:solidFill>
+                  <a:srgbClr val="B8C0D0"/>
+                </a:solidFill>
+                <a:latin typeface="Calibri" pitchFamily="34" charset="0"/>
+                <a:ea typeface="Calibri" pitchFamily="34" charset="-122"/>
+                <a:cs typeface="Calibri" pitchFamily="34" charset="-120"/>
+              </a:rPr>
+              <a:t>low-level — send Prompt, get ChatResponse</a:t>
+            </a:r>
+            <a:endParaRPr lang="en-US" sz="1740" dirty="0"/>
+          </a:p>
+        </p:txBody>
+      </p:sp>
+      <p:sp>
+        <p:nvSpPr>
+          <p:cNvPr id="26" name="Shape 24"/>
+          <p:cNvSpPr/>
+          <p:nvPr/>
+        </p:nvSpPr>
+        <p:spPr>
+          <a:xfrm>
+            <a:off x="2148840" y="4242816"/>
+            <a:ext cx="7863840" cy="731520"/>
+          </a:xfrm>
+          <a:prstGeom prst="roundRect">
+            <a:avLst>
+              <a:gd name="adj" fmla="val 12500"/>
+            </a:avLst>
+          </a:prstGeom>
+          <a:solidFill>
+            <a:srgbClr val="172238"/>
+          </a:solidFill>
+          <a:ln w="15875">
+            <a:solidFill>
+              <a:srgbClr val="8B98AC"/>
+            </a:solidFill>
+            <a:prstDash val="solid"/>
+          </a:ln>
+          <a:effectLst>
+            <a:outerShdw sx="100000" sy="100000" kx="0" ky="0" algn="bl" rotWithShape="0" blurRad="63500" dist="25400" dir="2700000">
+              <a:srgbClr val="000000">
+                <a:alpha val="15000"/>
+              </a:srgbClr>
+            </a:outerShdw>
+          </a:effectLst>
+        </p:spPr>
       </p:sp>
       <p:sp>
         <p:nvSpPr>
@@ -8662,196 +11390,135 @@
         </p:nvSpPr>
         <p:spPr>
           <a:xfrm>
-            <a:off x="960120" y="2240280"/>
-            <a:ext cx="10332720" cy="274320"/>
-          </a:xfrm>
-          <a:prstGeom prst="rect">
-            <a:avLst/>
-          </a:prstGeom>
-          <a:noFill/>
-          <a:ln/>
-        </p:spPr>
-        <p:txBody>
-          <a:bodyPr wrap="square" lIns="0" tIns="0" rIns="0" bIns="0" rtlCol="0" anchor="t"/>
-          <a:lstStyle/>
-          <a:p>
-            <a:pPr indent="0" marL="0">
-              <a:buNone/>
-            </a:pPr>
-            <a:r>
-              <a:rPr lang="en-US" sz="1500" dirty="0">
-                <a:solidFill>
-                  <a:srgbClr val="E5E9F0"/>
+            <a:off x="2148840" y="4242816"/>
+            <a:ext cx="7863840" cy="731520"/>
+          </a:xfrm>
+          <a:prstGeom prst="rect">
+            <a:avLst/>
+          </a:prstGeom>
+          <a:noFill/>
+          <a:ln/>
+        </p:spPr>
+        <p:txBody>
+          <a:bodyPr wrap="square" lIns="0" tIns="0" rIns="0" bIns="0" rtlCol="0" anchor="ctr"/>
+          <a:lstStyle/>
+          <a:p>
+            <a:pPr algn="ctr" indent="0" marL="0">
+              <a:buNone/>
+            </a:pPr>
+            <a:r>
+              <a:rPr lang="en-US" sz="1740" b="1" dirty="0">
+                <a:solidFill>
+                  <a:srgbClr val="8B98AC"/>
                 </a:solidFill>
                 <a:latin typeface="Courier New" pitchFamily="34" charset="0"/>
                 <a:ea typeface="Courier New" pitchFamily="34" charset="-122"/>
                 <a:cs typeface="Courier New" pitchFamily="34" charset="-120"/>
               </a:rPr>
-              <a:t>    .options(</a:t>
-            </a:r>
-            <a:pPr indent="0" marL="0">
-              <a:buNone/>
-            </a:pPr>
-            <a:r>
-              <a:rPr lang="en-US" sz="1500" dirty="0">
-                <a:solidFill>
-                  <a:srgbClr val="F2A93B"/>
+              <a:t>OllamaChatModel   </a:t>
+            </a:r>
+            <a:pPr algn="ctr" indent="0" marL="0">
+              <a:buNone/>
+            </a:pPr>
+            <a:r>
+              <a:rPr lang="en-US" sz="1440" dirty="0">
+                <a:solidFill>
+                  <a:srgbClr val="B8C0D0"/>
+                </a:solidFill>
+                <a:latin typeface="Calibri" pitchFamily="34" charset="0"/>
+                <a:ea typeface="Calibri" pitchFamily="34" charset="-122"/>
+                <a:cs typeface="Calibri" pitchFamily="34" charset="-120"/>
+              </a:rPr>
+              <a:t>Ollama-specific implementation</a:t>
+            </a:r>
+            <a:endParaRPr lang="en-US" sz="1740" dirty="0"/>
+          </a:p>
+        </p:txBody>
+      </p:sp>
+      <p:sp>
+        <p:nvSpPr>
+          <p:cNvPr id="28" name="Shape 26"/>
+          <p:cNvSpPr/>
+          <p:nvPr/>
+        </p:nvSpPr>
+        <p:spPr>
+          <a:xfrm>
+            <a:off x="2651760" y="5138928"/>
+            <a:ext cx="6858000" cy="731520"/>
+          </a:xfrm>
+          <a:prstGeom prst="roundRect">
+            <a:avLst>
+              <a:gd name="adj" fmla="val 12500"/>
+            </a:avLst>
+          </a:prstGeom>
+          <a:solidFill>
+            <a:srgbClr val="121A2E"/>
+          </a:solidFill>
+          <a:ln w="15875">
+            <a:solidFill>
+              <a:srgbClr val="5B6478"/>
+            </a:solidFill>
+            <a:prstDash val="solid"/>
+          </a:ln>
+          <a:effectLst>
+            <a:outerShdw sx="100000" sy="100000" kx="0" ky="0" algn="bl" rotWithShape="0" blurRad="63500" dist="25400" dir="2700000">
+              <a:srgbClr val="000000">
+                <a:alpha val="15000"/>
+              </a:srgbClr>
+            </a:outerShdw>
+          </a:effectLst>
+        </p:spPr>
+      </p:sp>
+      <p:sp>
+        <p:nvSpPr>
+          <p:cNvPr id="29" name="Text 27"/>
+          <p:cNvSpPr/>
+          <p:nvPr/>
+        </p:nvSpPr>
+        <p:spPr>
+          <a:xfrm>
+            <a:off x="2651760" y="5138928"/>
+            <a:ext cx="6858000" cy="731520"/>
+          </a:xfrm>
+          <a:prstGeom prst="rect">
+            <a:avLst/>
+          </a:prstGeom>
+          <a:noFill/>
+          <a:ln/>
+        </p:spPr>
+        <p:txBody>
+          <a:bodyPr wrap="square" lIns="0" tIns="0" rIns="0" bIns="0" rtlCol="0" anchor="ctr"/>
+          <a:lstStyle/>
+          <a:p>
+            <a:pPr algn="ctr" indent="0" marL="0">
+              <a:buNone/>
+            </a:pPr>
+            <a:r>
+              <a:rPr lang="en-US" sz="1740" b="1" dirty="0">
+                <a:solidFill>
+                  <a:srgbClr val="B8C0D0"/>
                 </a:solidFill>
                 <a:latin typeface="Courier New" pitchFamily="34" charset="0"/>
                 <a:ea typeface="Courier New" pitchFamily="34" charset="-122"/>
                 <a:cs typeface="Courier New" pitchFamily="34" charset="-120"/>
               </a:rPr>
-              <a:t>ChatOptions</a:t>
-            </a:r>
-            <a:pPr indent="0" marL="0">
-              <a:buNone/>
-            </a:pPr>
-            <a:r>
-              <a:rPr lang="en-US" sz="1500" dirty="0">
-                <a:solidFill>
-                  <a:srgbClr val="E5E9F0"/>
-                </a:solidFill>
-                <a:latin typeface="Courier New" pitchFamily="34" charset="0"/>
-                <a:ea typeface="Courier New" pitchFamily="34" charset="-122"/>
-                <a:cs typeface="Courier New" pitchFamily="34" charset="-120"/>
-              </a:rPr>
-              <a:t>.builder()</a:t>
-            </a:r>
-            <a:endParaRPr lang="en-US" sz="1500" dirty="0"/>
-          </a:p>
-        </p:txBody>
-      </p:sp>
-      <p:sp>
-        <p:nvSpPr>
-          <p:cNvPr id="28" name="Text 26"/>
-          <p:cNvSpPr/>
-          <p:nvPr/>
-        </p:nvSpPr>
-        <p:spPr>
-          <a:xfrm>
-            <a:off x="960120" y="2514600"/>
-            <a:ext cx="10332720" cy="274320"/>
-          </a:xfrm>
-          <a:prstGeom prst="rect">
-            <a:avLst/>
-          </a:prstGeom>
-          <a:noFill/>
-          <a:ln/>
-        </p:spPr>
-        <p:txBody>
-          <a:bodyPr wrap="square" lIns="0" tIns="0" rIns="0" bIns="0" rtlCol="0" anchor="t"/>
-          <a:lstStyle/>
-          <a:p>
-            <a:pPr indent="0" marL="0">
-              <a:buNone/>
-            </a:pPr>
-            <a:r>
-              <a:rPr lang="en-US" sz="1500" dirty="0">
-                <a:solidFill>
-                  <a:srgbClr val="E5E9F0"/>
-                </a:solidFill>
-                <a:latin typeface="Courier New" pitchFamily="34" charset="0"/>
-                <a:ea typeface="Courier New" pitchFamily="34" charset="-122"/>
-                <a:cs typeface="Courier New" pitchFamily="34" charset="-120"/>
-              </a:rPr>
-              <a:t>        .temperature(</a:t>
-            </a:r>
-            <a:pPr indent="0" marL="0">
-              <a:buNone/>
-            </a:pPr>
-            <a:r>
-              <a:rPr lang="en-US" sz="1500" dirty="0">
-                <a:solidFill>
-                  <a:srgbClr val="5FE0C5"/>
-                </a:solidFill>
-                <a:latin typeface="Courier New" pitchFamily="34" charset="0"/>
-                <a:ea typeface="Courier New" pitchFamily="34" charset="-122"/>
-                <a:cs typeface="Courier New" pitchFamily="34" charset="-120"/>
-              </a:rPr>
-              <a:t>0.0</a:t>
-            </a:r>
-            <a:pPr indent="0" marL="0">
-              <a:buNone/>
-            </a:pPr>
-            <a:r>
-              <a:rPr lang="en-US" sz="1500" dirty="0">
-                <a:solidFill>
-                  <a:srgbClr val="E5E9F0"/>
-                </a:solidFill>
-                <a:latin typeface="Courier New" pitchFamily="34" charset="0"/>
-                <a:ea typeface="Courier New" pitchFamily="34" charset="-122"/>
-                <a:cs typeface="Courier New" pitchFamily="34" charset="-120"/>
-              </a:rPr>
-              <a:t>).maxTokens(</a:t>
-            </a:r>
-            <a:pPr indent="0" marL="0">
-              <a:buNone/>
-            </a:pPr>
-            <a:r>
-              <a:rPr lang="en-US" sz="1500" dirty="0">
-                <a:solidFill>
-                  <a:srgbClr val="5FE0C5"/>
-                </a:solidFill>
-                <a:latin typeface="Courier New" pitchFamily="34" charset="0"/>
-                <a:ea typeface="Courier New" pitchFamily="34" charset="-122"/>
-                <a:cs typeface="Courier New" pitchFamily="34" charset="-120"/>
-              </a:rPr>
-              <a:t>150</a:t>
-            </a:r>
-            <a:pPr indent="0" marL="0">
-              <a:buNone/>
-            </a:pPr>
-            <a:r>
-              <a:rPr lang="en-US" sz="1500" dirty="0">
-                <a:solidFill>
-                  <a:srgbClr val="E5E9F0"/>
-                </a:solidFill>
-                <a:latin typeface="Courier New" pitchFamily="34" charset="0"/>
-                <a:ea typeface="Courier New" pitchFamily="34" charset="-122"/>
-                <a:cs typeface="Courier New" pitchFamily="34" charset="-120"/>
-              </a:rPr>
-              <a:t>))</a:t>
-            </a:r>
-            <a:endParaRPr lang="en-US" sz="1500" dirty="0"/>
-          </a:p>
-        </p:txBody>
-      </p:sp>
-      <p:sp>
-        <p:nvSpPr>
-          <p:cNvPr id="29" name="Text 27"/>
-          <p:cNvSpPr/>
-          <p:nvPr/>
-        </p:nvSpPr>
-        <p:spPr>
-          <a:xfrm>
-            <a:off x="960120" y="2788920"/>
-            <a:ext cx="10332720" cy="274320"/>
-          </a:xfrm>
-          <a:prstGeom prst="rect">
-            <a:avLst/>
-          </a:prstGeom>
-          <a:noFill/>
-          <a:ln/>
-        </p:spPr>
-        <p:txBody>
-          <a:bodyPr wrap="square" lIns="0" tIns="0" rIns="0" bIns="0" rtlCol="0" anchor="t"/>
-          <a:lstStyle/>
-          <a:p>
-            <a:pPr indent="0" marL="0">
-              <a:buNone/>
-            </a:pPr>
-            <a:r>
-              <a:rPr lang="en-US" sz="1500" dirty="0">
-                <a:solidFill>
-                  <a:srgbClr val="E5E9F0"/>
-                </a:solidFill>
-                <a:latin typeface="Courier New" pitchFamily="34" charset="0"/>
-                <a:ea typeface="Courier New" pitchFamily="34" charset="-122"/>
-                <a:cs typeface="Courier New" pitchFamily="34" charset="-120"/>
-              </a:rPr>
-              <a:t>    .user(question).call().content();</a:t>
-            </a:r>
-            <a:endParaRPr lang="en-US" sz="1500" dirty="0"/>
+              <a:t>Ollama HTTP API → Llama 3.2   </a:t>
+            </a:r>
+            <a:pPr algn="ctr" indent="0" marL="0">
+              <a:buNone/>
+            </a:pPr>
+            <a:r>
+              <a:rPr lang="en-US" sz="1440" dirty="0">
+                <a:solidFill>
+                  <a:srgbClr val="B8C0D0"/>
+                </a:solidFill>
+                <a:latin typeface="Calibri" pitchFamily="34" charset="0"/>
+                <a:ea typeface="Calibri" pitchFamily="34" charset="-122"/>
+                <a:cs typeface="Calibri" pitchFamily="34" charset="-120"/>
+              </a:rPr>
+              <a:t>the model itself</a:t>
+            </a:r>
+            <a:endParaRPr lang="en-US" sz="1740" dirty="0"/>
           </a:p>
         </p:txBody>
       </p:sp>
@@ -8863,506 +11530,34 @@
         </p:nvSpPr>
         <p:spPr>
           <a:xfrm>
-            <a:off x="960120" y="3063240"/>
-            <a:ext cx="10332720" cy="274320"/>
-          </a:xfrm>
-          <a:prstGeom prst="rect">
-            <a:avLst/>
-          </a:prstGeom>
-          <a:noFill/>
-          <a:ln/>
-        </p:spPr>
-        <p:txBody>
-          <a:bodyPr wrap="square" lIns="0" tIns="0" rIns="0" bIns="0" rtlCol="0" anchor="t"/>
-          <a:lstStyle/>
-          <a:p>
-            <a:pPr indent="0" marL="0">
-              <a:buNone/>
-            </a:pPr>
-            <a:endParaRPr lang="en-US" sz="1500" dirty="0"/>
-          </a:p>
-        </p:txBody>
-      </p:sp>
-      <p:sp>
-        <p:nvSpPr>
-          <p:cNvPr id="31" name="Text 29"/>
-          <p:cNvSpPr/>
-          <p:nvPr/>
-        </p:nvSpPr>
-        <p:spPr>
-          <a:xfrm>
-            <a:off x="960120" y="3337560"/>
-            <a:ext cx="10332720" cy="274320"/>
-          </a:xfrm>
-          <a:prstGeom prst="rect">
-            <a:avLst/>
-          </a:prstGeom>
-          <a:noFill/>
-          <a:ln/>
-        </p:spPr>
-        <p:txBody>
-          <a:bodyPr wrap="square" lIns="0" tIns="0" rIns="0" bIns="0" rtlCol="0" anchor="t"/>
-          <a:lstStyle/>
-          <a:p>
-            <a:pPr indent="0" marL="0">
-              <a:buNone/>
-            </a:pPr>
-            <a:r>
-              <a:rPr lang="en-US" sz="1500" dirty="0">
-                <a:solidFill>
-                  <a:srgbClr val="8B98AC"/>
-                </a:solidFill>
-                <a:latin typeface="Courier New" pitchFamily="34" charset="0"/>
-                <a:ea typeface="Courier New" pitchFamily="34" charset="-122"/>
-                <a:cs typeface="Courier New" pitchFamily="34" charset="-120"/>
-              </a:rPr>
-              <a:t>// CREATIVE — warm, generous budget</a:t>
-            </a:r>
-            <a:endParaRPr lang="en-US" sz="1500" dirty="0"/>
-          </a:p>
-        </p:txBody>
-      </p:sp>
-      <p:sp>
-        <p:nvSpPr>
-          <p:cNvPr id="32" name="Text 30"/>
-          <p:cNvSpPr/>
-          <p:nvPr/>
-        </p:nvSpPr>
-        <p:spPr>
-          <a:xfrm>
-            <a:off x="960120" y="3611880"/>
-            <a:ext cx="10332720" cy="274320"/>
-          </a:xfrm>
-          <a:prstGeom prst="rect">
-            <a:avLst/>
-          </a:prstGeom>
-          <a:noFill/>
-          <a:ln/>
-        </p:spPr>
-        <p:txBody>
-          <a:bodyPr wrap="square" lIns="0" tIns="0" rIns="0" bIns="0" rtlCol="0" anchor="t"/>
-          <a:lstStyle/>
-          <a:p>
-            <a:pPr indent="0" marL="0">
-              <a:buNone/>
-            </a:pPr>
-            <a:r>
-              <a:rPr lang="en-US" sz="1500" dirty="0">
-                <a:solidFill>
-                  <a:srgbClr val="E5E9F0"/>
-                </a:solidFill>
-                <a:latin typeface="Courier New" pitchFamily="34" charset="0"/>
-                <a:ea typeface="Courier New" pitchFamily="34" charset="-122"/>
-                <a:cs typeface="Courier New" pitchFamily="34" charset="-120"/>
-              </a:rPr>
-              <a:t>    .options(</a:t>
-            </a:r>
-            <a:pPr indent="0" marL="0">
-              <a:buNone/>
-            </a:pPr>
-            <a:r>
-              <a:rPr lang="en-US" sz="1500" dirty="0">
-                <a:solidFill>
-                  <a:srgbClr val="F2A93B"/>
-                </a:solidFill>
-                <a:latin typeface="Courier New" pitchFamily="34" charset="0"/>
-                <a:ea typeface="Courier New" pitchFamily="34" charset="-122"/>
-                <a:cs typeface="Courier New" pitchFamily="34" charset="-120"/>
-              </a:rPr>
-              <a:t>ChatOptions</a:t>
-            </a:r>
-            <a:pPr indent="0" marL="0">
-              <a:buNone/>
-            </a:pPr>
-            <a:r>
-              <a:rPr lang="en-US" sz="1500" dirty="0">
-                <a:solidFill>
-                  <a:srgbClr val="E5E9F0"/>
-                </a:solidFill>
-                <a:latin typeface="Courier New" pitchFamily="34" charset="0"/>
-                <a:ea typeface="Courier New" pitchFamily="34" charset="-122"/>
-                <a:cs typeface="Courier New" pitchFamily="34" charset="-120"/>
-              </a:rPr>
-              <a:t>.builder()</a:t>
-            </a:r>
-            <a:endParaRPr lang="en-US" sz="1500" dirty="0"/>
-          </a:p>
-        </p:txBody>
-      </p:sp>
-      <p:sp>
-        <p:nvSpPr>
-          <p:cNvPr id="33" name="Text 31"/>
-          <p:cNvSpPr/>
-          <p:nvPr/>
-        </p:nvSpPr>
-        <p:spPr>
-          <a:xfrm>
-            <a:off x="960120" y="3886200"/>
-            <a:ext cx="10332720" cy="274320"/>
-          </a:xfrm>
-          <a:prstGeom prst="rect">
-            <a:avLst/>
-          </a:prstGeom>
-          <a:noFill/>
-          <a:ln/>
-        </p:spPr>
-        <p:txBody>
-          <a:bodyPr wrap="square" lIns="0" tIns="0" rIns="0" bIns="0" rtlCol="0" anchor="t"/>
-          <a:lstStyle/>
-          <a:p>
-            <a:pPr indent="0" marL="0">
-              <a:buNone/>
-            </a:pPr>
-            <a:r>
-              <a:rPr lang="en-US" sz="1500" dirty="0">
-                <a:solidFill>
-                  <a:srgbClr val="E5E9F0"/>
-                </a:solidFill>
-                <a:latin typeface="Courier New" pitchFamily="34" charset="0"/>
-                <a:ea typeface="Courier New" pitchFamily="34" charset="-122"/>
-                <a:cs typeface="Courier New" pitchFamily="34" charset="-120"/>
-              </a:rPr>
-              <a:t>        .temperature(</a:t>
-            </a:r>
-            <a:pPr indent="0" marL="0">
-              <a:buNone/>
-            </a:pPr>
-            <a:r>
-              <a:rPr lang="en-US" sz="1500" dirty="0">
-                <a:solidFill>
-                  <a:srgbClr val="5FE0C5"/>
-                </a:solidFill>
-                <a:latin typeface="Courier New" pitchFamily="34" charset="0"/>
-                <a:ea typeface="Courier New" pitchFamily="34" charset="-122"/>
-                <a:cs typeface="Courier New" pitchFamily="34" charset="-120"/>
-              </a:rPr>
-              <a:t>0.9</a:t>
-            </a:r>
-            <a:pPr indent="0" marL="0">
-              <a:buNone/>
-            </a:pPr>
-            <a:r>
-              <a:rPr lang="en-US" sz="1500" dirty="0">
-                <a:solidFill>
-                  <a:srgbClr val="E5E9F0"/>
-                </a:solidFill>
-                <a:latin typeface="Courier New" pitchFamily="34" charset="0"/>
-                <a:ea typeface="Courier New" pitchFamily="34" charset="-122"/>
-                <a:cs typeface="Courier New" pitchFamily="34" charset="-120"/>
-              </a:rPr>
-              <a:t>).maxTokens(</a:t>
-            </a:r>
-            <a:pPr indent="0" marL="0">
-              <a:buNone/>
-            </a:pPr>
-            <a:r>
-              <a:rPr lang="en-US" sz="1500" dirty="0">
-                <a:solidFill>
-                  <a:srgbClr val="5FE0C5"/>
-                </a:solidFill>
-                <a:latin typeface="Courier New" pitchFamily="34" charset="0"/>
-                <a:ea typeface="Courier New" pitchFamily="34" charset="-122"/>
-                <a:cs typeface="Courier New" pitchFamily="34" charset="-120"/>
-              </a:rPr>
-              <a:t>800</a:t>
-            </a:r>
-            <a:pPr indent="0" marL="0">
-              <a:buNone/>
-            </a:pPr>
-            <a:r>
-              <a:rPr lang="en-US" sz="1500" dirty="0">
-                <a:solidFill>
-                  <a:srgbClr val="E5E9F0"/>
-                </a:solidFill>
-                <a:latin typeface="Courier New" pitchFamily="34" charset="0"/>
-                <a:ea typeface="Courier New" pitchFamily="34" charset="-122"/>
-                <a:cs typeface="Courier New" pitchFamily="34" charset="-120"/>
-              </a:rPr>
-              <a:t>))</a:t>
-            </a:r>
-            <a:endParaRPr lang="en-US" sz="1500" dirty="0"/>
-          </a:p>
-        </p:txBody>
-      </p:sp>
-      <p:sp>
-        <p:nvSpPr>
-          <p:cNvPr id="34" name="Text 32"/>
-          <p:cNvSpPr/>
-          <p:nvPr/>
-        </p:nvSpPr>
-        <p:spPr>
-          <a:xfrm>
-            <a:off x="960120" y="4160520"/>
-            <a:ext cx="10332720" cy="274320"/>
-          </a:xfrm>
-          <a:prstGeom prst="rect">
-            <a:avLst/>
-          </a:prstGeom>
-          <a:noFill/>
-          <a:ln/>
-        </p:spPr>
-        <p:txBody>
-          <a:bodyPr wrap="square" lIns="0" tIns="0" rIns="0" bIns="0" rtlCol="0" anchor="t"/>
-          <a:lstStyle/>
-          <a:p>
-            <a:pPr indent="0" marL="0">
-              <a:buNone/>
-            </a:pPr>
-            <a:endParaRPr lang="en-US" sz="1500" dirty="0"/>
-          </a:p>
-        </p:txBody>
-      </p:sp>
-      <p:sp>
-        <p:nvSpPr>
-          <p:cNvPr id="35" name="Text 33"/>
-          <p:cNvSpPr/>
-          <p:nvPr/>
-        </p:nvSpPr>
-        <p:spPr>
-          <a:xfrm>
-            <a:off x="960120" y="4434840"/>
-            <a:ext cx="10332720" cy="274320"/>
-          </a:xfrm>
-          <a:prstGeom prst="rect">
-            <a:avLst/>
-          </a:prstGeom>
-          <a:noFill/>
-          <a:ln/>
-        </p:spPr>
-        <p:txBody>
-          <a:bodyPr wrap="square" lIns="0" tIns="0" rIns="0" bIns="0" rtlCol="0" anchor="t"/>
-          <a:lstStyle/>
-          <a:p>
-            <a:pPr indent="0" marL="0">
-              <a:buNone/>
-            </a:pPr>
-            <a:r>
-              <a:rPr lang="en-US" sz="1500" dirty="0">
-                <a:solidFill>
-                  <a:srgbClr val="8B98AC"/>
-                </a:solidFill>
-                <a:latin typeface="Courier New" pitchFamily="34" charset="0"/>
-                <a:ea typeface="Courier New" pitchFamily="34" charset="-122"/>
-                <a:cs typeface="Courier New" pitchFamily="34" charset="-120"/>
-              </a:rPr>
-              <a:t>// RAW — bypass ChatClient, use ChatModel</a:t>
-            </a:r>
-            <a:endParaRPr lang="en-US" sz="1500" dirty="0"/>
-          </a:p>
-        </p:txBody>
-      </p:sp>
-      <p:sp>
-        <p:nvSpPr>
-          <p:cNvPr id="36" name="Text 34"/>
-          <p:cNvSpPr/>
-          <p:nvPr/>
-        </p:nvSpPr>
-        <p:spPr>
-          <a:xfrm>
-            <a:off x="960120" y="4709160"/>
-            <a:ext cx="10332720" cy="274320"/>
-          </a:xfrm>
-          <a:prstGeom prst="rect">
-            <a:avLst/>
-          </a:prstGeom>
-          <a:noFill/>
-          <a:ln/>
-        </p:spPr>
-        <p:txBody>
-          <a:bodyPr wrap="square" lIns="0" tIns="0" rIns="0" bIns="0" rtlCol="0" anchor="t"/>
-          <a:lstStyle/>
-          <a:p>
-            <a:pPr indent="0" marL="0">
-              <a:buNone/>
-            </a:pPr>
-            <a:r>
-              <a:rPr lang="en-US" sz="1500" dirty="0">
-                <a:solidFill>
-                  <a:srgbClr val="E5E9F0"/>
-                </a:solidFill>
-                <a:latin typeface="Courier New" pitchFamily="34" charset="0"/>
-                <a:ea typeface="Courier New" pitchFamily="34" charset="-122"/>
-                <a:cs typeface="Courier New" pitchFamily="34" charset="-120"/>
-              </a:rPr>
-              <a:t>chatModel.call(</a:t>
-            </a:r>
-            <a:pPr indent="0" marL="0">
-              <a:buNone/>
-            </a:pPr>
-            <a:r>
-              <a:rPr lang="en-US" sz="1500" dirty="0">
-                <a:solidFill>
-                  <a:srgbClr val="F2A93B"/>
-                </a:solidFill>
-                <a:latin typeface="Courier New" pitchFamily="34" charset="0"/>
-                <a:ea typeface="Courier New" pitchFamily="34" charset="-122"/>
-                <a:cs typeface="Courier New" pitchFamily="34" charset="-120"/>
-              </a:rPr>
-              <a:t>new </a:t>
-            </a:r>
-            <a:pPr indent="0" marL="0">
-              <a:buNone/>
-            </a:pPr>
-            <a:r>
-              <a:rPr lang="en-US" sz="1500" dirty="0">
-                <a:solidFill>
-                  <a:srgbClr val="5FE0C5"/>
-                </a:solidFill>
-                <a:latin typeface="Courier New" pitchFamily="34" charset="0"/>
-                <a:ea typeface="Courier New" pitchFamily="34" charset="-122"/>
-                <a:cs typeface="Courier New" pitchFamily="34" charset="-120"/>
-              </a:rPr>
-              <a:t>Prompt</a:t>
-            </a:r>
-            <a:pPr indent="0" marL="0">
-              <a:buNone/>
-            </a:pPr>
-            <a:r>
-              <a:rPr lang="en-US" sz="1500" dirty="0">
-                <a:solidFill>
-                  <a:srgbClr val="E5E9F0"/>
-                </a:solidFill>
-                <a:latin typeface="Courier New" pitchFamily="34" charset="0"/>
-                <a:ea typeface="Courier New" pitchFamily="34" charset="-122"/>
-                <a:cs typeface="Courier New" pitchFamily="34" charset="-120"/>
-              </a:rPr>
-              <a:t>(List.of(</a:t>
-            </a:r>
-            <a:endParaRPr lang="en-US" sz="1500" dirty="0"/>
-          </a:p>
-        </p:txBody>
-      </p:sp>
-      <p:sp>
-        <p:nvSpPr>
-          <p:cNvPr id="37" name="Text 35"/>
-          <p:cNvSpPr/>
-          <p:nvPr/>
-        </p:nvSpPr>
-        <p:spPr>
-          <a:xfrm>
-            <a:off x="960120" y="4983480"/>
-            <a:ext cx="10332720" cy="274320"/>
-          </a:xfrm>
-          <a:prstGeom prst="rect">
-            <a:avLst/>
-          </a:prstGeom>
-          <a:noFill/>
-          <a:ln/>
-        </p:spPr>
-        <p:txBody>
-          <a:bodyPr wrap="square" lIns="0" tIns="0" rIns="0" bIns="0" rtlCol="0" anchor="t"/>
-          <a:lstStyle/>
-          <a:p>
-            <a:pPr indent="0" marL="0">
-              <a:buNone/>
-            </a:pPr>
-            <a:r>
-              <a:rPr lang="en-US" sz="1500" dirty="0">
-                <a:solidFill>
-                  <a:srgbClr val="F2A93B"/>
-                </a:solidFill>
-                <a:latin typeface="Courier New" pitchFamily="34" charset="0"/>
-                <a:ea typeface="Courier New" pitchFamily="34" charset="-122"/>
-                <a:cs typeface="Courier New" pitchFamily="34" charset="-120"/>
-              </a:rPr>
-              <a:t>    new </a:t>
-            </a:r>
-            <a:pPr indent="0" marL="0">
-              <a:buNone/>
-            </a:pPr>
-            <a:r>
-              <a:rPr lang="en-US" sz="1500" dirty="0">
-                <a:solidFill>
-                  <a:srgbClr val="5FE0C5"/>
-                </a:solidFill>
-                <a:latin typeface="Courier New" pitchFamily="34" charset="0"/>
-                <a:ea typeface="Courier New" pitchFamily="34" charset="-122"/>
-                <a:cs typeface="Courier New" pitchFamily="34" charset="-120"/>
-              </a:rPr>
-              <a:t>SystemMessage</a:t>
-            </a:r>
-            <a:pPr indent="0" marL="0">
-              <a:buNone/>
-            </a:pPr>
-            <a:r>
-              <a:rPr lang="en-US" sz="1500" dirty="0">
-                <a:solidFill>
-                  <a:srgbClr val="E5E9F0"/>
-                </a:solidFill>
-                <a:latin typeface="Courier New" pitchFamily="34" charset="0"/>
-                <a:ea typeface="Courier New" pitchFamily="34" charset="-122"/>
-                <a:cs typeface="Courier New" pitchFamily="34" charset="-120"/>
-              </a:rPr>
-              <a:t>(SYSTEM_PROMPT),</a:t>
-            </a:r>
-            <a:endParaRPr lang="en-US" sz="1500" dirty="0"/>
-          </a:p>
-        </p:txBody>
-      </p:sp>
-      <p:sp>
-        <p:nvSpPr>
-          <p:cNvPr id="38" name="Text 36"/>
-          <p:cNvSpPr/>
-          <p:nvPr/>
-        </p:nvSpPr>
-        <p:spPr>
-          <a:xfrm>
-            <a:off x="960120" y="5257800"/>
-            <a:ext cx="10332720" cy="274320"/>
-          </a:xfrm>
-          <a:prstGeom prst="rect">
-            <a:avLst/>
-          </a:prstGeom>
-          <a:noFill/>
-          <a:ln/>
-        </p:spPr>
-        <p:txBody>
-          <a:bodyPr wrap="square" lIns="0" tIns="0" rIns="0" bIns="0" rtlCol="0" anchor="t"/>
-          <a:lstStyle/>
-          <a:p>
-            <a:pPr indent="0" marL="0">
-              <a:buNone/>
-            </a:pPr>
-            <a:r>
-              <a:rPr lang="en-US" sz="1500" dirty="0">
-                <a:solidFill>
-                  <a:srgbClr val="F2A93B"/>
-                </a:solidFill>
-                <a:latin typeface="Courier New" pitchFamily="34" charset="0"/>
-                <a:ea typeface="Courier New" pitchFamily="34" charset="-122"/>
-                <a:cs typeface="Courier New" pitchFamily="34" charset="-120"/>
-              </a:rPr>
-              <a:t>    new </a:t>
-            </a:r>
-            <a:pPr indent="0" marL="0">
-              <a:buNone/>
-            </a:pPr>
-            <a:r>
-              <a:rPr lang="en-US" sz="1500" dirty="0">
-                <a:solidFill>
-                  <a:srgbClr val="5FE0C5"/>
-                </a:solidFill>
-                <a:latin typeface="Courier New" pitchFamily="34" charset="0"/>
-                <a:ea typeface="Courier New" pitchFamily="34" charset="-122"/>
-                <a:cs typeface="Courier New" pitchFamily="34" charset="-120"/>
-              </a:rPr>
-              <a:t>UserMessage</a:t>
-            </a:r>
-            <a:pPr indent="0" marL="0">
-              <a:buNone/>
-            </a:pPr>
-            <a:r>
-              <a:rPr lang="en-US" sz="1500" dirty="0">
-                <a:solidFill>
-                  <a:srgbClr val="E5E9F0"/>
-                </a:solidFill>
-                <a:latin typeface="Courier New" pitchFamily="34" charset="0"/>
-                <a:ea typeface="Courier New" pitchFamily="34" charset="-122"/>
-                <a:cs typeface="Courier New" pitchFamily="34" charset="-120"/>
-              </a:rPr>
-              <a:t>(question))));</a:t>
-            </a:r>
-            <a:endParaRPr lang="en-US" sz="1500" dirty="0"/>
+            <a:off x="640080" y="6080760"/>
+            <a:ext cx="10881360" cy="274320"/>
+          </a:xfrm>
+          <a:prstGeom prst="rect">
+            <a:avLst/>
+          </a:prstGeom>
+          <a:noFill/>
+          <a:ln/>
+        </p:spPr>
+        <p:txBody>
+          <a:bodyPr wrap="square" lIns="0" tIns="0" rIns="0" bIns="0" rtlCol="0" anchor="ctr"/>
+          <a:lstStyle/>
+          <a:p>
+            <a:pPr algn="ctr" indent="0" marL="0">
+              <a:buNone/>
+            </a:pPr>
+            <a:r>
+              <a:rPr lang="en-US" sz="1440" dirty="0">
+                <a:solidFill>
+                  <a:srgbClr val="B8C0D0"/>
+                </a:solidFill>
+                <a:latin typeface="Calibri" pitchFamily="34" charset="0"/>
+                <a:ea typeface="Calibri" pitchFamily="34" charset="-122"/>
+                <a:cs typeface="Calibri" pitchFamily="34" charset="-120"/>
+              </a:rPr>
+              <a:t>Switch to OpenAI later? Only the bottom layer changes — your code stays identical.</a:t>
+            </a:r>
+            <a:endParaRPr lang="en-US" sz="1440" dirty="0"/>
           </a:p>
         </p:txBody>
       </p:sp>
@@ -9796,7 +11991,7 @@
                 <a:ea typeface="Courier New" pitchFamily="34" charset="-122"/>
                 <a:cs typeface="Courier New" pitchFamily="34" charset="-120"/>
               </a:rPr>
-              <a:t>8 / 9</a:t>
+              <a:t>8 / 11</a:t>
             </a:r>
             <a:endParaRPr lang="en-US" sz="1080" dirty="0"/>
           </a:p>
@@ -9835,7 +12030,7 @@
                 <a:ea typeface="Courier New" pitchFamily="34" charset="-122"/>
                 <a:cs typeface="Courier New" pitchFamily="34" charset="-120"/>
               </a:rPr>
-              <a:t>RECAP</a:t>
+              <a:t>WHAT YOU BUILD</a:t>
             </a:r>
             <a:endParaRPr lang="en-US" sz="1440" dirty="0"/>
           </a:p>
@@ -9874,7 +12069,7 @@
                 <a:ea typeface="Courier New" pitchFamily="34" charset="-122"/>
                 <a:cs typeface="Courier New" pitchFamily="34" charset="-120"/>
               </a:rPr>
-              <a:t>What you can do now</a:t>
+              <a:t>Two modes, one controller</a:t>
             </a:r>
             <a:endParaRPr lang="en-US" sz="3360" dirty="0"/>
           </a:p>
@@ -9882,139 +12077,33 @@
       </p:sp>
       <p:sp>
         <p:nvSpPr>
-          <p:cNvPr id="20" name="Text 18"/>
-          <p:cNvSpPr/>
-          <p:nvPr/>
-        </p:nvSpPr>
-        <p:spPr>
-          <a:xfrm>
-            <a:off x="640080" y="1417320"/>
-            <a:ext cx="10881360" cy="2011680"/>
-          </a:xfrm>
-          <a:prstGeom prst="rect">
-            <a:avLst/>
-          </a:prstGeom>
-          <a:noFill/>
-          <a:ln/>
-        </p:spPr>
-        <p:txBody>
-          <a:bodyPr wrap="square" lIns="0" tIns="0" rIns="0" bIns="0" rtlCol="0" anchor="t"/>
-          <a:lstStyle/>
-          <a:p>
-            <a:pPr marL="342900" indent="-342900">
-              <a:spcAft>
-                <a:spcPts val="1200"/>
-              </a:spcAft>
-              <a:buSzPct val="100000"/>
-              <a:buChar char="•"/>
-            </a:pPr>
-            <a:r>
-              <a:rPr lang="en-US" sz="2040" dirty="0">
-                <a:solidFill>
-                  <a:srgbClr val="E5E9F0"/>
-                </a:solidFill>
-                <a:latin typeface="Calibri" pitchFamily="34" charset="0"/>
-                <a:ea typeface="Calibri" pitchFamily="34" charset="-122"/>
-                <a:cs typeface="Calibri" pitchFamily="34" charset="-120"/>
-              </a:rPr>
-              <a:t>Explain tokens, context windows, and why length varies</a:t>
-            </a:r>
-            <a:endParaRPr lang="en-US" sz="2040" dirty="0"/>
-          </a:p>
-          <a:p>
-            <a:pPr marL="342900" indent="-342900">
-              <a:spcAft>
-                <a:spcPts val="1200"/>
-              </a:spcAft>
-              <a:buSzPct val="100000"/>
-              <a:buChar char="•"/>
-            </a:pPr>
-            <a:r>
-              <a:rPr lang="en-US" sz="2040" dirty="0">
-                <a:solidFill>
-                  <a:srgbClr val="E5E9F0"/>
-                </a:solidFill>
-                <a:latin typeface="Calibri" pitchFamily="34" charset="0"/>
-                <a:ea typeface="Calibri" pitchFamily="34" charset="-122"/>
-                <a:cs typeface="Calibri" pitchFamily="34" charset="-120"/>
-              </a:rPr>
-              <a:t>Control response length with maxTokens</a:t>
-            </a:r>
-            <a:endParaRPr lang="en-US" sz="2040" dirty="0"/>
-          </a:p>
-          <a:p>
-            <a:pPr marL="342900" indent="-342900">
-              <a:spcAft>
-                <a:spcPts val="1200"/>
-              </a:spcAft>
-              <a:buSzPct val="100000"/>
-              <a:buChar char="•"/>
-            </a:pPr>
-            <a:r>
-              <a:rPr lang="en-US" sz="2040" dirty="0">
-                <a:solidFill>
-                  <a:srgbClr val="E5E9F0"/>
-                </a:solidFill>
-                <a:latin typeface="Calibri" pitchFamily="34" charset="0"/>
-                <a:ea typeface="Calibri" pitchFamily="34" charset="-122"/>
-                <a:cs typeface="Calibri" pitchFamily="34" charset="-120"/>
-              </a:rPr>
-              <a:t>Tune temperature per use case — precise vs. creative</a:t>
-            </a:r>
-            <a:endParaRPr lang="en-US" sz="2040" dirty="0"/>
-          </a:p>
-          <a:p>
-            <a:pPr marL="342900" indent="-342900">
-              <a:spcAft>
-                <a:spcPts val="1200"/>
-              </a:spcAft>
-              <a:buSzPct val="100000"/>
-              <a:buChar char="•"/>
-            </a:pPr>
-            <a:r>
-              <a:rPr lang="en-US" sz="2040" dirty="0">
-                <a:solidFill>
-                  <a:srgbClr val="E5E9F0"/>
-                </a:solidFill>
-                <a:latin typeface="Calibri" pitchFamily="34" charset="0"/>
-                <a:ea typeface="Calibri" pitchFamily="34" charset="-122"/>
-                <a:cs typeface="Calibri" pitchFamily="34" charset="-120"/>
-              </a:rPr>
-              <a:t>Drop to the ChatModel + Message API when you need it</a:t>
-            </a:r>
-            <a:endParaRPr lang="en-US" sz="2040" dirty="0"/>
-          </a:p>
-        </p:txBody>
-      </p:sp>
-      <p:sp>
-        <p:nvSpPr>
-          <p:cNvPr id="21" name="Shape 19"/>
-          <p:cNvSpPr/>
-          <p:nvPr/>
-        </p:nvSpPr>
-        <p:spPr>
-          <a:xfrm>
-            <a:off x="640080" y="3566160"/>
-            <a:ext cx="10881360" cy="1737360"/>
+          <p:cNvPr id="20" name="Shape 18"/>
+          <p:cNvSpPr/>
+          <p:nvPr/>
+        </p:nvSpPr>
+        <p:spPr>
+          <a:xfrm>
+            <a:off x="640080" y="1234440"/>
+            <a:ext cx="10881360" cy="5029200"/>
           </a:xfrm>
           <a:prstGeom prst="roundRect">
             <a:avLst>
-              <a:gd name="adj" fmla="val 6316"/>
+              <a:gd name="adj" fmla="val 1455"/>
             </a:avLst>
           </a:prstGeom>
           <a:solidFill>
             <a:srgbClr val="121A2E"/>
           </a:solidFill>
-          <a:ln w="15875">
+          <a:ln w="9525">
             <a:solidFill>
-              <a:srgbClr val="5FE0C5"/>
+              <a:srgbClr val="5B6478"/>
             </a:solidFill>
             <a:prstDash val="solid"/>
           </a:ln>
           <a:effectLst>
-            <a:outerShdw sx="100000" sy="100000" kx="0" ky="0" algn="bl" rotWithShape="0" blurRad="101600" dist="38100" dir="2700000">
+            <a:outerShdw sx="100000" sy="100000" kx="0" ky="0" algn="bl" rotWithShape="0" blurRad="127000" dist="50800" dir="5400000">
               <a:srgbClr val="000000">
-                <a:alpha val="25000"/>
+                <a:alpha val="30000"/>
               </a:srgbClr>
             </a:outerShdw>
           </a:effectLst>
@@ -10022,14 +12111,74 @@
       </p:sp>
       <p:sp>
         <p:nvSpPr>
-          <p:cNvPr id="22" name="Text 20"/>
-          <p:cNvSpPr/>
-          <p:nvPr/>
-        </p:nvSpPr>
-        <p:spPr>
-          <a:xfrm>
-            <a:off x="914400" y="3749040"/>
-            <a:ext cx="3657600" cy="274320"/>
+          <p:cNvPr id="21" name="Shape 19"/>
+          <p:cNvSpPr/>
+          <p:nvPr/>
+        </p:nvSpPr>
+        <p:spPr>
+          <a:xfrm>
+            <a:off x="841248" y="1399032"/>
+            <a:ext cx="91440" cy="91440"/>
+          </a:xfrm>
+          <a:prstGeom prst="ellipse">
+            <a:avLst/>
+          </a:prstGeom>
+          <a:solidFill>
+            <a:srgbClr val="F2A93B"/>
+          </a:solidFill>
+          <a:ln/>
+        </p:spPr>
+      </p:sp>
+      <p:sp>
+        <p:nvSpPr>
+          <p:cNvPr id="22" name="Shape 20"/>
+          <p:cNvSpPr/>
+          <p:nvPr/>
+        </p:nvSpPr>
+        <p:spPr>
+          <a:xfrm>
+            <a:off x="1042416" y="1399032"/>
+            <a:ext cx="91440" cy="91440"/>
+          </a:xfrm>
+          <a:prstGeom prst="ellipse">
+            <a:avLst/>
+          </a:prstGeom>
+          <a:solidFill>
+            <a:srgbClr val="8B98AC"/>
+          </a:solidFill>
+          <a:ln/>
+        </p:spPr>
+      </p:sp>
+      <p:sp>
+        <p:nvSpPr>
+          <p:cNvPr id="23" name="Shape 21"/>
+          <p:cNvSpPr/>
+          <p:nvPr/>
+        </p:nvSpPr>
+        <p:spPr>
+          <a:xfrm>
+            <a:off x="1243584" y="1399032"/>
+            <a:ext cx="91440" cy="91440"/>
+          </a:xfrm>
+          <a:prstGeom prst="ellipse">
+            <a:avLst/>
+          </a:prstGeom>
+          <a:solidFill>
+            <a:srgbClr val="5FE0C5"/>
+          </a:solidFill>
+          <a:ln/>
+        </p:spPr>
+      </p:sp>
+      <p:sp>
+        <p:nvSpPr>
+          <p:cNvPr id="24" name="Text 22"/>
+          <p:cNvSpPr/>
+          <p:nvPr/>
+        </p:nvSpPr>
+        <p:spPr>
+          <a:xfrm>
+            <a:off x="9509760" y="1325880"/>
+            <a:ext cx="1828800" cy="274320"/>
           </a:xfrm>
           <a:prstGeom prst="rect">
             <a:avLst/>
@@ -10041,34 +12190,34 @@
           <a:bodyPr wrap="square" lIns="0" tIns="0" rIns="0" bIns="0" rtlCol="0" anchor="ctr"/>
           <a:lstStyle/>
           <a:p>
-            <a:pPr indent="0" marL="0">
-              <a:buNone/>
-            </a:pPr>
-            <a:r>
-              <a:rPr lang="en-US" sz="1440" spc="200" kern="0" dirty="0">
-                <a:solidFill>
-                  <a:srgbClr val="5FE0C5"/>
+            <a:pPr algn="r" indent="0" marL="0">
+              <a:buNone/>
+            </a:pPr>
+            <a:r>
+              <a:rPr lang="en-US" sz="1200" dirty="0">
+                <a:solidFill>
+                  <a:srgbClr val="8B98AC"/>
                 </a:solidFill>
                 <a:latin typeface="Courier New" pitchFamily="34" charset="0"/>
                 <a:ea typeface="Courier New" pitchFamily="34" charset="-122"/>
                 <a:cs typeface="Courier New" pitchFamily="34" charset="-120"/>
               </a:rPr>
-              <a:t>WHAT'S NEXT</a:t>
-            </a:r>
-            <a:endParaRPr lang="en-US" sz="1440" dirty="0"/>
-          </a:p>
-        </p:txBody>
-      </p:sp>
-      <p:sp>
-        <p:nvSpPr>
-          <p:cNvPr id="23" name="Text 21"/>
-          <p:cNvSpPr/>
-          <p:nvPr/>
-        </p:nvSpPr>
-        <p:spPr>
-          <a:xfrm>
-            <a:off x="914400" y="4069080"/>
-            <a:ext cx="10332720" cy="1143000"/>
+              <a:t>HrChatController.java</a:t>
+            </a:r>
+            <a:endParaRPr lang="en-US" sz="1200" dirty="0"/>
+          </a:p>
+        </p:txBody>
+      </p:sp>
+      <p:sp>
+        <p:nvSpPr>
+          <p:cNvPr id="25" name="Text 23"/>
+          <p:cNvSpPr/>
+          <p:nvPr/>
+        </p:nvSpPr>
+        <p:spPr>
+          <a:xfrm>
+            <a:off x="960120" y="1691640"/>
+            <a:ext cx="10332720" cy="274320"/>
           </a:xfrm>
           <a:prstGeom prst="rect">
             <a:avLst/>
@@ -10081,63 +12230,567 @@
           <a:lstStyle/>
           <a:p>
             <a:pPr indent="0" marL="0">
-              <a:lnSpc>
-                <a:spcPct val="125000"/>
-              </a:lnSpc>
-              <a:buNone/>
-            </a:pPr>
-            <a:r>
-              <a:rPr lang="en-US" sz="2280" b="1" dirty="0">
+              <a:buNone/>
+            </a:pPr>
+            <a:r>
+              <a:rPr lang="en-US" sz="1500" dirty="0">
+                <a:solidFill>
+                  <a:srgbClr val="8B98AC"/>
+                </a:solidFill>
+                <a:latin typeface="Courier New" pitchFamily="34" charset="0"/>
+                <a:ea typeface="Courier New" pitchFamily="34" charset="-122"/>
+                <a:cs typeface="Courier New" pitchFamily="34" charset="-120"/>
+              </a:rPr>
+              <a:t>// PRECISE — deterministic, capped short</a:t>
+            </a:r>
+            <a:endParaRPr lang="en-US" sz="1500" dirty="0"/>
+          </a:p>
+        </p:txBody>
+      </p:sp>
+      <p:sp>
+        <p:nvSpPr>
+          <p:cNvPr id="26" name="Text 24"/>
+          <p:cNvSpPr/>
+          <p:nvPr/>
+        </p:nvSpPr>
+        <p:spPr>
+          <a:xfrm>
+            <a:off x="960120" y="1965960"/>
+            <a:ext cx="10332720" cy="274320"/>
+          </a:xfrm>
+          <a:prstGeom prst="rect">
+            <a:avLst/>
+          </a:prstGeom>
+          <a:noFill/>
+          <a:ln/>
+        </p:spPr>
+        <p:txBody>
+          <a:bodyPr wrap="square" lIns="0" tIns="0" rIns="0" bIns="0" rtlCol="0" anchor="t"/>
+          <a:lstStyle/>
+          <a:p>
+            <a:pPr indent="0" marL="0">
+              <a:buNone/>
+            </a:pPr>
+            <a:r>
+              <a:rPr lang="en-US" sz="1500" dirty="0">
                 <a:solidFill>
                   <a:srgbClr val="E5E9F0"/>
                 </a:solidFill>
-                <a:latin typeface="Calibri" pitchFamily="34" charset="0"/>
-                <a:ea typeface="Calibri" pitchFamily="34" charset="-122"/>
-                <a:cs typeface="Calibri" pitchFamily="34" charset="-120"/>
-              </a:rPr>
-              <a:t>Chapter 3 — Comparing Models</a:t>
-            </a:r>
-            <a:endParaRPr lang="en-US" sz="2280" dirty="0"/>
-          </a:p>
+                <a:latin typeface="Courier New" pitchFamily="34" charset="0"/>
+                <a:ea typeface="Courier New" pitchFamily="34" charset="-122"/>
+                <a:cs typeface="Courier New" pitchFamily="34" charset="-120"/>
+              </a:rPr>
+              <a:t>chatClient.prompt()</a:t>
+            </a:r>
+            <a:endParaRPr lang="en-US" sz="1500" dirty="0"/>
+          </a:p>
+        </p:txBody>
+      </p:sp>
+      <p:sp>
+        <p:nvSpPr>
+          <p:cNvPr id="27" name="Text 25"/>
+          <p:cNvSpPr/>
+          <p:nvPr/>
+        </p:nvSpPr>
+        <p:spPr>
+          <a:xfrm>
+            <a:off x="960120" y="2240280"/>
+            <a:ext cx="10332720" cy="274320"/>
+          </a:xfrm>
+          <a:prstGeom prst="rect">
+            <a:avLst/>
+          </a:prstGeom>
+          <a:noFill/>
+          <a:ln/>
+        </p:spPr>
+        <p:txBody>
+          <a:bodyPr wrap="square" lIns="0" tIns="0" rIns="0" bIns="0" rtlCol="0" anchor="t"/>
+          <a:lstStyle/>
           <a:p>
             <a:pPr indent="0" marL="0">
-              <a:lnSpc>
-                <a:spcPct val="125000"/>
-              </a:lnSpc>
-              <a:buNone/>
-            </a:pPr>
-            <a:r>
-              <a:rPr lang="en-US" sz="1740" dirty="0">
-                <a:solidFill>
-                  <a:srgbClr val="B8C0D0"/>
-                </a:solidFill>
-                <a:latin typeface="Calibri" pitchFamily="34" charset="0"/>
-                <a:ea typeface="Calibri" pitchFamily="34" charset="-122"/>
-                <a:cs typeface="Calibri" pitchFamily="34" charset="-120"/>
-              </a:rPr>
-              <a:t>Run mistral, codellama, and phi3 side by side — swap models with</a:t>
-            </a:r>
-            <a:endParaRPr lang="en-US" sz="2280" dirty="0"/>
-          </a:p>
-          <a:p>
+              <a:buNone/>
+            </a:pPr>
+            <a:r>
+              <a:rPr lang="en-US" sz="1500" dirty="0">
+                <a:solidFill>
+                  <a:srgbClr val="E5E9F0"/>
+                </a:solidFill>
+                <a:latin typeface="Courier New" pitchFamily="34" charset="0"/>
+                <a:ea typeface="Courier New" pitchFamily="34" charset="-122"/>
+                <a:cs typeface="Courier New" pitchFamily="34" charset="-120"/>
+              </a:rPr>
+              <a:t>    .options(</a:t>
+            </a:r>
             <a:pPr indent="0" marL="0">
-              <a:lnSpc>
-                <a:spcPct val="125000"/>
-              </a:lnSpc>
-              <a:buNone/>
-            </a:pPr>
-            <a:r>
-              <a:rPr lang="en-US" sz="1740" dirty="0">
-                <a:solidFill>
-                  <a:srgbClr val="B8C0D0"/>
-                </a:solidFill>
-                <a:latin typeface="Calibri" pitchFamily="34" charset="0"/>
-                <a:ea typeface="Calibri" pitchFamily="34" charset="-122"/>
-                <a:cs typeface="Calibri" pitchFamily="34" charset="-120"/>
-              </a:rPr>
-              <a:t>one line of config, or per request, and compare their answers.</a:t>
-            </a:r>
-            <a:endParaRPr lang="en-US" sz="2280" dirty="0"/>
+              <a:buNone/>
+            </a:pPr>
+            <a:r>
+              <a:rPr lang="en-US" sz="1500" dirty="0">
+                <a:solidFill>
+                  <a:srgbClr val="F2A93B"/>
+                </a:solidFill>
+                <a:latin typeface="Courier New" pitchFamily="34" charset="0"/>
+                <a:ea typeface="Courier New" pitchFamily="34" charset="-122"/>
+                <a:cs typeface="Courier New" pitchFamily="34" charset="-120"/>
+              </a:rPr>
+              <a:t>ChatOptions</a:t>
+            </a:r>
+            <a:pPr indent="0" marL="0">
+              <a:buNone/>
+            </a:pPr>
+            <a:r>
+              <a:rPr lang="en-US" sz="1500" dirty="0">
+                <a:solidFill>
+                  <a:srgbClr val="E5E9F0"/>
+                </a:solidFill>
+                <a:latin typeface="Courier New" pitchFamily="34" charset="0"/>
+                <a:ea typeface="Courier New" pitchFamily="34" charset="-122"/>
+                <a:cs typeface="Courier New" pitchFamily="34" charset="-120"/>
+              </a:rPr>
+              <a:t>.builder()</a:t>
+            </a:r>
+            <a:endParaRPr lang="en-US" sz="1500" dirty="0"/>
+          </a:p>
+        </p:txBody>
+      </p:sp>
+      <p:sp>
+        <p:nvSpPr>
+          <p:cNvPr id="28" name="Text 26"/>
+          <p:cNvSpPr/>
+          <p:nvPr/>
+        </p:nvSpPr>
+        <p:spPr>
+          <a:xfrm>
+            <a:off x="960120" y="2514600"/>
+            <a:ext cx="10332720" cy="274320"/>
+          </a:xfrm>
+          <a:prstGeom prst="rect">
+            <a:avLst/>
+          </a:prstGeom>
+          <a:noFill/>
+          <a:ln/>
+        </p:spPr>
+        <p:txBody>
+          <a:bodyPr wrap="square" lIns="0" tIns="0" rIns="0" bIns="0" rtlCol="0" anchor="t"/>
+          <a:lstStyle/>
+          <a:p>
+            <a:pPr indent="0" marL="0">
+              <a:buNone/>
+            </a:pPr>
+            <a:r>
+              <a:rPr lang="en-US" sz="1500" dirty="0">
+                <a:solidFill>
+                  <a:srgbClr val="E5E9F0"/>
+                </a:solidFill>
+                <a:latin typeface="Courier New" pitchFamily="34" charset="0"/>
+                <a:ea typeface="Courier New" pitchFamily="34" charset="-122"/>
+                <a:cs typeface="Courier New" pitchFamily="34" charset="-120"/>
+              </a:rPr>
+              <a:t>        .temperature(</a:t>
+            </a:r>
+            <a:pPr indent="0" marL="0">
+              <a:buNone/>
+            </a:pPr>
+            <a:r>
+              <a:rPr lang="en-US" sz="1500" dirty="0">
+                <a:solidFill>
+                  <a:srgbClr val="5FE0C5"/>
+                </a:solidFill>
+                <a:latin typeface="Courier New" pitchFamily="34" charset="0"/>
+                <a:ea typeface="Courier New" pitchFamily="34" charset="-122"/>
+                <a:cs typeface="Courier New" pitchFamily="34" charset="-120"/>
+              </a:rPr>
+              <a:t>0.0</a:t>
+            </a:r>
+            <a:pPr indent="0" marL="0">
+              <a:buNone/>
+            </a:pPr>
+            <a:r>
+              <a:rPr lang="en-US" sz="1500" dirty="0">
+                <a:solidFill>
+                  <a:srgbClr val="E5E9F0"/>
+                </a:solidFill>
+                <a:latin typeface="Courier New" pitchFamily="34" charset="0"/>
+                <a:ea typeface="Courier New" pitchFamily="34" charset="-122"/>
+                <a:cs typeface="Courier New" pitchFamily="34" charset="-120"/>
+              </a:rPr>
+              <a:t>).maxTokens(</a:t>
+            </a:r>
+            <a:pPr indent="0" marL="0">
+              <a:buNone/>
+            </a:pPr>
+            <a:r>
+              <a:rPr lang="en-US" sz="1500" dirty="0">
+                <a:solidFill>
+                  <a:srgbClr val="5FE0C5"/>
+                </a:solidFill>
+                <a:latin typeface="Courier New" pitchFamily="34" charset="0"/>
+                <a:ea typeface="Courier New" pitchFamily="34" charset="-122"/>
+                <a:cs typeface="Courier New" pitchFamily="34" charset="-120"/>
+              </a:rPr>
+              <a:t>150</a:t>
+            </a:r>
+            <a:pPr indent="0" marL="0">
+              <a:buNone/>
+            </a:pPr>
+            <a:r>
+              <a:rPr lang="en-US" sz="1500" dirty="0">
+                <a:solidFill>
+                  <a:srgbClr val="E5E9F0"/>
+                </a:solidFill>
+                <a:latin typeface="Courier New" pitchFamily="34" charset="0"/>
+                <a:ea typeface="Courier New" pitchFamily="34" charset="-122"/>
+                <a:cs typeface="Courier New" pitchFamily="34" charset="-120"/>
+              </a:rPr>
+              <a:t>))</a:t>
+            </a:r>
+            <a:endParaRPr lang="en-US" sz="1500" dirty="0"/>
+          </a:p>
+        </p:txBody>
+      </p:sp>
+      <p:sp>
+        <p:nvSpPr>
+          <p:cNvPr id="29" name="Text 27"/>
+          <p:cNvSpPr/>
+          <p:nvPr/>
+        </p:nvSpPr>
+        <p:spPr>
+          <a:xfrm>
+            <a:off x="960120" y="2788920"/>
+            <a:ext cx="10332720" cy="274320"/>
+          </a:xfrm>
+          <a:prstGeom prst="rect">
+            <a:avLst/>
+          </a:prstGeom>
+          <a:noFill/>
+          <a:ln/>
+        </p:spPr>
+        <p:txBody>
+          <a:bodyPr wrap="square" lIns="0" tIns="0" rIns="0" bIns="0" rtlCol="0" anchor="t"/>
+          <a:lstStyle/>
+          <a:p>
+            <a:pPr indent="0" marL="0">
+              <a:buNone/>
+            </a:pPr>
+            <a:r>
+              <a:rPr lang="en-US" sz="1500" dirty="0">
+                <a:solidFill>
+                  <a:srgbClr val="E5E9F0"/>
+                </a:solidFill>
+                <a:latin typeface="Courier New" pitchFamily="34" charset="0"/>
+                <a:ea typeface="Courier New" pitchFamily="34" charset="-122"/>
+                <a:cs typeface="Courier New" pitchFamily="34" charset="-120"/>
+              </a:rPr>
+              <a:t>    .user(question).call().content();</a:t>
+            </a:r>
+            <a:endParaRPr lang="en-US" sz="1500" dirty="0"/>
+          </a:p>
+        </p:txBody>
+      </p:sp>
+      <p:sp>
+        <p:nvSpPr>
+          <p:cNvPr id="30" name="Text 28"/>
+          <p:cNvSpPr/>
+          <p:nvPr/>
+        </p:nvSpPr>
+        <p:spPr>
+          <a:xfrm>
+            <a:off x="960120" y="3063240"/>
+            <a:ext cx="10332720" cy="274320"/>
+          </a:xfrm>
+          <a:prstGeom prst="rect">
+            <a:avLst/>
+          </a:prstGeom>
+          <a:noFill/>
+          <a:ln/>
+        </p:spPr>
+        <p:txBody>
+          <a:bodyPr wrap="square" lIns="0" tIns="0" rIns="0" bIns="0" rtlCol="0" anchor="t"/>
+          <a:lstStyle/>
+          <a:p>
+            <a:pPr indent="0" marL="0">
+              <a:buNone/>
+            </a:pPr>
+            <a:endParaRPr lang="en-US" sz="1500" dirty="0"/>
+          </a:p>
+        </p:txBody>
+      </p:sp>
+      <p:sp>
+        <p:nvSpPr>
+          <p:cNvPr id="31" name="Text 29"/>
+          <p:cNvSpPr/>
+          <p:nvPr/>
+        </p:nvSpPr>
+        <p:spPr>
+          <a:xfrm>
+            <a:off x="960120" y="3337560"/>
+            <a:ext cx="10332720" cy="274320"/>
+          </a:xfrm>
+          <a:prstGeom prst="rect">
+            <a:avLst/>
+          </a:prstGeom>
+          <a:noFill/>
+          <a:ln/>
+        </p:spPr>
+        <p:txBody>
+          <a:bodyPr wrap="square" lIns="0" tIns="0" rIns="0" bIns="0" rtlCol="0" anchor="t"/>
+          <a:lstStyle/>
+          <a:p>
+            <a:pPr indent="0" marL="0">
+              <a:buNone/>
+            </a:pPr>
+            <a:r>
+              <a:rPr lang="en-US" sz="1500" dirty="0">
+                <a:solidFill>
+                  <a:srgbClr val="8B98AC"/>
+                </a:solidFill>
+                <a:latin typeface="Courier New" pitchFamily="34" charset="0"/>
+                <a:ea typeface="Courier New" pitchFamily="34" charset="-122"/>
+                <a:cs typeface="Courier New" pitchFamily="34" charset="-120"/>
+              </a:rPr>
+              <a:t>// CREATIVE — warm, generous budget</a:t>
+            </a:r>
+            <a:endParaRPr lang="en-US" sz="1500" dirty="0"/>
+          </a:p>
+        </p:txBody>
+      </p:sp>
+      <p:sp>
+        <p:nvSpPr>
+          <p:cNvPr id="32" name="Text 30"/>
+          <p:cNvSpPr/>
+          <p:nvPr/>
+        </p:nvSpPr>
+        <p:spPr>
+          <a:xfrm>
+            <a:off x="960120" y="3611880"/>
+            <a:ext cx="10332720" cy="274320"/>
+          </a:xfrm>
+          <a:prstGeom prst="rect">
+            <a:avLst/>
+          </a:prstGeom>
+          <a:noFill/>
+          <a:ln/>
+        </p:spPr>
+        <p:txBody>
+          <a:bodyPr wrap="square" lIns="0" tIns="0" rIns="0" bIns="0" rtlCol="0" anchor="t"/>
+          <a:lstStyle/>
+          <a:p>
+            <a:pPr indent="0" marL="0">
+              <a:buNone/>
+            </a:pPr>
+            <a:r>
+              <a:rPr lang="en-US" sz="1500" dirty="0">
+                <a:solidFill>
+                  <a:srgbClr val="E5E9F0"/>
+                </a:solidFill>
+                <a:latin typeface="Courier New" pitchFamily="34" charset="0"/>
+                <a:ea typeface="Courier New" pitchFamily="34" charset="-122"/>
+                <a:cs typeface="Courier New" pitchFamily="34" charset="-120"/>
+              </a:rPr>
+              <a:t>chatClient.prompt()</a:t>
+            </a:r>
+            <a:endParaRPr lang="en-US" sz="1500" dirty="0"/>
+          </a:p>
+        </p:txBody>
+      </p:sp>
+      <p:sp>
+        <p:nvSpPr>
+          <p:cNvPr id="33" name="Text 31"/>
+          <p:cNvSpPr/>
+          <p:nvPr/>
+        </p:nvSpPr>
+        <p:spPr>
+          <a:xfrm>
+            <a:off x="960120" y="3886200"/>
+            <a:ext cx="10332720" cy="274320"/>
+          </a:xfrm>
+          <a:prstGeom prst="rect">
+            <a:avLst/>
+          </a:prstGeom>
+          <a:noFill/>
+          <a:ln/>
+        </p:spPr>
+        <p:txBody>
+          <a:bodyPr wrap="square" lIns="0" tIns="0" rIns="0" bIns="0" rtlCol="0" anchor="t"/>
+          <a:lstStyle/>
+          <a:p>
+            <a:pPr indent="0" marL="0">
+              <a:buNone/>
+            </a:pPr>
+            <a:r>
+              <a:rPr lang="en-US" sz="1500" dirty="0">
+                <a:solidFill>
+                  <a:srgbClr val="E5E9F0"/>
+                </a:solidFill>
+                <a:latin typeface="Courier New" pitchFamily="34" charset="0"/>
+                <a:ea typeface="Courier New" pitchFamily="34" charset="-122"/>
+                <a:cs typeface="Courier New" pitchFamily="34" charset="-120"/>
+              </a:rPr>
+              <a:t>    .options(</a:t>
+            </a:r>
+            <a:pPr indent="0" marL="0">
+              <a:buNone/>
+            </a:pPr>
+            <a:r>
+              <a:rPr lang="en-US" sz="1500" dirty="0">
+                <a:solidFill>
+                  <a:srgbClr val="F2A93B"/>
+                </a:solidFill>
+                <a:latin typeface="Courier New" pitchFamily="34" charset="0"/>
+                <a:ea typeface="Courier New" pitchFamily="34" charset="-122"/>
+                <a:cs typeface="Courier New" pitchFamily="34" charset="-120"/>
+              </a:rPr>
+              <a:t>ChatOptions</a:t>
+            </a:r>
+            <a:pPr indent="0" marL="0">
+              <a:buNone/>
+            </a:pPr>
+            <a:r>
+              <a:rPr lang="en-US" sz="1500" dirty="0">
+                <a:solidFill>
+                  <a:srgbClr val="E5E9F0"/>
+                </a:solidFill>
+                <a:latin typeface="Courier New" pitchFamily="34" charset="0"/>
+                <a:ea typeface="Courier New" pitchFamily="34" charset="-122"/>
+                <a:cs typeface="Courier New" pitchFamily="34" charset="-120"/>
+              </a:rPr>
+              <a:t>.builder()</a:t>
+            </a:r>
+            <a:endParaRPr lang="en-US" sz="1500" dirty="0"/>
+          </a:p>
+        </p:txBody>
+      </p:sp>
+      <p:sp>
+        <p:nvSpPr>
+          <p:cNvPr id="34" name="Text 32"/>
+          <p:cNvSpPr/>
+          <p:nvPr/>
+        </p:nvSpPr>
+        <p:spPr>
+          <a:xfrm>
+            <a:off x="960120" y="4160520"/>
+            <a:ext cx="10332720" cy="274320"/>
+          </a:xfrm>
+          <a:prstGeom prst="rect">
+            <a:avLst/>
+          </a:prstGeom>
+          <a:noFill/>
+          <a:ln/>
+        </p:spPr>
+        <p:txBody>
+          <a:bodyPr wrap="square" lIns="0" tIns="0" rIns="0" bIns="0" rtlCol="0" anchor="t"/>
+          <a:lstStyle/>
+          <a:p>
+            <a:pPr indent="0" marL="0">
+              <a:buNone/>
+            </a:pPr>
+            <a:r>
+              <a:rPr lang="en-US" sz="1500" dirty="0">
+                <a:solidFill>
+                  <a:srgbClr val="E5E9F0"/>
+                </a:solidFill>
+                <a:latin typeface="Courier New" pitchFamily="34" charset="0"/>
+                <a:ea typeface="Courier New" pitchFamily="34" charset="-122"/>
+                <a:cs typeface="Courier New" pitchFamily="34" charset="-120"/>
+              </a:rPr>
+              <a:t>        .temperature(</a:t>
+            </a:r>
+            <a:pPr indent="0" marL="0">
+              <a:buNone/>
+            </a:pPr>
+            <a:r>
+              <a:rPr lang="en-US" sz="1500" dirty="0">
+                <a:solidFill>
+                  <a:srgbClr val="5FE0C5"/>
+                </a:solidFill>
+                <a:latin typeface="Courier New" pitchFamily="34" charset="0"/>
+                <a:ea typeface="Courier New" pitchFamily="34" charset="-122"/>
+                <a:cs typeface="Courier New" pitchFamily="34" charset="-120"/>
+              </a:rPr>
+              <a:t>0.9</a:t>
+            </a:r>
+            <a:pPr indent="0" marL="0">
+              <a:buNone/>
+            </a:pPr>
+            <a:r>
+              <a:rPr lang="en-US" sz="1500" dirty="0">
+                <a:solidFill>
+                  <a:srgbClr val="E5E9F0"/>
+                </a:solidFill>
+                <a:latin typeface="Courier New" pitchFamily="34" charset="0"/>
+                <a:ea typeface="Courier New" pitchFamily="34" charset="-122"/>
+                <a:cs typeface="Courier New" pitchFamily="34" charset="-120"/>
+              </a:rPr>
+              <a:t>).maxTokens(</a:t>
+            </a:r>
+            <a:pPr indent="0" marL="0">
+              <a:buNone/>
+            </a:pPr>
+            <a:r>
+              <a:rPr lang="en-US" sz="1500" dirty="0">
+                <a:solidFill>
+                  <a:srgbClr val="5FE0C5"/>
+                </a:solidFill>
+                <a:latin typeface="Courier New" pitchFamily="34" charset="0"/>
+                <a:ea typeface="Courier New" pitchFamily="34" charset="-122"/>
+                <a:cs typeface="Courier New" pitchFamily="34" charset="-120"/>
+              </a:rPr>
+              <a:t>800</a:t>
+            </a:r>
+            <a:pPr indent="0" marL="0">
+              <a:buNone/>
+            </a:pPr>
+            <a:r>
+              <a:rPr lang="en-US" sz="1500" dirty="0">
+                <a:solidFill>
+                  <a:srgbClr val="E5E9F0"/>
+                </a:solidFill>
+                <a:latin typeface="Courier New" pitchFamily="34" charset="0"/>
+                <a:ea typeface="Courier New" pitchFamily="34" charset="-122"/>
+                <a:cs typeface="Courier New" pitchFamily="34" charset="-120"/>
+              </a:rPr>
+              <a:t>))</a:t>
+            </a:r>
+            <a:endParaRPr lang="en-US" sz="1500" dirty="0"/>
+          </a:p>
+        </p:txBody>
+      </p:sp>
+      <p:sp>
+        <p:nvSpPr>
+          <p:cNvPr id="35" name="Text 33"/>
+          <p:cNvSpPr/>
+          <p:nvPr/>
+        </p:nvSpPr>
+        <p:spPr>
+          <a:xfrm>
+            <a:off x="960120" y="4434840"/>
+            <a:ext cx="10332720" cy="274320"/>
+          </a:xfrm>
+          <a:prstGeom prst="rect">
+            <a:avLst/>
+          </a:prstGeom>
+          <a:noFill/>
+          <a:ln/>
+        </p:spPr>
+        <p:txBody>
+          <a:bodyPr wrap="square" lIns="0" tIns="0" rIns="0" bIns="0" rtlCol="0" anchor="t"/>
+          <a:lstStyle/>
+          <a:p>
+            <a:pPr indent="0" marL="0">
+              <a:buNone/>
+            </a:pPr>
+            <a:r>
+              <a:rPr lang="en-US" sz="1500" dirty="0">
+                <a:solidFill>
+                  <a:srgbClr val="E5E9F0"/>
+                </a:solidFill>
+                <a:latin typeface="Courier New" pitchFamily="34" charset="0"/>
+                <a:ea typeface="Courier New" pitchFamily="34" charset="-122"/>
+                <a:cs typeface="Courier New" pitchFamily="34" charset="-120"/>
+              </a:rPr>
+              <a:t>    .user(question).call().content();</a:t>
+            </a:r>
+            <a:endParaRPr lang="en-US" sz="1500" dirty="0"/>
           </a:p>
         </p:txBody>
       </p:sp>
@@ -10571,7 +13224,7 @@
                 <a:ea typeface="Courier New" pitchFamily="34" charset="-122"/>
                 <a:cs typeface="Courier New" pitchFamily="34" charset="-120"/>
               </a:rPr>
-              <a:t>9 / 9</a:t>
+              <a:t>9 / 11</a:t>
             </a:r>
             <a:endParaRPr lang="en-US" sz="1080" dirty="0"/>
           </a:p>
@@ -10610,7 +13263,7 @@
                 <a:ea typeface="Courier New" pitchFamily="34" charset="-122"/>
                 <a:cs typeface="Courier New" pitchFamily="34" charset="-120"/>
               </a:rPr>
-              <a:t>CREDITS &amp; THANKS</a:t>
+              <a:t>RECAP</a:t>
             </a:r>
             <a:endParaRPr lang="en-US" sz="1440" dirty="0"/>
           </a:p>
@@ -10649,7 +13302,7 @@
                 <a:ea typeface="Courier New" pitchFamily="34" charset="-122"/>
                 <a:cs typeface="Courier New" pitchFamily="34" charset="-120"/>
               </a:rPr>
-              <a:t>This isn't my merit</a:t>
+              <a:t>What you can do now</a:t>
             </a:r>
             <a:endParaRPr lang="en-US" sz="3360" dirty="0"/>
           </a:p>
@@ -10663,37 +13316,101 @@
         </p:nvSpPr>
         <p:spPr>
           <a:xfrm>
-            <a:off x="640080" y="1371600"/>
-            <a:ext cx="10881360" cy="731520"/>
-          </a:xfrm>
-          <a:prstGeom prst="rect">
-            <a:avLst/>
-          </a:prstGeom>
-          <a:noFill/>
-          <a:ln/>
-        </p:spPr>
-        <p:txBody>
-          <a:bodyPr wrap="square" lIns="0" tIns="0" rIns="0" bIns="0" rtlCol="0" anchor="ctr"/>
-          <a:lstStyle/>
-          <a:p>
-            <a:pPr algn="ctr" indent="0" marL="0">
-              <a:lnSpc>
-                <a:spcPct val="120000"/>
-              </a:lnSpc>
-              <a:buNone/>
-            </a:pPr>
-            <a:r>
-              <a:rPr lang="en-US" sz="1920" dirty="0">
-                <a:solidFill>
-                  <a:srgbClr val="B8C0D0"/>
+            <a:off x="640080" y="1417320"/>
+            <a:ext cx="10881360" cy="2011680"/>
+          </a:xfrm>
+          <a:prstGeom prst="rect">
+            <a:avLst/>
+          </a:prstGeom>
+          <a:noFill/>
+          <a:ln/>
+        </p:spPr>
+        <p:txBody>
+          <a:bodyPr wrap="square" lIns="0" tIns="0" rIns="0" bIns="0" rtlCol="0" anchor="t"/>
+          <a:lstStyle/>
+          <a:p>
+            <a:pPr marL="342900" indent="-342900">
+              <a:spcAft>
+                <a:spcPts val="1200"/>
+              </a:spcAft>
+              <a:buSzPct val="100000"/>
+              <a:buChar char="•"/>
+            </a:pPr>
+            <a:r>
+              <a:rPr lang="en-US" sz="2040" dirty="0">
+                <a:solidFill>
+                  <a:srgbClr val="E5E9F0"/>
                 </a:solidFill>
                 <a:latin typeface="Calibri" pitchFamily="34" charset="0"/>
                 <a:ea typeface="Calibri" pitchFamily="34" charset="-122"/>
                 <a:cs typeface="Calibri" pitchFamily="34" charset="-120"/>
               </a:rPr>
-              <a:t>Everything in this series is built on the work of open-source projects and their communities. I only learned from them and shared what I built.</a:t>
-            </a:r>
-            <a:endParaRPr lang="en-US" sz="1920" dirty="0"/>
+              <a:t>Explain tokens, context windows, and why length varies</a:t>
+            </a:r>
+            <a:endParaRPr lang="en-US" sz="2040" dirty="0"/>
+          </a:p>
+          <a:p>
+            <a:pPr marL="342900" indent="-342900">
+              <a:spcAft>
+                <a:spcPts val="1200"/>
+              </a:spcAft>
+              <a:buSzPct val="100000"/>
+              <a:buChar char="•"/>
+            </a:pPr>
+            <a:r>
+              <a:rPr lang="en-US" sz="2040" dirty="0">
+                <a:solidFill>
+                  <a:srgbClr val="E5E9F0"/>
+                </a:solidFill>
+                <a:latin typeface="Calibri" pitchFamily="34" charset="0"/>
+                <a:ea typeface="Calibri" pitchFamily="34" charset="-122"/>
+                <a:cs typeface="Calibri" pitchFamily="34" charset="-120"/>
+              </a:rPr>
+              <a:t>Control response length with maxTokens</a:t>
+            </a:r>
+            <a:endParaRPr lang="en-US" sz="2040" dirty="0"/>
+          </a:p>
+          <a:p>
+            <a:pPr marL="342900" indent="-342900">
+              <a:spcAft>
+                <a:spcPts val="1200"/>
+              </a:spcAft>
+              <a:buSzPct val="100000"/>
+              <a:buChar char="•"/>
+            </a:pPr>
+            <a:r>
+              <a:rPr lang="en-US" sz="2040" dirty="0">
+                <a:solidFill>
+                  <a:srgbClr val="E5E9F0"/>
+                </a:solidFill>
+                <a:latin typeface="Calibri" pitchFamily="34" charset="0"/>
+                <a:ea typeface="Calibri" pitchFamily="34" charset="-122"/>
+                <a:cs typeface="Calibri" pitchFamily="34" charset="-120"/>
+              </a:rPr>
+              <a:t>Tune temperature per use case — precise vs. creative</a:t>
+            </a:r>
+            <a:endParaRPr lang="en-US" sz="2040" dirty="0"/>
+          </a:p>
+          <a:p>
+            <a:pPr marL="342900" indent="-342900">
+              <a:spcAft>
+                <a:spcPts val="1200"/>
+              </a:spcAft>
+              <a:buSzPct val="100000"/>
+              <a:buChar char="•"/>
+            </a:pPr>
+            <a:r>
+              <a:rPr lang="en-US" sz="2040" dirty="0">
+                <a:solidFill>
+                  <a:srgbClr val="E5E9F0"/>
+                </a:solidFill>
+                <a:latin typeface="Calibri" pitchFamily="34" charset="0"/>
+                <a:ea typeface="Calibri" pitchFamily="34" charset="-122"/>
+                <a:cs typeface="Calibri" pitchFamily="34" charset="-120"/>
+              </a:rPr>
+              <a:t>Understand how ChatClient sits on top of ChatModel</a:t>
+            </a:r>
+            <a:endParaRPr lang="en-US" sz="2040" dirty="0"/>
           </a:p>
         </p:txBody>
       </p:sp>
@@ -10705,18 +13422,18 @@
         </p:nvSpPr>
         <p:spPr>
           <a:xfrm>
-            <a:off x="822960" y="2423160"/>
-            <a:ext cx="5029200" cy="2011680"/>
+            <a:off x="640080" y="3566160"/>
+            <a:ext cx="10881360" cy="1737360"/>
           </a:xfrm>
           <a:prstGeom prst="roundRect">
             <a:avLst>
-              <a:gd name="adj" fmla="val 5455"/>
+              <a:gd name="adj" fmla="val 6316"/>
             </a:avLst>
           </a:prstGeom>
           <a:solidFill>
             <a:srgbClr val="121A2E"/>
           </a:solidFill>
-          <a:ln w="19050">
+          <a:ln w="15875">
             <a:solidFill>
               <a:srgbClr val="5FE0C5"/>
             </a:solidFill>
@@ -10739,8 +13456,8 @@
         </p:nvSpPr>
         <p:spPr>
           <a:xfrm>
-            <a:off x="1143000" y="2697480"/>
-            <a:ext cx="4389120" cy="548640"/>
+            <a:off x="914400" y="3749040"/>
+            <a:ext cx="3657600" cy="274320"/>
           </a:xfrm>
           <a:prstGeom prst="rect">
             <a:avLst/>
@@ -10756,7 +13473,7 @@
               <a:buNone/>
             </a:pPr>
             <a:r>
-              <a:rPr lang="en-US" sz="2640" b="1" dirty="0">
+              <a:rPr lang="en-US" sz="1440" spc="200" kern="0" dirty="0">
                 <a:solidFill>
                   <a:srgbClr val="5FE0C5"/>
                 </a:solidFill>
@@ -10764,9 +13481,9 @@
                 <a:ea typeface="Courier New" pitchFamily="34" charset="-122"/>
                 <a:cs typeface="Courier New" pitchFamily="34" charset="-120"/>
               </a:rPr>
-              <a:t>Spring AI</a:t>
-            </a:r>
-            <a:endParaRPr lang="en-US" sz="2640" dirty="0"/>
+              <a:t>WHAT'S NEXT</a:t>
+            </a:r>
+            <a:endParaRPr lang="en-US" sz="1440" dirty="0"/>
           </a:p>
         </p:txBody>
       </p:sp>
@@ -10778,24 +13495,27 @@
         </p:nvSpPr>
         <p:spPr>
           <a:xfrm>
-            <a:off x="1143000" y="3337560"/>
-            <a:ext cx="4389120" cy="457200"/>
-          </a:xfrm>
-          <a:prstGeom prst="rect">
-            <a:avLst/>
-          </a:prstGeom>
-          <a:noFill/>
-          <a:ln/>
-        </p:spPr>
-        <p:txBody>
-          <a:bodyPr wrap="square" lIns="0" tIns="0" rIns="0" bIns="0" rtlCol="0" anchor="ctr"/>
+            <a:off x="914400" y="4069080"/>
+            <a:ext cx="10332720" cy="1143000"/>
+          </a:xfrm>
+          <a:prstGeom prst="rect">
+            <a:avLst/>
+          </a:prstGeom>
+          <a:noFill/>
+          <a:ln/>
+        </p:spPr>
+        <p:txBody>
+          <a:bodyPr wrap="square" lIns="0" tIns="0" rIns="0" bIns="0" rtlCol="0" anchor="t"/>
           <a:lstStyle/>
           <a:p>
             <a:pPr indent="0" marL="0">
-              <a:buNone/>
-            </a:pPr>
-            <a:r>
-              <a:rPr lang="en-US" sz="1560" dirty="0">
+              <a:lnSpc>
+                <a:spcPct val="125000"/>
+              </a:lnSpc>
+              <a:buNone/>
+            </a:pPr>
+            <a:r>
+              <a:rPr lang="en-US" sz="2280" b="1" dirty="0">
                 <a:solidFill>
                   <a:srgbClr val="E5E9F0"/>
                 </a:solidFill>
@@ -10803,377 +13523,49 @@
                 <a:ea typeface="Calibri" pitchFamily="34" charset="-122"/>
                 <a:cs typeface="Calibri" pitchFamily="34" charset="-120"/>
               </a:rPr>
-              <a:t>The AI integration layer for Spring</a:t>
-            </a:r>
-            <a:endParaRPr lang="en-US" sz="1560" dirty="0"/>
-          </a:p>
-        </p:txBody>
-      </p:sp>
-      <p:sp>
-        <p:nvSpPr>
-          <p:cNvPr id="24" name="Text 22"/>
-          <p:cNvSpPr/>
-          <p:nvPr/>
-        </p:nvSpPr>
-        <p:spPr>
-          <a:xfrm>
-            <a:off x="1143000" y="3840480"/>
-            <a:ext cx="4389120" cy="365760"/>
-          </a:xfrm>
-          <a:prstGeom prst="rect">
-            <a:avLst/>
-          </a:prstGeom>
-          <a:noFill/>
-          <a:ln/>
-        </p:spPr>
-        <p:txBody>
-          <a:bodyPr wrap="square" lIns="0" tIns="0" rIns="0" bIns="0" rtlCol="0" anchor="ctr"/>
-          <a:lstStyle/>
+              <a:t>Chapter 3 — Comparing Models</a:t>
+            </a:r>
+            <a:endParaRPr lang="en-US" sz="2280" dirty="0"/>
+          </a:p>
           <a:p>
             <a:pPr indent="0" marL="0">
-              <a:buNone/>
-            </a:pPr>
-            <a:r>
-              <a:rPr lang="en-US" sz="1440" dirty="0">
-                <a:solidFill>
-                  <a:srgbClr val="8B98AC"/>
-                </a:solidFill>
-                <a:latin typeface="Courier New" pitchFamily="34" charset="0"/>
-                <a:ea typeface="Courier New" pitchFamily="34" charset="-122"/>
-                <a:cs typeface="Courier New" pitchFamily="34" charset="-120"/>
-              </a:rPr>
-              <a:t>spring.io/projects/spring-ai</a:t>
-            </a:r>
-            <a:endParaRPr lang="en-US" sz="1440" dirty="0"/>
-          </a:p>
-        </p:txBody>
-      </p:sp>
-      <p:sp>
-        <p:nvSpPr>
-          <p:cNvPr id="25" name="Shape 23"/>
-          <p:cNvSpPr/>
-          <p:nvPr/>
-        </p:nvSpPr>
-        <p:spPr>
-          <a:xfrm>
-            <a:off x="6309360" y="2423160"/>
-            <a:ext cx="5029200" cy="2011680"/>
-          </a:xfrm>
-          <a:prstGeom prst="roundRect">
-            <a:avLst>
-              <a:gd name="adj" fmla="val 5455"/>
-            </a:avLst>
-          </a:prstGeom>
-          <a:solidFill>
-            <a:srgbClr val="121A2E"/>
-          </a:solidFill>
-          <a:ln w="19050">
-            <a:solidFill>
-              <a:srgbClr val="F2A93B"/>
-            </a:solidFill>
-            <a:prstDash val="solid"/>
-          </a:ln>
-          <a:effectLst>
-            <a:outerShdw sx="100000" sy="100000" kx="0" ky="0" algn="bl" rotWithShape="0" blurRad="101600" dist="38100" dir="2700000">
-              <a:srgbClr val="000000">
-                <a:alpha val="25000"/>
-              </a:srgbClr>
-            </a:outerShdw>
-          </a:effectLst>
-        </p:spPr>
-      </p:sp>
-      <p:sp>
-        <p:nvSpPr>
-          <p:cNvPr id="26" name="Text 24"/>
-          <p:cNvSpPr/>
-          <p:nvPr/>
-        </p:nvSpPr>
-        <p:spPr>
-          <a:xfrm>
-            <a:off x="6629400" y="2697480"/>
-            <a:ext cx="4389120" cy="548640"/>
-          </a:xfrm>
-          <a:prstGeom prst="rect">
-            <a:avLst/>
-          </a:prstGeom>
-          <a:noFill/>
-          <a:ln/>
-        </p:spPr>
-        <p:txBody>
-          <a:bodyPr wrap="square" lIns="0" tIns="0" rIns="0" bIns="0" rtlCol="0" anchor="ctr"/>
-          <a:lstStyle/>
-          <a:p>
-            <a:pPr indent="0" marL="0">
-              <a:buNone/>
-            </a:pPr>
-            <a:r>
-              <a:rPr lang="en-US" sz="2640" b="1" dirty="0">
-                <a:solidFill>
-                  <a:srgbClr val="F2A93B"/>
-                </a:solidFill>
-                <a:latin typeface="Courier New" pitchFamily="34" charset="0"/>
-                <a:ea typeface="Courier New" pitchFamily="34" charset="-122"/>
-                <a:cs typeface="Courier New" pitchFamily="34" charset="-120"/>
-              </a:rPr>
-              <a:t>Ollama</a:t>
-            </a:r>
-            <a:endParaRPr lang="en-US" sz="2640" dirty="0"/>
-          </a:p>
-        </p:txBody>
-      </p:sp>
-      <p:sp>
-        <p:nvSpPr>
-          <p:cNvPr id="27" name="Text 25"/>
-          <p:cNvSpPr/>
-          <p:nvPr/>
-        </p:nvSpPr>
-        <p:spPr>
-          <a:xfrm>
-            <a:off x="6629400" y="3337560"/>
-            <a:ext cx="4389120" cy="457200"/>
-          </a:xfrm>
-          <a:prstGeom prst="rect">
-            <a:avLst/>
-          </a:prstGeom>
-          <a:noFill/>
-          <a:ln/>
-        </p:spPr>
-        <p:txBody>
-          <a:bodyPr wrap="square" lIns="0" tIns="0" rIns="0" bIns="0" rtlCol="0" anchor="ctr"/>
-          <a:lstStyle/>
-          <a:p>
-            <a:pPr indent="0" marL="0">
-              <a:buNone/>
-            </a:pPr>
-            <a:r>
-              <a:rPr lang="en-US" sz="1560" dirty="0">
-                <a:solidFill>
-                  <a:srgbClr val="E5E9F0"/>
+              <a:lnSpc>
+                <a:spcPct val="125000"/>
+              </a:lnSpc>
+              <a:buNone/>
+            </a:pPr>
+            <a:r>
+              <a:rPr lang="en-US" sz="1740" dirty="0">
+                <a:solidFill>
+                  <a:srgbClr val="B8C0D0"/>
                 </a:solidFill>
                 <a:latin typeface="Calibri" pitchFamily="34" charset="0"/>
                 <a:ea typeface="Calibri" pitchFamily="34" charset="-122"/>
                 <a:cs typeface="Calibri" pitchFamily="34" charset="-120"/>
               </a:rPr>
-              <a:t>Run open LLMs locally</a:t>
-            </a:r>
-            <a:endParaRPr lang="en-US" sz="1560" dirty="0"/>
-          </a:p>
-        </p:txBody>
-      </p:sp>
-      <p:sp>
-        <p:nvSpPr>
-          <p:cNvPr id="28" name="Text 26"/>
-          <p:cNvSpPr/>
-          <p:nvPr/>
-        </p:nvSpPr>
-        <p:spPr>
-          <a:xfrm>
-            <a:off x="6629400" y="3840480"/>
-            <a:ext cx="4389120" cy="365760"/>
-          </a:xfrm>
-          <a:prstGeom prst="rect">
-            <a:avLst/>
-          </a:prstGeom>
-          <a:noFill/>
-          <a:ln/>
-        </p:spPr>
-        <p:txBody>
-          <a:bodyPr wrap="square" lIns="0" tIns="0" rIns="0" bIns="0" rtlCol="0" anchor="ctr"/>
-          <a:lstStyle/>
+              <a:t>Run mistral, codellama, and phi3 side by side — swap models with</a:t>
+            </a:r>
+            <a:endParaRPr lang="en-US" sz="2280" dirty="0"/>
+          </a:p>
           <a:p>
             <a:pPr indent="0" marL="0">
-              <a:buNone/>
-            </a:pPr>
-            <a:r>
-              <a:rPr lang="en-US" sz="1440" dirty="0">
-                <a:solidFill>
-                  <a:srgbClr val="8B98AC"/>
-                </a:solidFill>
-                <a:latin typeface="Courier New" pitchFamily="34" charset="0"/>
-                <a:ea typeface="Courier New" pitchFamily="34" charset="-122"/>
-                <a:cs typeface="Courier New" pitchFamily="34" charset="-120"/>
-              </a:rPr>
-              <a:t>ollama.com</a:t>
-            </a:r>
-            <a:endParaRPr lang="en-US" sz="1440" dirty="0"/>
-          </a:p>
-        </p:txBody>
-      </p:sp>
-      <p:sp>
-        <p:nvSpPr>
-          <p:cNvPr id="29" name="Shape 27"/>
-          <p:cNvSpPr/>
-          <p:nvPr/>
-        </p:nvSpPr>
-        <p:spPr>
-          <a:xfrm>
-            <a:off x="4251960" y="4892040"/>
-            <a:ext cx="3657600" cy="0"/>
-          </a:xfrm>
-          <a:prstGeom prst="line">
-            <a:avLst/>
-          </a:prstGeom>
-          <a:noFill/>
-          <a:ln w="12700">
-            <a:solidFill>
-              <a:srgbClr val="5B6478">
-                <a:alpha val="70000"/>
-              </a:srgbClr>
-            </a:solidFill>
-            <a:prstDash val="solid"/>
-          </a:ln>
-        </p:spPr>
-      </p:sp>
-      <p:sp>
-        <p:nvSpPr>
-          <p:cNvPr id="30" name="Shape 28"/>
-          <p:cNvSpPr/>
-          <p:nvPr/>
-        </p:nvSpPr>
-        <p:spPr>
-          <a:xfrm>
-            <a:off x="4210812" y="4850892"/>
-            <a:ext cx="82296" cy="82296"/>
-          </a:xfrm>
-          <a:prstGeom prst="ellipse">
-            <a:avLst/>
-          </a:prstGeom>
-          <a:solidFill>
-            <a:srgbClr val="0A0F1C"/>
-          </a:solidFill>
-          <a:ln w="19050">
-            <a:solidFill>
-              <a:srgbClr val="F2A93B"/>
-            </a:solidFill>
-            <a:prstDash val="solid"/>
-          </a:ln>
-        </p:spPr>
-      </p:sp>
-      <p:sp>
-        <p:nvSpPr>
-          <p:cNvPr id="31" name="Shape 29"/>
-          <p:cNvSpPr/>
-          <p:nvPr/>
-        </p:nvSpPr>
-        <p:spPr>
-          <a:xfrm>
-            <a:off x="6039612" y="4850892"/>
-            <a:ext cx="82296" cy="82296"/>
-          </a:xfrm>
-          <a:prstGeom prst="ellipse">
-            <a:avLst/>
-          </a:prstGeom>
-          <a:solidFill>
-            <a:srgbClr val="0A0F1C"/>
-          </a:solidFill>
-          <a:ln w="19050">
-            <a:solidFill>
-              <a:srgbClr val="8B98AC"/>
-            </a:solidFill>
-            <a:prstDash val="solid"/>
-          </a:ln>
-        </p:spPr>
-      </p:sp>
-      <p:sp>
-        <p:nvSpPr>
-          <p:cNvPr id="32" name="Shape 30"/>
-          <p:cNvSpPr/>
-          <p:nvPr/>
-        </p:nvSpPr>
-        <p:spPr>
-          <a:xfrm>
-            <a:off x="7868412" y="4850892"/>
-            <a:ext cx="82296" cy="82296"/>
-          </a:xfrm>
-          <a:prstGeom prst="ellipse">
-            <a:avLst/>
-          </a:prstGeom>
-          <a:solidFill>
-            <a:srgbClr val="0A0F1C"/>
-          </a:solidFill>
-          <a:ln w="19050">
-            <a:solidFill>
-              <a:srgbClr val="5FE0C5"/>
-            </a:solidFill>
-            <a:prstDash val="solid"/>
-          </a:ln>
-        </p:spPr>
-      </p:sp>
-      <p:sp>
-        <p:nvSpPr>
-          <p:cNvPr id="33" name="Text 31"/>
-          <p:cNvSpPr/>
-          <p:nvPr/>
-        </p:nvSpPr>
-        <p:spPr>
-          <a:xfrm>
-            <a:off x="0" y="5120640"/>
-            <a:ext cx="12161520" cy="457200"/>
-          </a:xfrm>
-          <a:prstGeom prst="rect">
-            <a:avLst/>
-          </a:prstGeom>
-          <a:noFill/>
-          <a:ln/>
-        </p:spPr>
-        <p:txBody>
-          <a:bodyPr wrap="square" lIns="0" tIns="0" rIns="0" bIns="0" rtlCol="0" anchor="ctr"/>
-          <a:lstStyle/>
-          <a:p>
-            <a:pPr algn="ctr" indent="0" marL="0">
-              <a:buNone/>
-            </a:pPr>
-            <a:r>
-              <a:rPr lang="en-US" sz="1680" dirty="0">
-                <a:solidFill>
-                  <a:srgbClr val="E5E9F0"/>
+              <a:lnSpc>
+                <a:spcPct val="125000"/>
+              </a:lnSpc>
+              <a:buNone/>
+            </a:pPr>
+            <a:r>
+              <a:rPr lang="en-US" sz="1740" dirty="0">
+                <a:solidFill>
+                  <a:srgbClr val="B8C0D0"/>
                 </a:solidFill>
                 <a:latin typeface="Calibri" pitchFamily="34" charset="0"/>
                 <a:ea typeface="Calibri" pitchFamily="34" charset="-122"/>
                 <a:cs typeface="Calibri" pitchFamily="34" charset="-120"/>
               </a:rPr>
-              <a:t>Shared with gratitude — all credit to their maintainers &amp; contributors.</a:t>
-            </a:r>
-            <a:endParaRPr lang="en-US" sz="1680" dirty="0"/>
-          </a:p>
-        </p:txBody>
-      </p:sp>
-      <p:sp>
-        <p:nvSpPr>
-          <p:cNvPr id="34" name="Text 32"/>
-          <p:cNvSpPr/>
-          <p:nvPr/>
-        </p:nvSpPr>
-        <p:spPr>
-          <a:xfrm>
-            <a:off x="0" y="5623560"/>
-            <a:ext cx="12161520" cy="365760"/>
-          </a:xfrm>
-          <a:prstGeom prst="rect">
-            <a:avLst/>
-          </a:prstGeom>
-          <a:noFill/>
-          <a:ln/>
-        </p:spPr>
-        <p:txBody>
-          <a:bodyPr wrap="square" lIns="0" tIns="0" rIns="0" bIns="0" rtlCol="0" anchor="ctr"/>
-          <a:lstStyle/>
-          <a:p>
-            <a:pPr algn="ctr" indent="0" marL="0">
-              <a:buNone/>
-            </a:pPr>
-            <a:r>
-              <a:rPr lang="en-US" sz="1440" dirty="0">
-                <a:solidFill>
-                  <a:srgbClr val="8B98AC"/>
-                </a:solidFill>
-                <a:latin typeface="Courier New" pitchFamily="34" charset="0"/>
-                <a:ea typeface="Courier New" pitchFamily="34" charset="-122"/>
-                <a:cs typeface="Courier New" pitchFamily="34" charset="-120"/>
-              </a:rPr>
-              <a:t>github.com/balajich/spring-ai-with-llama</a:t>
-            </a:r>
-            <a:endParaRPr lang="en-US" sz="1440" dirty="0"/>
+              <a:t>one line of config, or per request, and compare their answers.</a:t>
+            </a:r>
+            <a:endParaRPr lang="en-US" sz="2280" dirty="0"/>
           </a:p>
         </p:txBody>
       </p:sp>
